--- a/docs/꿀비_기술설명서.pptx
+++ b/docs/꿀비_기술설명서.pptx
@@ -3702,7 +3702,7 @@
         <p:spPr>
           <a:xfrm>
             <a:off x="4709160" y="2286000"/>
-            <a:ext cx="2782247" cy="3566160"/>
+            <a:ext cx="4063545" cy="3566160"/>
           </a:xfrm>
           <a:prstGeom prst="rect">
             <a:avLst/>
@@ -3765,7 +3765,7 @@
         <p:spPr>
           <a:xfrm>
             <a:off x="8366760" y="2286000"/>
-            <a:ext cx="3713066" cy="3246120"/>
+            <a:ext cx="3743253" cy="3017520"/>
           </a:xfrm>
           <a:prstGeom prst="rect">
             <a:avLst/>

--- a/docs/꿀비_기술설명서.pptx
+++ b/docs/꿀비_기술설명서.pptx
@@ -3807,6 +3807,45 @@
                 <a:latin typeface="맑은 고딕"/>
               </a:rPr>
               <a:t>자금 — 성격·추천 이유</a:t>
+            </a:r>
+          </a:p>
+        </p:txBody>
+      </p:sp>
+      <p:sp>
+        <p:nvSpPr>
+          <p:cNvPr id="12" name="TextBox 11"/>
+          <p:cNvSpPr txBox="1"/>
+          <p:nvPr/>
+        </p:nvSpPr>
+        <p:spPr>
+          <a:xfrm>
+            <a:off x="685800" y="6400800"/>
+            <a:ext cx="10789920" cy="320040"/>
+          </a:xfrm>
+          <a:prstGeom prst="rect">
+            <a:avLst/>
+          </a:prstGeom>
+          <a:noFill/>
+        </p:spPr>
+        <p:txBody>
+          <a:bodyPr wrap="square" anchor="t" lIns="0" rIns="0" tIns="0" bIns="0">
+            <a:spAutoFit/>
+          </a:bodyPr>
+          <a:lstStyle/>
+          <a:p>
+            <a:pPr algn="l">
+              <a:lnSpc>
+                <a:spcPct val="125000"/>
+              </a:lnSpc>
+            </a:pPr>
+            <a:r>
+              <a:rPr sz="1050" b="0">
+                <a:solidFill>
+                  <a:srgbClr val="6B6259"/>
+                </a:solidFill>
+                <a:latin typeface="맑은 고딕"/>
+              </a:rPr>
+              <a:t>그 밖의 결: 지원사업 찜(마감 D-day 모아보기) · 상담 리포트 인쇄/PDF · 음성으로 묻고 듣기 · 쉬운 용어 사전 · 금소법 검사기 직접 시험</a:t>
             </a:r>
           </a:p>
         </p:txBody>

--- a/docs/꿀비_기술설명서.pptx
+++ b/docs/꿀비_기술설명서.pptx
@@ -3845,7 +3845,7 @@
                 </a:solidFill>
                 <a:latin typeface="맑은 고딕"/>
               </a:rPr>
-              <a:t>그 밖의 결: 지원사업 찜(마감 D-day 모아보기) · 상담 리포트 인쇄/PDF · 음성으로 묻고 듣기 · 쉬운 용어 사전 · 금소법 검사기 직접 시험</a:t>
+              <a:t>그 밖의 결: 지원사업 찜(D-day 모아보기) + 원문 자동 재확인 RPA(마감·서식 변경 감지) · 상담 리포트 인쇄/PDF · 음성으로 묻고 듣기 · 금소법 검사기 직접 시험</a:t>
             </a:r>
           </a:p>
         </p:txBody>

--- a/docs/꿀비_기술설명서.pptx
+++ b/docs/꿀비_기술설명서.pptx
@@ -3702,7 +3702,7 @@
         <p:spPr>
           <a:xfrm>
             <a:off x="4709160" y="2286000"/>
-            <a:ext cx="4063545" cy="3566160"/>
+            <a:ext cx="3678776" cy="3566160"/>
           </a:xfrm>
           <a:prstGeom prst="rect">
             <a:avLst/>

--- a/docs/꿀비_기술설명서.pptx
+++ b/docs/꿀비_기술설명서.pptx
@@ -3845,7 +3845,7 @@
                 </a:solidFill>
                 <a:latin typeface="맑은 고딕"/>
               </a:rPr>
-              <a:t>그 밖의 결: 지원사업 찜(D-day 모아보기) + 원문 자동 재확인 RPA(마감·서식 변경 감지) · 상담 리포트 인쇄/PDF · 음성으로 묻고 듣기 · 금소법 검사기 직접 시험</a:t>
+              <a:t>그 밖의 결: 두 동네 비교(A vs B 요인 승부표) · 찜 D-day + RPA 원문 순찰 · 마감 캘린더(.ics) · 내 가게 원클릭 브리핑 · 상담 리포트 인쇄 · 음성 대화 · 금소법 검사기</a:t>
             </a:r>
           </a:p>
         </p:txBody>

--- a/docs/꿀비_기술설명서.pptx
+++ b/docs/꿀비_기술설명서.pptx
@@ -12357,7 +12357,7 @@
                 </a:solidFill>
                 <a:latin typeface="맑은 고딕"/>
               </a:rPr>
-              <a:t>데이터사이언스 · 생성 · 접근성 — 세 방향의 자유 기능</a:t>
+              <a:t>데이터사이언스 · RPA · 생성 · 접근성 — 자유 기능 여섯</a:t>
             </a:r>
           </a:p>
         </p:txBody>
@@ -12414,8 +12414,8 @@
         </p:nvSpPr>
         <p:spPr>
           <a:xfrm>
-            <a:off x="685800" y="1920240"/>
-            <a:ext cx="3401568" cy="3931920"/>
+            <a:off x="685800" y="1828800"/>
+            <a:ext cx="3401568" cy="2212848"/>
           </a:xfrm>
           <a:prstGeom prst="roundRect">
             <a:avLst>
@@ -12462,33 +12462,33 @@
         </p:nvSpPr>
         <p:spPr>
           <a:xfrm>
-            <a:off x="960120" y="2194560"/>
-            <a:ext cx="2834640" cy="457200"/>
-          </a:xfrm>
-          <a:prstGeom prst="rect">
-            <a:avLst/>
-          </a:prstGeom>
-          <a:noFill/>
-        </p:spPr>
-        <p:txBody>
-          <a:bodyPr wrap="square" anchor="t" lIns="0" rIns="0" tIns="0" bIns="0">
-            <a:spAutoFit/>
-          </a:bodyPr>
-          <a:lstStyle/>
-          <a:p>
-            <a:pPr algn="l">
-              <a:lnSpc>
-                <a:spcPct val="125000"/>
-              </a:lnSpc>
-            </a:pPr>
-            <a:r>
-              <a:rPr sz="1600" b="1">
+            <a:off x="914400" y="1993392"/>
+            <a:ext cx="2971800" cy="365760"/>
+          </a:xfrm>
+          <a:prstGeom prst="rect">
+            <a:avLst/>
+          </a:prstGeom>
+          <a:noFill/>
+        </p:spPr>
+        <p:txBody>
+          <a:bodyPr wrap="square" anchor="t" lIns="0" rIns="0" tIns="0" bIns="0">
+            <a:spAutoFit/>
+          </a:bodyPr>
+          <a:lstStyle/>
+          <a:p>
+            <a:pPr algn="l">
+              <a:lnSpc>
+                <a:spcPct val="125000"/>
+              </a:lnSpc>
+            </a:pPr>
+            <a:r>
+              <a:rPr sz="1450" b="1">
                 <a:solidFill>
                   <a:srgbClr val="38322A"/>
                 </a:solidFill>
                 <a:latin typeface="맑은 고딕"/>
               </a:rPr>
-              <a:t>닮은 상권 찾기</a:t>
+              <a:t>두 동네 비교</a:t>
             </a:r>
           </a:p>
         </p:txBody>
@@ -12501,33 +12501,33 @@
         </p:nvSpPr>
         <p:spPr>
           <a:xfrm>
-            <a:off x="960120" y="2697480"/>
-            <a:ext cx="2834640" cy="365760"/>
-          </a:xfrm>
-          <a:prstGeom prst="rect">
-            <a:avLst/>
-          </a:prstGeom>
-          <a:noFill/>
-        </p:spPr>
-        <p:txBody>
-          <a:bodyPr wrap="square" anchor="t" lIns="0" rIns="0" tIns="0" bIns="0">
-            <a:spAutoFit/>
-          </a:bodyPr>
-          <a:lstStyle/>
-          <a:p>
-            <a:pPr algn="l">
-              <a:lnSpc>
-                <a:spcPct val="125000"/>
-              </a:lnSpc>
-            </a:pPr>
-            <a:r>
-              <a:rPr sz="1100" b="1">
+            <a:off x="914400" y="2359152"/>
+            <a:ext cx="2971800" cy="320040"/>
+          </a:xfrm>
+          <a:prstGeom prst="rect">
+            <a:avLst/>
+          </a:prstGeom>
+          <a:noFill/>
+        </p:spPr>
+        <p:txBody>
+          <a:bodyPr wrap="square" anchor="t" lIns="0" rIns="0" tIns="0" bIns="0">
+            <a:spAutoFit/>
+          </a:bodyPr>
+          <a:lstStyle/>
+          <a:p>
+            <a:pPr algn="l">
+              <a:lnSpc>
+                <a:spcPct val="125000"/>
+              </a:lnSpc>
+            </a:pPr>
+            <a:r>
+              <a:rPr sz="1050" b="1">
                 <a:solidFill>
                   <a:srgbClr val="9A6B00"/>
                 </a:solidFill>
                 <a:latin typeface="맑은 고딕"/>
               </a:rPr>
-              <a:t>업종 구성 247차원 코사인 유사도</a:t>
+              <a:t>A vs B를 같은 자로</a:t>
             </a:r>
           </a:p>
         </p:txBody>
@@ -12540,81 +12540,65 @@
         </p:nvSpPr>
         <p:spPr>
           <a:xfrm>
-            <a:off x="960120" y="3200400"/>
-            <a:ext cx="2926080" cy="2377440"/>
-          </a:xfrm>
-          <a:prstGeom prst="rect">
-            <a:avLst/>
-          </a:prstGeom>
-          <a:noFill/>
-        </p:spPr>
-        <p:txBody>
-          <a:bodyPr wrap="square" anchor="t" lIns="0" rIns="0" tIns="0" bIns="0">
-            <a:spAutoFit/>
-          </a:bodyPr>
-          <a:lstStyle/>
-          <a:p>
-            <a:pPr algn="l">
-              <a:lnSpc>
-                <a:spcPct val="140000"/>
-              </a:lnSpc>
-            </a:pPr>
-            <a:r>
-              <a:rPr sz="1100" b="0">
+            <a:off x="914400" y="2697480"/>
+            <a:ext cx="3017520" cy="1280160"/>
+          </a:xfrm>
+          <a:prstGeom prst="rect">
+            <a:avLst/>
+          </a:prstGeom>
+          <a:noFill/>
+        </p:spPr>
+        <p:txBody>
+          <a:bodyPr wrap="square" anchor="t" lIns="0" rIns="0" tIns="0" bIns="0">
+            <a:spAutoFit/>
+          </a:bodyPr>
+          <a:lstStyle/>
+          <a:p>
+            <a:pPr algn="l">
+              <a:lnSpc>
+                <a:spcPct val="132000"/>
+              </a:lnSpc>
+            </a:pPr>
+            <a:r>
+              <a:rPr sz="1000" b="0">
                 <a:solidFill>
                   <a:srgbClr val="6B6259"/>
                 </a:solidFill>
                 <a:latin typeface="맑은 고딕"/>
               </a:rPr>
-              <a:t>연남동 ↔ 광안리·서교동·망원동</a:t>
-            </a:r>
-          </a:p>
-          <a:p>
-            <a:pPr algn="l">
-              <a:lnSpc>
-                <a:spcPct val="140000"/>
-              </a:lnSpc>
-            </a:pPr>
-            <a:r>
-              <a:rPr sz="1100" b="0">
+              <a:t>"연남동이랑 성수동 비교해줘" 한 마디로</a:t>
+            </a:r>
+          </a:p>
+          <a:p>
+            <a:pPr algn="l">
+              <a:lnSpc>
+                <a:spcPct val="132000"/>
+              </a:lnSpc>
+            </a:pPr>
+            <a:r>
+              <a:rPr sz="1000" b="0">
                 <a:solidFill>
                   <a:srgbClr val="6B6259"/>
                 </a:solidFill>
                 <a:latin typeface="맑은 고딕"/>
               </a:rPr>
-              <a:t>서면 ↔ 부평역·안양일번가</a:t>
-            </a:r>
-          </a:p>
-          <a:p>
-            <a:pPr algn="l">
-              <a:lnSpc>
-                <a:spcPct val="140000"/>
-              </a:lnSpc>
-            </a:pPr>
-            <a:r>
-              <a:rPr sz="1100" b="0">
+              <a:t>우세 판정 + 요인 6개 승부표 + 생활인구 대조.</a:t>
+            </a:r>
+          </a:p>
+          <a:p>
+            <a:pPr algn="l">
+              <a:lnSpc>
+                <a:spcPct val="132000"/>
+              </a:lnSpc>
+            </a:pPr>
+            <a:r>
+              <a:rPr sz="1000" b="0">
                 <a:solidFill>
                   <a:srgbClr val="6B6259"/>
                 </a:solidFill>
                 <a:latin typeface="맑은 고딕"/>
               </a:rPr>
-              <a:t>붙어 있는 동네가 아니라 '성격이 닮은' 동네.</a:t>
-            </a:r>
-          </a:p>
-          <a:p>
-            <a:pPr algn="l">
-              <a:lnSpc>
-                <a:spcPct val="140000"/>
-              </a:lnSpc>
-            </a:pPr>
-            <a:r>
-              <a:rPr sz="1100" b="0">
-                <a:solidFill>
-                  <a:srgbClr val="6B6259"/>
-                </a:solidFill>
-                <a:latin typeface="맑은 고딕"/>
-              </a:rPr>
-              <a:t>2호점·확장 후보의 출발점. 질의 0.4ms, 외부 의존 0.</a:t>
+              <a:t>후보 둘 사이의 고민을 화면 하나로.</a:t>
             </a:r>
           </a:p>
         </p:txBody>
@@ -12627,8 +12611,8 @@
         </p:nvSpPr>
         <p:spPr>
           <a:xfrm>
-            <a:off x="4361688" y="1920240"/>
-            <a:ext cx="3401568" cy="3931920"/>
+            <a:off x="4361688" y="1828800"/>
+            <a:ext cx="3401568" cy="2212848"/>
           </a:xfrm>
           <a:prstGeom prst="roundRect">
             <a:avLst>
@@ -12675,33 +12659,33 @@
         </p:nvSpPr>
         <p:spPr>
           <a:xfrm>
-            <a:off x="4636008" y="2194560"/>
-            <a:ext cx="2834640" cy="457200"/>
-          </a:xfrm>
-          <a:prstGeom prst="rect">
-            <a:avLst/>
-          </a:prstGeom>
-          <a:noFill/>
-        </p:spPr>
-        <p:txBody>
-          <a:bodyPr wrap="square" anchor="t" lIns="0" rIns="0" tIns="0" bIns="0">
-            <a:spAutoFit/>
-          </a:bodyPr>
-          <a:lstStyle/>
-          <a:p>
-            <a:pPr algn="l">
-              <a:lnSpc>
-                <a:spcPct val="125000"/>
-              </a:lnSpc>
-            </a:pPr>
-            <a:r>
-              <a:rPr sz="1600" b="1">
+            <a:off x="4590288" y="1993392"/>
+            <a:ext cx="2971800" cy="365760"/>
+          </a:xfrm>
+          <a:prstGeom prst="rect">
+            <a:avLst/>
+          </a:prstGeom>
+          <a:noFill/>
+        </p:spPr>
+        <p:txBody>
+          <a:bodyPr wrap="square" anchor="t" lIns="0" rIns="0" tIns="0" bIns="0">
+            <a:spAutoFit/>
+          </a:bodyPr>
+          <a:lstStyle/>
+          <a:p>
+            <a:pPr algn="l">
+              <a:lnSpc>
+                <a:spcPct val="125000"/>
+              </a:lnSpc>
+            </a:pPr>
+            <a:r>
+              <a:rPr sz="1450" b="1">
                 <a:solidFill>
                   <a:srgbClr val="38322A"/>
                 </a:solidFill>
                 <a:latin typeface="맑은 고딕"/>
               </a:rPr>
-              <a:t>민원서 초안 생성</a:t>
+              <a:t>RPA 원문 순찰</a:t>
             </a:r>
           </a:p>
         </p:txBody>
@@ -12714,33 +12698,33 @@
         </p:nvSpPr>
         <p:spPr>
           <a:xfrm>
-            <a:off x="4636008" y="2697480"/>
-            <a:ext cx="2834640" cy="365760"/>
-          </a:xfrm>
-          <a:prstGeom prst="rect">
-            <a:avLst/>
-          </a:prstGeom>
-          <a:noFill/>
-        </p:spPr>
-        <p:txBody>
-          <a:bodyPr wrap="square" anchor="t" lIns="0" rIns="0" tIns="0" bIns="0">
-            <a:spAutoFit/>
-          </a:bodyPr>
-          <a:lstStyle/>
-          <a:p>
-            <a:pPr algn="l">
-              <a:lnSpc>
-                <a:spcPct val="125000"/>
-              </a:lnSpc>
-            </a:pPr>
-            <a:r>
-              <a:rPr sz="1100" b="1">
+            <a:off x="4590288" y="2359152"/>
+            <a:ext cx="2971800" cy="320040"/>
+          </a:xfrm>
+          <a:prstGeom prst="rect">
+            <a:avLst/>
+          </a:prstGeom>
+          <a:noFill/>
+        </p:spPr>
+        <p:txBody>
+          <a:bodyPr wrap="square" anchor="t" lIns="0" rIns="0" tIns="0" bIns="0">
+            <a:spAutoFit/>
+          </a:bodyPr>
+          <a:lstStyle/>
+          <a:p>
+            <a:pPr algn="l">
+              <a:lnSpc>
+                <a:spcPct val="125000"/>
+              </a:lnSpc>
+            </a:pPr>
+            <a:r>
+              <a:rPr sz="1050" b="1">
                 <a:solidFill>
                   <a:srgbClr val="9A6B00"/>
                 </a:solidFill>
                 <a:latin typeface="맑은 고딕"/>
               </a:rPr>
-              <a:t>규칙이 법조문, LLM은 사실관계만</a:t>
+              <a:t>색인은 스냅샷, 공고는 살아 움직인다</a:t>
             </a:r>
           </a:p>
         </p:txBody>
@@ -12753,81 +12737,65 @@
         </p:nvSpPr>
         <p:spPr>
           <a:xfrm>
-            <a:off x="4636008" y="3200400"/>
-            <a:ext cx="2926080" cy="2377440"/>
-          </a:xfrm>
-          <a:prstGeom prst="rect">
-            <a:avLst/>
-          </a:prstGeom>
-          <a:noFill/>
-        </p:spPr>
-        <p:txBody>
-          <a:bodyPr wrap="square" anchor="t" lIns="0" rIns="0" tIns="0" bIns="0">
-            <a:spAutoFit/>
-          </a:bodyPr>
-          <a:lstStyle/>
-          <a:p>
-            <a:pPr algn="l">
-              <a:lnSpc>
-                <a:spcPct val="140000"/>
-              </a:lnSpc>
-            </a:pPr>
-            <a:r>
-              <a:rPr sz="1100" b="0">
+            <a:off x="4590288" y="2697480"/>
+            <a:ext cx="3017520" cy="1280160"/>
+          </a:xfrm>
+          <a:prstGeom prst="rect">
+            <a:avLst/>
+          </a:prstGeom>
+          <a:noFill/>
+        </p:spPr>
+        <p:txBody>
+          <a:bodyPr wrap="square" anchor="t" lIns="0" rIns="0" tIns="0" bIns="0">
+            <a:spAutoFit/>
+          </a:bodyPr>
+          <a:lstStyle/>
+          <a:p>
+            <a:pPr algn="l">
+              <a:lnSpc>
+                <a:spcPct val="132000"/>
+              </a:lnSpc>
+            </a:pPr>
+            <a:r>
+              <a:rPr sz="1000" b="0">
                 <a:solidFill>
                   <a:srgbClr val="6B6259"/>
                 </a:solidFill>
                 <a:latin typeface="맑은 고딕"/>
               </a:rPr>
-              <a:t>"수수료를 왜 떼요" 한 문장이 제출 가능한</a:t>
-            </a:r>
-          </a:p>
-          <a:p>
-            <a:pPr algn="l">
-              <a:lnSpc>
-                <a:spcPct val="140000"/>
-              </a:lnSpc>
-            </a:pPr>
-            <a:r>
-              <a:rPr sz="1100" b="0">
+              <a:t>찜한 공고 전부를 기계가 원문에서 재확인 —</a:t>
+            </a:r>
+          </a:p>
+          <a:p>
+            <a:pPr algn="l">
+              <a:lnSpc>
+                <a:spcPct val="132000"/>
+              </a:lnSpc>
+            </a:pPr>
+            <a:r>
+              <a:rPr sz="1000" b="0">
                 <a:solidFill>
                   <a:srgbClr val="6B6259"/>
                 </a:solidFill>
                 <a:latin typeface="맑은 고딕"/>
               </a:rPr>
-              <a:t>민원서 꼴이 됩니다. 없는 날짜·금액은 [빈칸]으로</a:t>
-            </a:r>
-          </a:p>
-          <a:p>
-            <a:pPr algn="l">
-              <a:lnSpc>
-                <a:spcPct val="140000"/>
-              </a:lnSpc>
-            </a:pPr>
-            <a:r>
-              <a:rPr sz="1100" b="0">
+              <a:t>마감 연장·조기 마감·서식 교체 감지.</a:t>
+            </a:r>
+          </a:p>
+          <a:p>
+            <a:pPr algn="l">
+              <a:lnSpc>
+                <a:spcPct val="132000"/>
+              </a:lnSpc>
+            </a:pPr>
+            <a:r>
+              <a:rPr sz="1000" b="0">
                 <a:solidFill>
                   <a:srgbClr val="6B6259"/>
                 </a:solidFill>
                 <a:latin typeface="맑은 고딕"/>
               </a:rPr>
-              <a:t>강제 — LLM이 §를 지어낼 수 없는 구조.</a:t>
-            </a:r>
-          </a:p>
-          <a:p>
-            <a:pPr algn="l">
-              <a:lnSpc>
-                <a:spcPct val="140000"/>
-              </a:lnSpc>
-            </a:pPr>
-            <a:r>
-              <a:rPr sz="1100" b="0">
-                <a:solidFill>
-                  <a:srgbClr val="6B6259"/>
-                </a:solidFill>
-                <a:latin typeface="맑은 고딕"/>
-              </a:rPr>
-              <a:t>생성문도 가드레일 통과.</a:t>
+              <a:t>신청서식 hwp 즉시 다운로드, 마감은 .ics로.</a:t>
             </a:r>
           </a:p>
         </p:txBody>
@@ -12840,8 +12808,8 @@
         </p:nvSpPr>
         <p:spPr>
           <a:xfrm>
-            <a:off x="8037575" y="1920240"/>
-            <a:ext cx="3401568" cy="3931920"/>
+            <a:off x="8037575" y="1828800"/>
+            <a:ext cx="3401568" cy="2212848"/>
           </a:xfrm>
           <a:prstGeom prst="roundRect">
             <a:avLst>
@@ -12888,32 +12856,426 @@
         </p:nvSpPr>
         <p:spPr>
           <a:xfrm>
-            <a:off x="8311895" y="2194560"/>
-            <a:ext cx="2834640" cy="457200"/>
-          </a:xfrm>
-          <a:prstGeom prst="rect">
-            <a:avLst/>
-          </a:prstGeom>
-          <a:noFill/>
-        </p:spPr>
-        <p:txBody>
-          <a:bodyPr wrap="square" anchor="t" lIns="0" rIns="0" tIns="0" bIns="0">
-            <a:spAutoFit/>
-          </a:bodyPr>
-          <a:lstStyle/>
-          <a:p>
-            <a:pPr algn="l">
-              <a:lnSpc>
-                <a:spcPct val="125000"/>
-              </a:lnSpc>
-            </a:pPr>
-            <a:r>
-              <a:rPr sz="1600" b="1">
+            <a:off x="8266175" y="1993392"/>
+            <a:ext cx="2971800" cy="365760"/>
+          </a:xfrm>
+          <a:prstGeom prst="rect">
+            <a:avLst/>
+          </a:prstGeom>
+          <a:noFill/>
+        </p:spPr>
+        <p:txBody>
+          <a:bodyPr wrap="square" anchor="t" lIns="0" rIns="0" tIns="0" bIns="0">
+            <a:spAutoFit/>
+          </a:bodyPr>
+          <a:lstStyle/>
+          <a:p>
+            <a:pPr algn="l">
+              <a:lnSpc>
+                <a:spcPct val="125000"/>
+              </a:lnSpc>
+            </a:pPr>
+            <a:r>
+              <a:rPr sz="1450" b="1">
                 <a:solidFill>
                   <a:srgbClr val="38322A"/>
                 </a:solidFill>
                 <a:latin typeface="맑은 고딕"/>
               </a:rPr>
+              <a:t>민원서 초안 생성</a:t>
+            </a:r>
+          </a:p>
+        </p:txBody>
+      </p:sp>
+      <p:sp>
+        <p:nvSpPr>
+          <p:cNvPr id="15" name="TextBox 14"/>
+          <p:cNvSpPr txBox="1"/>
+          <p:nvPr/>
+        </p:nvSpPr>
+        <p:spPr>
+          <a:xfrm>
+            <a:off x="8266175" y="2359152"/>
+            <a:ext cx="2971800" cy="320040"/>
+          </a:xfrm>
+          <a:prstGeom prst="rect">
+            <a:avLst/>
+          </a:prstGeom>
+          <a:noFill/>
+        </p:spPr>
+        <p:txBody>
+          <a:bodyPr wrap="square" anchor="t" lIns="0" rIns="0" tIns="0" bIns="0">
+            <a:spAutoFit/>
+          </a:bodyPr>
+          <a:lstStyle/>
+          <a:p>
+            <a:pPr algn="l">
+              <a:lnSpc>
+                <a:spcPct val="125000"/>
+              </a:lnSpc>
+            </a:pPr>
+            <a:r>
+              <a:rPr sz="1050" b="1">
+                <a:solidFill>
+                  <a:srgbClr val="9A6B00"/>
+                </a:solidFill>
+                <a:latin typeface="맑은 고딕"/>
+              </a:rPr>
+              <a:t>규칙이 법조문, LLM은 사실관계만</a:t>
+            </a:r>
+          </a:p>
+        </p:txBody>
+      </p:sp>
+      <p:sp>
+        <p:nvSpPr>
+          <p:cNvPr id="16" name="TextBox 15"/>
+          <p:cNvSpPr txBox="1"/>
+          <p:nvPr/>
+        </p:nvSpPr>
+        <p:spPr>
+          <a:xfrm>
+            <a:off x="8266175" y="2697480"/>
+            <a:ext cx="3017520" cy="1280160"/>
+          </a:xfrm>
+          <a:prstGeom prst="rect">
+            <a:avLst/>
+          </a:prstGeom>
+          <a:noFill/>
+        </p:spPr>
+        <p:txBody>
+          <a:bodyPr wrap="square" anchor="t" lIns="0" rIns="0" tIns="0" bIns="0">
+            <a:spAutoFit/>
+          </a:bodyPr>
+          <a:lstStyle/>
+          <a:p>
+            <a:pPr algn="l">
+              <a:lnSpc>
+                <a:spcPct val="132000"/>
+              </a:lnSpc>
+            </a:pPr>
+            <a:r>
+              <a:rPr sz="1000" b="0">
+                <a:solidFill>
+                  <a:srgbClr val="6B6259"/>
+                </a:solidFill>
+                <a:latin typeface="맑은 고딕"/>
+              </a:rPr>
+              <a:t>"수수료를 왜 떼요" 한 문장이 제출 가능한</a:t>
+            </a:r>
+          </a:p>
+          <a:p>
+            <a:pPr algn="l">
+              <a:lnSpc>
+                <a:spcPct val="132000"/>
+              </a:lnSpc>
+            </a:pPr>
+            <a:r>
+              <a:rPr sz="1000" b="0">
+                <a:solidFill>
+                  <a:srgbClr val="6B6259"/>
+                </a:solidFill>
+                <a:latin typeface="맑은 고딕"/>
+              </a:rPr>
+              <a:t>민원서 꼴이 됩니다. 없는 날짜·금액은</a:t>
+            </a:r>
+          </a:p>
+          <a:p>
+            <a:pPr algn="l">
+              <a:lnSpc>
+                <a:spcPct val="132000"/>
+              </a:lnSpc>
+            </a:pPr>
+            <a:r>
+              <a:rPr sz="1000" b="0">
+                <a:solidFill>
+                  <a:srgbClr val="6B6259"/>
+                </a:solidFill>
+                <a:latin typeface="맑은 고딕"/>
+              </a:rPr>
+              <a:t>[빈칸] 강제 — §를 지어낼 수 없는 구조.</a:t>
+            </a:r>
+          </a:p>
+        </p:txBody>
+      </p:sp>
+      <p:sp>
+        <p:nvSpPr>
+          <p:cNvPr id="17" name="Rounded Rectangle 16"/>
+          <p:cNvSpPr/>
+          <p:nvPr/>
+        </p:nvSpPr>
+        <p:spPr>
+          <a:xfrm>
+            <a:off x="685800" y="4224528"/>
+            <a:ext cx="3401568" cy="2212848"/>
+          </a:xfrm>
+          <a:prstGeom prst="roundRect">
+            <a:avLst>
+              <a:gd name="adj" fmla="val 6000"/>
+            </a:avLst>
+          </a:prstGeom>
+          <a:solidFill>
+            <a:srgbClr val="FAF8F4"/>
+          </a:solidFill>
+          <a:ln w="12700">
+            <a:solidFill>
+              <a:srgbClr val="E4DED4"/>
+            </a:solidFill>
+          </a:ln>
+          <a:effectLst/>
+        </p:spPr>
+        <p:style>
+          <a:lnRef idx="1">
+            <a:schemeClr val="accent1"/>
+          </a:lnRef>
+          <a:fillRef idx="3">
+            <a:schemeClr val="accent1"/>
+          </a:fillRef>
+          <a:effectRef idx="2">
+            <a:schemeClr val="accent1"/>
+          </a:effectRef>
+          <a:fontRef idx="minor">
+            <a:schemeClr val="lt1"/>
+          </a:fontRef>
+        </p:style>
+        <p:txBody>
+          <a:bodyPr rtlCol="0" anchor="ctr"/>
+          <a:lstStyle/>
+          <a:p>
+            <a:pPr algn="ctr"/>
+          </a:p>
+        </p:txBody>
+      </p:sp>
+      <p:sp>
+        <p:nvSpPr>
+          <p:cNvPr id="18" name="TextBox 17"/>
+          <p:cNvSpPr txBox="1"/>
+          <p:nvPr/>
+        </p:nvSpPr>
+        <p:spPr>
+          <a:xfrm>
+            <a:off x="914400" y="4389120"/>
+            <a:ext cx="2971800" cy="365760"/>
+          </a:xfrm>
+          <a:prstGeom prst="rect">
+            <a:avLst/>
+          </a:prstGeom>
+          <a:noFill/>
+        </p:spPr>
+        <p:txBody>
+          <a:bodyPr wrap="square" anchor="t" lIns="0" rIns="0" tIns="0" bIns="0">
+            <a:spAutoFit/>
+          </a:bodyPr>
+          <a:lstStyle/>
+          <a:p>
+            <a:pPr algn="l">
+              <a:lnSpc>
+                <a:spcPct val="125000"/>
+              </a:lnSpc>
+            </a:pPr>
+            <a:r>
+              <a:rPr sz="1450" b="1">
+                <a:solidFill>
+                  <a:srgbClr val="38322A"/>
+                </a:solidFill>
+                <a:latin typeface="맑은 고딕"/>
+              </a:rPr>
+              <a:t>닮은 상권 찾기</a:t>
+            </a:r>
+          </a:p>
+        </p:txBody>
+      </p:sp>
+      <p:sp>
+        <p:nvSpPr>
+          <p:cNvPr id="19" name="TextBox 18"/>
+          <p:cNvSpPr txBox="1"/>
+          <p:nvPr/>
+        </p:nvSpPr>
+        <p:spPr>
+          <a:xfrm>
+            <a:off x="914400" y="4754880"/>
+            <a:ext cx="2971800" cy="320040"/>
+          </a:xfrm>
+          <a:prstGeom prst="rect">
+            <a:avLst/>
+          </a:prstGeom>
+          <a:noFill/>
+        </p:spPr>
+        <p:txBody>
+          <a:bodyPr wrap="square" anchor="t" lIns="0" rIns="0" tIns="0" bIns="0">
+            <a:spAutoFit/>
+          </a:bodyPr>
+          <a:lstStyle/>
+          <a:p>
+            <a:pPr algn="l">
+              <a:lnSpc>
+                <a:spcPct val="125000"/>
+              </a:lnSpc>
+            </a:pPr>
+            <a:r>
+              <a:rPr sz="1050" b="1">
+                <a:solidFill>
+                  <a:srgbClr val="9A6B00"/>
+                </a:solidFill>
+                <a:latin typeface="맑은 고딕"/>
+              </a:rPr>
+              <a:t>업종 구성 247차원 코사인</a:t>
+            </a:r>
+          </a:p>
+        </p:txBody>
+      </p:sp>
+      <p:sp>
+        <p:nvSpPr>
+          <p:cNvPr id="20" name="TextBox 19"/>
+          <p:cNvSpPr txBox="1"/>
+          <p:nvPr/>
+        </p:nvSpPr>
+        <p:spPr>
+          <a:xfrm>
+            <a:off x="914400" y="5093208"/>
+            <a:ext cx="3017520" cy="1280160"/>
+          </a:xfrm>
+          <a:prstGeom prst="rect">
+            <a:avLst/>
+          </a:prstGeom>
+          <a:noFill/>
+        </p:spPr>
+        <p:txBody>
+          <a:bodyPr wrap="square" anchor="t" lIns="0" rIns="0" tIns="0" bIns="0">
+            <a:spAutoFit/>
+          </a:bodyPr>
+          <a:lstStyle/>
+          <a:p>
+            <a:pPr algn="l">
+              <a:lnSpc>
+                <a:spcPct val="132000"/>
+              </a:lnSpc>
+            </a:pPr>
+            <a:r>
+              <a:rPr sz="1000" b="0">
+                <a:solidFill>
+                  <a:srgbClr val="6B6259"/>
+                </a:solidFill>
+                <a:latin typeface="맑은 고딕"/>
+              </a:rPr>
+              <a:t>연남동 ↔ 광안리·서교동·망원동.</a:t>
+            </a:r>
+          </a:p>
+          <a:p>
+            <a:pPr algn="l">
+              <a:lnSpc>
+                <a:spcPct val="132000"/>
+              </a:lnSpc>
+            </a:pPr>
+            <a:r>
+              <a:rPr sz="1000" b="0">
+                <a:solidFill>
+                  <a:srgbClr val="6B6259"/>
+                </a:solidFill>
+                <a:latin typeface="맑은 고딕"/>
+              </a:rPr>
+              <a:t>붙어 있는 동네가 아니라 '성격이 닮은' 동네 —</a:t>
+            </a:r>
+          </a:p>
+          <a:p>
+            <a:pPr algn="l">
+              <a:lnSpc>
+                <a:spcPct val="132000"/>
+              </a:lnSpc>
+            </a:pPr>
+            <a:r>
+              <a:rPr sz="1000" b="0">
+                <a:solidFill>
+                  <a:srgbClr val="6B6259"/>
+                </a:solidFill>
+                <a:latin typeface="맑은 고딕"/>
+              </a:rPr>
+              <a:t>2호점 후보의 출발점. 질의 0.4ms.</a:t>
+            </a:r>
+          </a:p>
+        </p:txBody>
+      </p:sp>
+      <p:sp>
+        <p:nvSpPr>
+          <p:cNvPr id="21" name="Rounded Rectangle 20"/>
+          <p:cNvSpPr/>
+          <p:nvPr/>
+        </p:nvSpPr>
+        <p:spPr>
+          <a:xfrm>
+            <a:off x="4361688" y="4224528"/>
+            <a:ext cx="3401568" cy="2212848"/>
+          </a:xfrm>
+          <a:prstGeom prst="roundRect">
+            <a:avLst>
+              <a:gd name="adj" fmla="val 6000"/>
+            </a:avLst>
+          </a:prstGeom>
+          <a:solidFill>
+            <a:srgbClr val="FAF8F4"/>
+          </a:solidFill>
+          <a:ln w="12700">
+            <a:solidFill>
+              <a:srgbClr val="E4DED4"/>
+            </a:solidFill>
+          </a:ln>
+          <a:effectLst/>
+        </p:spPr>
+        <p:style>
+          <a:lnRef idx="1">
+            <a:schemeClr val="accent1"/>
+          </a:lnRef>
+          <a:fillRef idx="3">
+            <a:schemeClr val="accent1"/>
+          </a:fillRef>
+          <a:effectRef idx="2">
+            <a:schemeClr val="accent1"/>
+          </a:effectRef>
+          <a:fontRef idx="minor">
+            <a:schemeClr val="lt1"/>
+          </a:fontRef>
+        </p:style>
+        <p:txBody>
+          <a:bodyPr rtlCol="0" anchor="ctr"/>
+          <a:lstStyle/>
+          <a:p>
+            <a:pPr algn="ctr"/>
+          </a:p>
+        </p:txBody>
+      </p:sp>
+      <p:sp>
+        <p:nvSpPr>
+          <p:cNvPr id="22" name="TextBox 21"/>
+          <p:cNvSpPr txBox="1"/>
+          <p:nvPr/>
+        </p:nvSpPr>
+        <p:spPr>
+          <a:xfrm>
+            <a:off x="4590288" y="4389120"/>
+            <a:ext cx="2971800" cy="365760"/>
+          </a:xfrm>
+          <a:prstGeom prst="rect">
+            <a:avLst/>
+          </a:prstGeom>
+          <a:noFill/>
+        </p:spPr>
+        <p:txBody>
+          <a:bodyPr wrap="square" anchor="t" lIns="0" rIns="0" tIns="0" bIns="0">
+            <a:spAutoFit/>
+          </a:bodyPr>
+          <a:lstStyle/>
+          <a:p>
+            <a:pPr algn="l">
+              <a:lnSpc>
+                <a:spcPct val="125000"/>
+              </a:lnSpc>
+            </a:pPr>
+            <a:r>
+              <a:rPr sz="1450" b="1">
+                <a:solidFill>
+                  <a:srgbClr val="38322A"/>
+                </a:solidFill>
+                <a:latin typeface="맑은 고딕"/>
+              </a:rPr>
               <a:t>음성 대화 + 지도 투어</a:t>
             </a:r>
           </a:p>
@@ -12921,126 +13283,307 @@
       </p:sp>
       <p:sp>
         <p:nvSpPr>
-          <p:cNvPr id="15" name="TextBox 14"/>
-          <p:cNvSpPr txBox="1"/>
-          <p:nvPr/>
-        </p:nvSpPr>
-        <p:spPr>
-          <a:xfrm>
-            <a:off x="8311895" y="2697480"/>
-            <a:ext cx="2834640" cy="365760"/>
-          </a:xfrm>
-          <a:prstGeom prst="rect">
-            <a:avLst/>
-          </a:prstGeom>
-          <a:noFill/>
-        </p:spPr>
-        <p:txBody>
-          <a:bodyPr wrap="square" anchor="t" lIns="0" rIns="0" tIns="0" bIns="0">
-            <a:spAutoFit/>
-          </a:bodyPr>
-          <a:lstStyle/>
-          <a:p>
-            <a:pPr algn="l">
-              <a:lnSpc>
-                <a:spcPct val="125000"/>
-              </a:lnSpc>
-            </a:pPr>
-            <a:r>
-              <a:rPr sz="1100" b="1">
+          <p:cNvPr id="23" name="TextBox 22"/>
+          <p:cNvSpPr txBox="1"/>
+          <p:nvPr/>
+        </p:nvSpPr>
+        <p:spPr>
+          <a:xfrm>
+            <a:off x="4590288" y="4754880"/>
+            <a:ext cx="2971800" cy="320040"/>
+          </a:xfrm>
+          <a:prstGeom prst="rect">
+            <a:avLst/>
+          </a:prstGeom>
+          <a:noFill/>
+        </p:spPr>
+        <p:txBody>
+          <a:bodyPr wrap="square" anchor="t" lIns="0" rIns="0" tIns="0" bIns="0">
+            <a:spAutoFit/>
+          </a:bodyPr>
+          <a:lstStyle/>
+          <a:p>
+            <a:pPr algn="l">
+              <a:lnSpc>
+                <a:spcPct val="125000"/>
+              </a:lnSpc>
+            </a:pPr>
+            <a:r>
+              <a:rPr sz="1050" b="1">
                 <a:solidFill>
                   <a:srgbClr val="9A6B00"/>
                 </a:solidFill>
                 <a:latin typeface="맑은 고딕"/>
               </a:rPr>
-              <a:t>브라우저 내장 — 다운로드 0바이트</a:t>
-            </a:r>
-          </a:p>
-        </p:txBody>
-      </p:sp>
-      <p:sp>
-        <p:nvSpPr>
-          <p:cNvPr id="16" name="TextBox 15"/>
-          <p:cNvSpPr txBox="1"/>
-          <p:nvPr/>
-        </p:nvSpPr>
-        <p:spPr>
-          <a:xfrm>
-            <a:off x="8311895" y="3200400"/>
-            <a:ext cx="2926080" cy="2377440"/>
-          </a:xfrm>
-          <a:prstGeom prst="rect">
-            <a:avLst/>
-          </a:prstGeom>
-          <a:noFill/>
-        </p:spPr>
-        <p:txBody>
-          <a:bodyPr wrap="square" anchor="t" lIns="0" rIns="0" tIns="0" bIns="0">
-            <a:spAutoFit/>
-          </a:bodyPr>
-          <a:lstStyle/>
-          <a:p>
-            <a:pPr algn="l">
-              <a:lnSpc>
-                <a:spcPct val="140000"/>
-              </a:lnSpc>
-            </a:pPr>
-            <a:r>
-              <a:rPr sz="1100" b="0">
+              <a:t>브라우저 내장 · 다운로드 0</a:t>
+            </a:r>
+          </a:p>
+        </p:txBody>
+      </p:sp>
+      <p:sp>
+        <p:nvSpPr>
+          <p:cNvPr id="24" name="TextBox 23"/>
+          <p:cNvSpPr txBox="1"/>
+          <p:nvPr/>
+        </p:nvSpPr>
+        <p:spPr>
+          <a:xfrm>
+            <a:off x="4590288" y="5093208"/>
+            <a:ext cx="3017520" cy="1280160"/>
+          </a:xfrm>
+          <a:prstGeom prst="rect">
+            <a:avLst/>
+          </a:prstGeom>
+          <a:noFill/>
+        </p:spPr>
+        <p:txBody>
+          <a:bodyPr wrap="square" anchor="t" lIns="0" rIns="0" tIns="0" bIns="0">
+            <a:spAutoFit/>
+          </a:bodyPr>
+          <a:lstStyle/>
+          <a:p>
+            <a:pPr algn="l">
+              <a:lnSpc>
+                <a:spcPct val="132000"/>
+              </a:lnSpc>
+            </a:pPr>
+            <a:r>
+              <a:rPr sz="1000" b="0">
                 <a:solidFill>
                   <a:srgbClr val="6B6259"/>
                 </a:solidFill>
                 <a:latin typeface="맑은 고딕"/>
               </a:rPr>
-              <a:t>말로 묻고(Web Speech) 꿀비가 읽어 줍니다.</a:t>
-            </a:r>
-          </a:p>
-          <a:p>
-            <a:pPr algn="l">
-              <a:lnSpc>
-                <a:spcPct val="140000"/>
-              </a:lnSpc>
-            </a:pPr>
-            <a:r>
-              <a:rPr sz="1100" b="0">
+              <a:t>말로 묻고 꿀비가 읽어 줍니다. 지도는 전국에서</a:t>
+            </a:r>
+          </a:p>
+          <a:p>
+            <a:pPr algn="l">
+              <a:lnSpc>
+                <a:spcPct val="132000"/>
+              </a:lnSpc>
+            </a:pPr>
+            <a:r>
+              <a:rPr sz="1000" b="0">
                 <a:solidFill>
                   <a:srgbClr val="6B6259"/>
                 </a:solidFill>
                 <a:latin typeface="맑은 고딕"/>
               </a:rPr>
-              <a:t>지도는 전국에서 그 동네로 날아 들어가</a:t>
-            </a:r>
-          </a:p>
-          <a:p>
-            <a:pPr algn="l">
-              <a:lnSpc>
-                <a:spcPct val="140000"/>
-              </a:lnSpc>
-            </a:pPr>
-            <a:r>
-              <a:rPr sz="1100" b="0">
+              <a:t>그 동네로 날아들어 4막 투어(점포→열지도→비교).</a:t>
+            </a:r>
+          </a:p>
+          <a:p>
+            <a:pPr algn="l">
+              <a:lnSpc>
+                <a:spcPct val="132000"/>
+              </a:lnSpc>
+            </a:pPr>
+            <a:r>
+              <a:rPr sz="1000" b="0">
                 <a:solidFill>
                   <a:srgbClr val="6B6259"/>
                 </a:solidFill>
                 <a:latin typeface="맑은 고딕"/>
               </a:rPr>
-              <a:t>4막 투어(점포→열지도→비교)를 자막·음성으로.</a:t>
-            </a:r>
-          </a:p>
-          <a:p>
-            <a:pPr algn="l">
-              <a:lnSpc>
-                <a:spcPct val="140000"/>
-              </a:lnSpc>
-            </a:pPr>
-            <a:r>
-              <a:rPr sz="1100" b="0">
+              <a:t>금융 접근성 — 이 대회가 상을 준 각도.</a:t>
+            </a:r>
+          </a:p>
+        </p:txBody>
+      </p:sp>
+      <p:sp>
+        <p:nvSpPr>
+          <p:cNvPr id="25" name="Rounded Rectangle 24"/>
+          <p:cNvSpPr/>
+          <p:nvPr/>
+        </p:nvSpPr>
+        <p:spPr>
+          <a:xfrm>
+            <a:off x="8037575" y="4224528"/>
+            <a:ext cx="3401568" cy="2212848"/>
+          </a:xfrm>
+          <a:prstGeom prst="roundRect">
+            <a:avLst>
+              <a:gd name="adj" fmla="val 6000"/>
+            </a:avLst>
+          </a:prstGeom>
+          <a:solidFill>
+            <a:srgbClr val="FAF8F4"/>
+          </a:solidFill>
+          <a:ln w="12700">
+            <a:solidFill>
+              <a:srgbClr val="E4DED4"/>
+            </a:solidFill>
+          </a:ln>
+          <a:effectLst/>
+        </p:spPr>
+        <p:style>
+          <a:lnRef idx="1">
+            <a:schemeClr val="accent1"/>
+          </a:lnRef>
+          <a:fillRef idx="3">
+            <a:schemeClr val="accent1"/>
+          </a:fillRef>
+          <a:effectRef idx="2">
+            <a:schemeClr val="accent1"/>
+          </a:effectRef>
+          <a:fontRef idx="minor">
+            <a:schemeClr val="lt1"/>
+          </a:fontRef>
+        </p:style>
+        <p:txBody>
+          <a:bodyPr rtlCol="0" anchor="ctr"/>
+          <a:lstStyle/>
+          <a:p>
+            <a:pPr algn="ctr"/>
+          </a:p>
+        </p:txBody>
+      </p:sp>
+      <p:sp>
+        <p:nvSpPr>
+          <p:cNvPr id="26" name="TextBox 25"/>
+          <p:cNvSpPr txBox="1"/>
+          <p:nvPr/>
+        </p:nvSpPr>
+        <p:spPr>
+          <a:xfrm>
+            <a:off x="8266175" y="4389120"/>
+            <a:ext cx="2971800" cy="365760"/>
+          </a:xfrm>
+          <a:prstGeom prst="rect">
+            <a:avLst/>
+          </a:prstGeom>
+          <a:noFill/>
+        </p:spPr>
+        <p:txBody>
+          <a:bodyPr wrap="square" anchor="t" lIns="0" rIns="0" tIns="0" bIns="0">
+            <a:spAutoFit/>
+          </a:bodyPr>
+          <a:lstStyle/>
+          <a:p>
+            <a:pPr algn="l">
+              <a:lnSpc>
+                <a:spcPct val="125000"/>
+              </a:lnSpc>
+            </a:pPr>
+            <a:r>
+              <a:rPr sz="1450" b="1">
+                <a:solidFill>
+                  <a:srgbClr val="38322A"/>
+                </a:solidFill>
+                <a:latin typeface="맑은 고딕"/>
+              </a:rPr>
+              <a:t>계산기 두 대</a:t>
+            </a:r>
+          </a:p>
+        </p:txBody>
+      </p:sp>
+      <p:sp>
+        <p:nvSpPr>
+          <p:cNvPr id="27" name="TextBox 26"/>
+          <p:cNvSpPr txBox="1"/>
+          <p:nvPr/>
+        </p:nvSpPr>
+        <p:spPr>
+          <a:xfrm>
+            <a:off x="8266175" y="4754880"/>
+            <a:ext cx="2971800" cy="320040"/>
+          </a:xfrm>
+          <a:prstGeom prst="rect">
+            <a:avLst/>
+          </a:prstGeom>
+          <a:noFill/>
+        </p:spPr>
+        <p:txBody>
+          <a:bodyPr wrap="square" anchor="t" lIns="0" rIns="0" tIns="0" bIns="0">
+            <a:spAutoFit/>
+          </a:bodyPr>
+          <a:lstStyle/>
+          <a:p>
+            <a:pPr algn="l">
+              <a:lnSpc>
+                <a:spcPct val="125000"/>
+              </a:lnSpc>
+            </a:pPr>
+            <a:r>
+              <a:rPr sz="1050" b="1">
+                <a:solidFill>
+                  <a:srgbClr val="9A6B00"/>
+                </a:solidFill>
+                <a:latin typeface="맑은 고딕"/>
+              </a:rPr>
+              <a:t>융자의 다음 질문은 '한 달에 얼마?'</a:t>
+            </a:r>
+          </a:p>
+        </p:txBody>
+      </p:sp>
+      <p:sp>
+        <p:nvSpPr>
+          <p:cNvPr id="28" name="TextBox 27"/>
+          <p:cNvSpPr txBox="1"/>
+          <p:nvPr/>
+        </p:nvSpPr>
+        <p:spPr>
+          <a:xfrm>
+            <a:off x="8266175" y="5093208"/>
+            <a:ext cx="3017520" cy="1280160"/>
+          </a:xfrm>
+          <a:prstGeom prst="rect">
+            <a:avLst/>
+          </a:prstGeom>
+          <a:noFill/>
+        </p:spPr>
+        <p:txBody>
+          <a:bodyPr wrap="square" anchor="t" lIns="0" rIns="0" tIns="0" bIns="0">
+            <a:spAutoFit/>
+          </a:bodyPr>
+          <a:lstStyle/>
+          <a:p>
+            <a:pPr algn="l">
+              <a:lnSpc>
+                <a:spcPct val="132000"/>
+              </a:lnSpc>
+            </a:pPr>
+            <a:r>
+              <a:rPr sz="1000" b="0">
                 <a:solidFill>
                   <a:srgbClr val="6B6259"/>
                 </a:solidFill>
                 <a:latin typeface="맑은 고딕"/>
               </a:rPr>
-              <a:t>금융 접근성 — 이 대회가 역대로 상을 준 각도.</a:t>
+              <a:t>매칭 공고의 한도·금리가 자동으로 채워지는</a:t>
+            </a:r>
+          </a:p>
+          <a:p>
+            <a:pPr algn="l">
+              <a:lnSpc>
+                <a:spcPct val="132000"/>
+              </a:lnSpc>
+            </a:pPr>
+            <a:r>
+              <a:rPr sz="1000" b="0">
+                <a:solidFill>
+                  <a:srgbClr val="6B6259"/>
+                </a:solidFill>
+                <a:latin typeface="맑은 고딕"/>
+              </a:rPr>
+              <a:t>상환 시뮬레이터(원리금·원금·만기일시)와</a:t>
+            </a:r>
+          </a:p>
+          <a:p>
+            <a:pPr algn="l">
+              <a:lnSpc>
+                <a:spcPct val="132000"/>
+              </a:lnSpc>
+            </a:pPr>
+            <a:r>
+              <a:rPr sz="1000" b="0">
+                <a:solidFill>
+                  <a:srgbClr val="6B6259"/>
+                </a:solidFill>
+                <a:latin typeface="맑은 고딕"/>
+              </a:rPr>
+              <a:t>손익분기 계산기. 확약 아님을 화면에 명시.</a:t>
             </a:r>
           </a:p>
         </p:txBody>

--- a/docs/꿀비_기술설명서.pptx
+++ b/docs/꿀비_기술설명서.pptx
@@ -18,6 +18,7 @@
     <p:sldId id="266" r:id="rId17"/>
     <p:sldId id="267" r:id="rId18"/>
     <p:sldId id="268" r:id="rId19"/>
+    <p:sldId id="269" r:id="rId20"/>
   </p:sldIdLst>
   <p:sldSz cx="12191695" cy="6858000" type="screen4x3"/>
   <p:notesSz cx="6858000" cy="9144000"/>
@@ -3495,7 +3496,7 @@
                 </a:solidFill>
                 <a:latin typeface="맑은 고딕"/>
               </a:rPr>
-              <a:t>SCREENS</a:t>
+              <a:t>SIGNATURE</a:t>
             </a:r>
           </a:p>
         </p:txBody>
@@ -3534,7 +3535,7 @@
                 </a:solidFill>
                 <a:latin typeface="맑은 고딕"/>
               </a:rPr>
-              <a:t>지금 접속해 보실 수 있습니다</a:t>
+              <a:t>다른 팀이 하기 어려운 세 가지 — 전부 실제로 돌아갑니다</a:t>
             </a:r>
           </a:p>
         </p:txBody>
@@ -3585,193 +3586,320 @@
       </p:sp>
       <p:sp>
         <p:nvSpPr>
-          <p:cNvPr id="5" name="TextBox 4"/>
-          <p:cNvSpPr txBox="1"/>
-          <p:nvPr/>
-        </p:nvSpPr>
-        <p:spPr>
-          <a:xfrm>
-            <a:off x="685800" y="1737360"/>
-            <a:ext cx="10789920" cy="365760"/>
-          </a:xfrm>
-          <a:prstGeom prst="rect">
-            <a:avLst/>
-          </a:prstGeom>
-          <a:noFill/>
-        </p:spPr>
-        <p:txBody>
-          <a:bodyPr wrap="square" anchor="t" lIns="0" rIns="0" tIns="0" bIns="0">
-            <a:spAutoFit/>
-          </a:bodyPr>
-          <a:lstStyle/>
-          <a:p>
-            <a:pPr algn="l">
-              <a:lnSpc>
-                <a:spcPct val="125000"/>
-              </a:lnSpc>
-            </a:pPr>
-            <a:r>
-              <a:rPr sz="1300" b="0">
+          <p:cNvPr id="5" name="Rounded Rectangle 4"/>
+          <p:cNvSpPr/>
+          <p:nvPr/>
+        </p:nvSpPr>
+        <p:spPr>
+          <a:xfrm>
+            <a:off x="685800" y="1920240"/>
+            <a:ext cx="3401568" cy="4114800"/>
+          </a:xfrm>
+          <a:prstGeom prst="roundRect">
+            <a:avLst>
+              <a:gd name="adj" fmla="val 6000"/>
+            </a:avLst>
+          </a:prstGeom>
+          <a:solidFill>
+            <a:srgbClr val="FFF4D6"/>
+          </a:solidFill>
+          <a:ln w="12700">
+            <a:solidFill>
+              <a:srgbClr val="E4DED4"/>
+            </a:solidFill>
+          </a:ln>
+          <a:effectLst/>
+        </p:spPr>
+        <p:style>
+          <a:lnRef idx="1">
+            <a:schemeClr val="accent1"/>
+          </a:lnRef>
+          <a:fillRef idx="3">
+            <a:schemeClr val="accent1"/>
+          </a:fillRef>
+          <a:effectRef idx="2">
+            <a:schemeClr val="accent1"/>
+          </a:effectRef>
+          <a:fontRef idx="minor">
+            <a:schemeClr val="lt1"/>
+          </a:fontRef>
+        </p:style>
+        <p:txBody>
+          <a:bodyPr rtlCol="0" anchor="ctr"/>
+          <a:lstStyle/>
+          <a:p>
+            <a:pPr algn="ctr"/>
+          </a:p>
+        </p:txBody>
+      </p:sp>
+      <p:sp>
+        <p:nvSpPr>
+          <p:cNvPr id="6" name="TextBox 5"/>
+          <p:cNvSpPr txBox="1"/>
+          <p:nvPr/>
+        </p:nvSpPr>
+        <p:spPr>
+          <a:xfrm>
+            <a:off x="941832" y="2212848"/>
+            <a:ext cx="2926080" cy="457200"/>
+          </a:xfrm>
+          <a:prstGeom prst="rect">
+            <a:avLst/>
+          </a:prstGeom>
+          <a:noFill/>
+        </p:spPr>
+        <p:txBody>
+          <a:bodyPr wrap="square" anchor="t" lIns="0" rIns="0" tIns="0" bIns="0">
+            <a:spAutoFit/>
+          </a:bodyPr>
+          <a:lstStyle/>
+          <a:p>
+            <a:pPr algn="l">
+              <a:lnSpc>
+                <a:spcPct val="125000"/>
+              </a:lnSpc>
+            </a:pPr>
+            <a:r>
+              <a:rPr sz="1700" b="1">
+                <a:solidFill>
+                  <a:srgbClr val="38322A"/>
+                </a:solidFill>
+                <a:latin typeface="맑은 고딕"/>
+              </a:rPr>
+              <a:t>What-If 반사실 엔진</a:t>
+            </a:r>
+          </a:p>
+        </p:txBody>
+      </p:sp>
+      <p:sp>
+        <p:nvSpPr>
+          <p:cNvPr id="7" name="TextBox 6"/>
+          <p:cNvSpPr txBox="1"/>
+          <p:nvPr/>
+        </p:nvSpPr>
+        <p:spPr>
+          <a:xfrm>
+            <a:off x="941832" y="2743200"/>
+            <a:ext cx="2926080" cy="365760"/>
+          </a:xfrm>
+          <a:prstGeom prst="rect">
+            <a:avLst/>
+          </a:prstGeom>
+          <a:noFill/>
+        </p:spPr>
+        <p:txBody>
+          <a:bodyPr wrap="square" anchor="t" lIns="0" rIns="0" tIns="0" bIns="0">
+            <a:spAutoFit/>
+          </a:bodyPr>
+          <a:lstStyle/>
+          <a:p>
+            <a:pPr algn="l">
+              <a:lnSpc>
+                <a:spcPct val="125000"/>
+              </a:lnSpc>
+            </a:pPr>
+            <a:r>
+              <a:rPr sz="1150" b="1">
+                <a:solidFill>
+                  <a:srgbClr val="9A6B00"/>
+                </a:solidFill>
+                <a:latin typeface="맑은 고딕"/>
+              </a:rPr>
+              <a:t>XAI를 '미래 행동'으로</a:t>
+            </a:r>
+          </a:p>
+        </p:txBody>
+      </p:sp>
+      <p:sp>
+        <p:nvSpPr>
+          <p:cNvPr id="8" name="TextBox 7"/>
+          <p:cNvSpPr txBox="1"/>
+          <p:nvPr/>
+        </p:nvSpPr>
+        <p:spPr>
+          <a:xfrm>
+            <a:off x="941832" y="3246120"/>
+            <a:ext cx="2971800" cy="2651760"/>
+          </a:xfrm>
+          <a:prstGeom prst="rect">
+            <a:avLst/>
+          </a:prstGeom>
+          <a:noFill/>
+        </p:spPr>
+        <p:txBody>
+          <a:bodyPr wrap="square" anchor="t" lIns="0" rIns="0" tIns="0" bIns="0">
+            <a:spAutoFit/>
+          </a:bodyPr>
+          <a:lstStyle/>
+          <a:p>
+            <a:pPr algn="l">
+              <a:lnSpc>
+                <a:spcPct val="142000"/>
+              </a:lnSpc>
+            </a:pPr>
+            <a:r>
+              <a:rPr sz="1100" b="0">
                 <a:solidFill>
                   <a:srgbClr val="6B6259"/>
                 </a:solidFill>
                 <a:latin typeface="맑은 고딕"/>
               </a:rPr>
-              <a:t>kb-kkulbee-smallbiz-multiagent.onrender.com — 목업이 아니라 배포 중인 실서비스의 화면입니다.</a:t>
-            </a:r>
-          </a:p>
-        </p:txBody>
-      </p:sp>
-      <p:pic>
-        <p:nvPicPr>
-          <p:cNvPr id="6" name="Picture 5" descr="F1.png"/>
-          <p:cNvPicPr>
-            <a:picLocks noChangeAspect="1"/>
-          </p:cNvPicPr>
-          <p:nvPr/>
-        </p:nvPicPr>
-        <p:blipFill>
-          <a:blip r:embed="rId2"/>
-          <a:stretch>
-            <a:fillRect/>
-          </a:stretch>
-        </p:blipFill>
-        <p:spPr>
-          <a:xfrm>
-            <a:off x="685800" y="2286000"/>
-            <a:ext cx="5405548" cy="3566160"/>
-          </a:xfrm>
-          <a:prstGeom prst="rect">
-            <a:avLst/>
-          </a:prstGeom>
-        </p:spPr>
-      </p:pic>
-      <p:sp>
-        <p:nvSpPr>
-          <p:cNvPr id="7" name="TextBox 6"/>
-          <p:cNvSpPr txBox="1"/>
-          <p:nvPr/>
-        </p:nvSpPr>
-        <p:spPr>
-          <a:xfrm>
-            <a:off x="685800" y="5989320"/>
-            <a:ext cx="3474720" cy="320040"/>
-          </a:xfrm>
-          <a:prstGeom prst="rect">
-            <a:avLst/>
-          </a:prstGeom>
-          <a:noFill/>
-        </p:spPr>
-        <p:txBody>
-          <a:bodyPr wrap="square" anchor="t" lIns="0" rIns="0" tIns="0" bIns="0">
-            <a:spAutoFit/>
-          </a:bodyPr>
-          <a:lstStyle/>
-          <a:p>
-            <a:pPr algn="l">
-              <a:lnSpc>
-                <a:spcPct val="125000"/>
-              </a:lnSpc>
-            </a:pPr>
-            <a:r>
-              <a:rPr sz="1100" b="1">
-                <a:solidFill>
-                  <a:srgbClr val="544438"/>
-                </a:solidFill>
-                <a:latin typeface="맑은 고딕"/>
-              </a:rPr>
-              <a:t>첫 화면 — 다섯 갈래 선택</a:t>
-            </a:r>
-          </a:p>
-        </p:txBody>
-      </p:sp>
-      <p:pic>
-        <p:nvPicPr>
-          <p:cNvPr id="8" name="Picture 7" descr="tour.png"/>
-          <p:cNvPicPr>
-            <a:picLocks noChangeAspect="1"/>
-          </p:cNvPicPr>
-          <p:nvPr/>
-        </p:nvPicPr>
-        <p:blipFill>
-          <a:blip r:embed="rId3"/>
-          <a:stretch>
-            <a:fillRect/>
-          </a:stretch>
-        </p:blipFill>
-        <p:spPr>
-          <a:xfrm>
-            <a:off x="4709160" y="2286000"/>
-            <a:ext cx="3678776" cy="3566160"/>
-          </a:xfrm>
-          <a:prstGeom prst="rect">
-            <a:avLst/>
-          </a:prstGeom>
-        </p:spPr>
-      </p:pic>
-      <p:sp>
-        <p:nvSpPr>
-          <p:cNvPr id="9" name="TextBox 8"/>
-          <p:cNvSpPr txBox="1"/>
-          <p:nvPr/>
-        </p:nvSpPr>
-        <p:spPr>
-          <a:xfrm>
-            <a:off x="4709160" y="5989320"/>
-            <a:ext cx="3474720" cy="320040"/>
-          </a:xfrm>
-          <a:prstGeom prst="rect">
-            <a:avLst/>
-          </a:prstGeom>
-          <a:noFill/>
-        </p:spPr>
-        <p:txBody>
-          <a:bodyPr wrap="square" anchor="t" lIns="0" rIns="0" tIns="0" bIns="0">
-            <a:spAutoFit/>
-          </a:bodyPr>
-          <a:lstStyle/>
-          <a:p>
-            <a:pPr algn="l">
-              <a:lnSpc>
-                <a:spcPct val="125000"/>
-              </a:lnSpc>
-            </a:pPr>
-            <a:r>
-              <a:rPr sz="1100" b="1">
-                <a:solidFill>
-                  <a:srgbClr val="544438"/>
-                </a:solidFill>
-                <a:latin typeface="맑은 고딕"/>
-              </a:rPr>
-              <a:t>지도 투어 — 점포 위 자막</a:t>
-            </a:r>
-          </a:p>
-        </p:txBody>
-      </p:sp>
-      <p:pic>
-        <p:nvPicPr>
-          <p:cNvPr id="10" name="Picture 9" descr="policy.png"/>
-          <p:cNvPicPr>
-            <a:picLocks noChangeAspect="1"/>
-          </p:cNvPicPr>
-          <p:nvPr/>
-        </p:nvPicPr>
-        <p:blipFill>
-          <a:blip r:embed="rId4"/>
-          <a:stretch>
-            <a:fillRect/>
-          </a:stretch>
-        </p:blipFill>
-        <p:spPr>
-          <a:xfrm>
-            <a:off x="8366760" y="2286000"/>
-            <a:ext cx="3743253" cy="3017520"/>
-          </a:xfrm>
-          <a:prstGeom prst="rect">
-            <a:avLst/>
-          </a:prstGeom>
-        </p:spPr>
-      </p:pic>
+              <a:t>점수를 보여주고 끝나지 않습니다. 같은 동네를</a:t>
+            </a:r>
+          </a:p>
+          <a:p>
+            <a:pPr algn="l">
+              <a:lnSpc>
+                <a:spcPct val="142000"/>
+              </a:lnSpc>
+            </a:pPr>
+            <a:r>
+              <a:rPr sz="1100" b="0">
+                <a:solidFill>
+                  <a:srgbClr val="6B6259"/>
+                </a:solidFill>
+                <a:latin typeface="맑은 고딕"/>
+              </a:rPr>
+              <a:t>40개 업종으로 0.5초에 전부 다시 재서 "무엇을</a:t>
+            </a:r>
+          </a:p>
+          <a:p>
+            <a:pPr algn="l">
+              <a:lnSpc>
+                <a:spcPct val="142000"/>
+              </a:lnSpc>
+            </a:pPr>
+            <a:r>
+              <a:rPr sz="1100" b="0">
+                <a:solidFill>
+                  <a:srgbClr val="6B6259"/>
+                </a:solidFill>
+                <a:latin typeface="맑은 고딕"/>
+              </a:rPr>
+              <a:t>하면 몇 점"을 역계산합니다(+28.9점처럼).</a:t>
+            </a:r>
+          </a:p>
+          <a:p>
+            <a:pPr algn="l">
+              <a:lnSpc>
+                <a:spcPct val="142000"/>
+              </a:lnSpc>
+            </a:pPr>
+            <a:r>
+              <a:rPr sz="1100" b="0">
+                <a:solidFill>
+                  <a:srgbClr val="6B6259"/>
+                </a:solidFill>
+                <a:latin typeface="맑은 고딕"/>
+              </a:rPr>
+              <a:t>자료에 없는 변수(배달 비중·영업시간)는 다루지</a:t>
+            </a:r>
+          </a:p>
+          <a:p>
+            <a:pPr algn="l">
+              <a:lnSpc>
+                <a:spcPct val="142000"/>
+              </a:lnSpc>
+            </a:pPr>
+            <a:r>
+              <a:rPr sz="1100" b="0">
+                <a:solidFill>
+                  <a:srgbClr val="6B6259"/>
+                </a:solidFill>
+                <a:latin typeface="맑은 고딕"/>
+              </a:rPr>
+              <a:t>않습니다 — 지어낸 민감도는 반사실이 아닙니다.</a:t>
+            </a:r>
+          </a:p>
+        </p:txBody>
+      </p:sp>
+      <p:sp>
+        <p:nvSpPr>
+          <p:cNvPr id="9" name="Rounded Rectangle 8"/>
+          <p:cNvSpPr/>
+          <p:nvPr/>
+        </p:nvSpPr>
+        <p:spPr>
+          <a:xfrm>
+            <a:off x="4361688" y="1920240"/>
+            <a:ext cx="3401568" cy="4114800"/>
+          </a:xfrm>
+          <a:prstGeom prst="roundRect">
+            <a:avLst>
+              <a:gd name="adj" fmla="val 6000"/>
+            </a:avLst>
+          </a:prstGeom>
+          <a:solidFill>
+            <a:srgbClr val="FAF8F4"/>
+          </a:solidFill>
+          <a:ln w="12700">
+            <a:solidFill>
+              <a:srgbClr val="E4DED4"/>
+            </a:solidFill>
+          </a:ln>
+          <a:effectLst/>
+        </p:spPr>
+        <p:style>
+          <a:lnRef idx="1">
+            <a:schemeClr val="accent1"/>
+          </a:lnRef>
+          <a:fillRef idx="3">
+            <a:schemeClr val="accent1"/>
+          </a:fillRef>
+          <a:effectRef idx="2">
+            <a:schemeClr val="accent1"/>
+          </a:effectRef>
+          <a:fontRef idx="minor">
+            <a:schemeClr val="lt1"/>
+          </a:fontRef>
+        </p:style>
+        <p:txBody>
+          <a:bodyPr rtlCol="0" anchor="ctr"/>
+          <a:lstStyle/>
+          <a:p>
+            <a:pPr algn="ctr"/>
+          </a:p>
+        </p:txBody>
+      </p:sp>
+      <p:sp>
+        <p:nvSpPr>
+          <p:cNvPr id="10" name="TextBox 9"/>
+          <p:cNvSpPr txBox="1"/>
+          <p:nvPr/>
+        </p:nvSpPr>
+        <p:spPr>
+          <a:xfrm>
+            <a:off x="4617720" y="2212848"/>
+            <a:ext cx="2926080" cy="457200"/>
+          </a:xfrm>
+          <a:prstGeom prst="rect">
+            <a:avLst/>
+          </a:prstGeom>
+          <a:noFill/>
+        </p:spPr>
+        <p:txBody>
+          <a:bodyPr wrap="square" anchor="t" lIns="0" rIns="0" tIns="0" bIns="0">
+            <a:spAutoFit/>
+          </a:bodyPr>
+          <a:lstStyle/>
+          <a:p>
+            <a:pPr algn="l">
+              <a:lnSpc>
+                <a:spcPct val="125000"/>
+              </a:lnSpc>
+            </a:pPr>
+            <a:r>
+              <a:rPr sz="1700" b="1">
+                <a:solidFill>
+                  <a:srgbClr val="38322A"/>
+                </a:solidFill>
+                <a:latin typeface="맑은 고딕"/>
+              </a:rPr>
+              <a:t>금소법 빨간 펜</a:t>
+            </a:r>
+          </a:p>
+        </p:txBody>
+      </p:sp>
       <p:sp>
         <p:nvSpPr>
           <p:cNvPr id="11" name="TextBox 10"/>
@@ -3780,33 +3908,33 @@
         </p:nvSpPr>
         <p:spPr>
           <a:xfrm>
-            <a:off x="8366760" y="5989320"/>
-            <a:ext cx="3474720" cy="320040"/>
-          </a:xfrm>
-          <a:prstGeom prst="rect">
-            <a:avLst/>
-          </a:prstGeom>
-          <a:noFill/>
-        </p:spPr>
-        <p:txBody>
-          <a:bodyPr wrap="square" anchor="t" lIns="0" rIns="0" tIns="0" bIns="0">
-            <a:spAutoFit/>
-          </a:bodyPr>
-          <a:lstStyle/>
-          <a:p>
-            <a:pPr algn="l">
-              <a:lnSpc>
-                <a:spcPct val="125000"/>
-              </a:lnSpc>
-            </a:pPr>
-            <a:r>
-              <a:rPr sz="1100" b="1">
-                <a:solidFill>
-                  <a:srgbClr val="544438"/>
-                </a:solidFill>
-                <a:latin typeface="맑은 고딕"/>
-              </a:rPr>
-              <a:t>자금 — 성격·추천 이유</a:t>
+            <a:off x="4617720" y="2743200"/>
+            <a:ext cx="2926080" cy="365760"/>
+          </a:xfrm>
+          <a:prstGeom prst="rect">
+            <a:avLst/>
+          </a:prstGeom>
+          <a:noFill/>
+        </p:spPr>
+        <p:txBody>
+          <a:bodyPr wrap="square" anchor="t" lIns="0" rIns="0" tIns="0" bIns="0">
+            <a:spAutoFit/>
+          </a:bodyPr>
+          <a:lstStyle/>
+          <a:p>
+            <a:pPr algn="l">
+              <a:lnSpc>
+                <a:spcPct val="125000"/>
+              </a:lnSpc>
+            </a:pPr>
+            <a:r>
+              <a:rPr sz="1150" b="1">
+                <a:solidFill>
+                  <a:srgbClr val="9A6B00"/>
+                </a:solidFill>
+                <a:latin typeface="맑은 고딕"/>
+              </a:rPr>
+              <a:t>규제 준수가 눈에 보인다</a:t>
             </a:r>
           </a:p>
         </p:txBody>
@@ -3819,33 +3947,310 @@
         </p:nvSpPr>
         <p:spPr>
           <a:xfrm>
-            <a:off x="685800" y="6400800"/>
-            <a:ext cx="10789920" cy="320040"/>
-          </a:xfrm>
-          <a:prstGeom prst="rect">
-            <a:avLst/>
-          </a:prstGeom>
-          <a:noFill/>
-        </p:spPr>
-        <p:txBody>
-          <a:bodyPr wrap="square" anchor="t" lIns="0" rIns="0" tIns="0" bIns="0">
-            <a:spAutoFit/>
-          </a:bodyPr>
-          <a:lstStyle/>
-          <a:p>
-            <a:pPr algn="l">
-              <a:lnSpc>
-                <a:spcPct val="125000"/>
-              </a:lnSpc>
-            </a:pPr>
-            <a:r>
-              <a:rPr sz="1050" b="0">
+            <a:off x="4617720" y="3246120"/>
+            <a:ext cx="2971800" cy="2651760"/>
+          </a:xfrm>
+          <a:prstGeom prst="rect">
+            <a:avLst/>
+          </a:prstGeom>
+          <a:noFill/>
+        </p:spPr>
+        <p:txBody>
+          <a:bodyPr wrap="square" anchor="t" lIns="0" rIns="0" tIns="0" bIns="0">
+            <a:spAutoFit/>
+          </a:bodyPr>
+          <a:lstStyle/>
+          <a:p>
+            <a:pPr algn="l">
+              <a:lnSpc>
+                <a:spcPct val="142000"/>
+              </a:lnSpc>
+            </a:pPr>
+            <a:r>
+              <a:rPr sz="1100" b="0">
                 <a:solidFill>
                   <a:srgbClr val="6B6259"/>
                 </a:solidFill>
                 <a:latin typeface="맑은 고딕"/>
               </a:rPr>
-              <a:t>그 밖의 결: 두 동네 비교(A vs B 요인 승부표) · 찜 D-day + RPA 원문 순찰 · 마감 캘린더(.ics) · 내 가게 원클릭 브리핑 · 상담 리포트 인쇄 · 음성 대화 · 금소법 검사기</a:t>
+              <a:t>"무조건 대출받으실 수 있습니다"를 넣으면</a:t>
+            </a:r>
+          </a:p>
+          <a:p>
+            <a:pPr algn="l">
+              <a:lnSpc>
+                <a:spcPct val="142000"/>
+              </a:lnSpc>
+            </a:pPr>
+            <a:r>
+              <a:rPr sz="1100" b="0">
+                <a:solidFill>
+                  <a:srgbClr val="6B6259"/>
+                </a:solidFill>
+                <a:latin typeface="맑은 고딕"/>
+              </a:rPr>
+              <a:t>위반 문구가 눈앞에서 취소선으로 지워지고</a:t>
+            </a:r>
+          </a:p>
+          <a:p>
+            <a:pPr algn="l">
+              <a:lnSpc>
+                <a:spcPct val="142000"/>
+              </a:lnSpc>
+            </a:pPr>
+            <a:r>
+              <a:rPr sz="1100" b="0">
+                <a:solidFill>
+                  <a:srgbClr val="6B6259"/>
+                </a:solidFill>
+                <a:latin typeface="맑은 고딕"/>
+              </a:rPr>
+              <a:t>안전한 문구가 초록으로 들어옵니다.</a:t>
+            </a:r>
+          </a:p>
+          <a:p>
+            <a:pPr algn="l">
+              <a:lnSpc>
+                <a:spcPct val="142000"/>
+              </a:lnSpc>
+            </a:pPr>
+            <a:r>
+              <a:rPr sz="1100" b="0">
+                <a:solidFill>
+                  <a:srgbClr val="6B6259"/>
+                </a:solidFill>
+                <a:latin typeface="맑은 고딕"/>
+              </a:rPr>
+              <a:t>시연용 흉내가 아니라 모든 답변이 통과하는</a:t>
+            </a:r>
+          </a:p>
+          <a:p>
+            <a:pPr algn="l">
+              <a:lnSpc>
+                <a:spcPct val="142000"/>
+              </a:lnSpc>
+            </a:pPr>
+            <a:r>
+              <a:rPr sz="1100" b="0">
+                <a:solidFill>
+                  <a:srgbClr val="6B6259"/>
+                </a:solidFill>
+                <a:latin typeface="맑은 고딕"/>
+              </a:rPr>
+              <a:t>바로 그 가드레일의 실제 diff입니다.</a:t>
+            </a:r>
+          </a:p>
+        </p:txBody>
+      </p:sp>
+      <p:sp>
+        <p:nvSpPr>
+          <p:cNvPr id="13" name="Rounded Rectangle 12"/>
+          <p:cNvSpPr/>
+          <p:nvPr/>
+        </p:nvSpPr>
+        <p:spPr>
+          <a:xfrm>
+            <a:off x="8037575" y="1920240"/>
+            <a:ext cx="3401568" cy="4114800"/>
+          </a:xfrm>
+          <a:prstGeom prst="roundRect">
+            <a:avLst>
+              <a:gd name="adj" fmla="val 6000"/>
+            </a:avLst>
+          </a:prstGeom>
+          <a:solidFill>
+            <a:srgbClr val="FAF8F4"/>
+          </a:solidFill>
+          <a:ln w="12700">
+            <a:solidFill>
+              <a:srgbClr val="E4DED4"/>
+            </a:solidFill>
+          </a:ln>
+          <a:effectLst/>
+        </p:spPr>
+        <p:style>
+          <a:lnRef idx="1">
+            <a:schemeClr val="accent1"/>
+          </a:lnRef>
+          <a:fillRef idx="3">
+            <a:schemeClr val="accent1"/>
+          </a:fillRef>
+          <a:effectRef idx="2">
+            <a:schemeClr val="accent1"/>
+          </a:effectRef>
+          <a:fontRef idx="minor">
+            <a:schemeClr val="lt1"/>
+          </a:fontRef>
+        </p:style>
+        <p:txBody>
+          <a:bodyPr rtlCol="0" anchor="ctr"/>
+          <a:lstStyle/>
+          <a:p>
+            <a:pPr algn="ctr"/>
+          </a:p>
+        </p:txBody>
+      </p:sp>
+      <p:sp>
+        <p:nvSpPr>
+          <p:cNvPr id="14" name="TextBox 13"/>
+          <p:cNvSpPr txBox="1"/>
+          <p:nvPr/>
+        </p:nvSpPr>
+        <p:spPr>
+          <a:xfrm>
+            <a:off x="8293607" y="2212848"/>
+            <a:ext cx="2926080" cy="457200"/>
+          </a:xfrm>
+          <a:prstGeom prst="rect">
+            <a:avLst/>
+          </a:prstGeom>
+          <a:noFill/>
+        </p:spPr>
+        <p:txBody>
+          <a:bodyPr wrap="square" anchor="t" lIns="0" rIns="0" tIns="0" bIns="0">
+            <a:spAutoFit/>
+          </a:bodyPr>
+          <a:lstStyle/>
+          <a:p>
+            <a:pPr algn="l">
+              <a:lnSpc>
+                <a:spcPct val="125000"/>
+              </a:lnSpc>
+            </a:pPr>
+            <a:r>
+              <a:rPr sz="1700" b="1">
+                <a:solidFill>
+                  <a:srgbClr val="38322A"/>
+                </a:solidFill>
+                <a:latin typeface="맑은 고딕"/>
+              </a:rPr>
+              <a:t>감정 연동 3D 에이전트</a:t>
+            </a:r>
+          </a:p>
+        </p:txBody>
+      </p:sp>
+      <p:sp>
+        <p:nvSpPr>
+          <p:cNvPr id="15" name="TextBox 14"/>
+          <p:cNvSpPr txBox="1"/>
+          <p:nvPr/>
+        </p:nvSpPr>
+        <p:spPr>
+          <a:xfrm>
+            <a:off x="8293607" y="2743200"/>
+            <a:ext cx="2926080" cy="365760"/>
+          </a:xfrm>
+          <a:prstGeom prst="rect">
+            <a:avLst/>
+          </a:prstGeom>
+          <a:noFill/>
+        </p:spPr>
+        <p:txBody>
+          <a:bodyPr wrap="square" anchor="t" lIns="0" rIns="0" tIns="0" bIns="0">
+            <a:spAutoFit/>
+          </a:bodyPr>
+          <a:lstStyle/>
+          <a:p>
+            <a:pPr algn="l">
+              <a:lnSpc>
+                <a:spcPct val="125000"/>
+              </a:lnSpc>
+            </a:pPr>
+            <a:r>
+              <a:rPr sz="1150" b="1">
+                <a:solidFill>
+                  <a:srgbClr val="9A6B00"/>
+                </a:solidFill>
+                <a:latin typeface="맑은 고딕"/>
+              </a:rPr>
+              <a:t>몸짓·말·화면이 한 감정으로</a:t>
+            </a:r>
+          </a:p>
+        </p:txBody>
+      </p:sp>
+      <p:sp>
+        <p:nvSpPr>
+          <p:cNvPr id="16" name="TextBox 15"/>
+          <p:cNvSpPr txBox="1"/>
+          <p:nvPr/>
+        </p:nvSpPr>
+        <p:spPr>
+          <a:xfrm>
+            <a:off x="8293607" y="3246120"/>
+            <a:ext cx="2971800" cy="2651760"/>
+          </a:xfrm>
+          <a:prstGeom prst="rect">
+            <a:avLst/>
+          </a:prstGeom>
+          <a:noFill/>
+        </p:spPr>
+        <p:txBody>
+          <a:bodyPr wrap="square" anchor="t" lIns="0" rIns="0" tIns="0" bIns="0">
+            <a:spAutoFit/>
+          </a:bodyPr>
+          <a:lstStyle/>
+          <a:p>
+            <a:pPr algn="l">
+              <a:lnSpc>
+                <a:spcPct val="142000"/>
+              </a:lnSpc>
+            </a:pPr>
+            <a:r>
+              <a:rPr sz="1100" b="0">
+                <a:solidFill>
+                  <a:srgbClr val="6B6259"/>
+                </a:solidFill>
+                <a:latin typeface="맑은 고딕"/>
+              </a:rPr>
+              <a:t>"장사가 너무 힘들어요"라고 하면 꿀비는</a:t>
+            </a:r>
+          </a:p>
+          <a:p>
+            <a:pPr algn="l">
+              <a:lnSpc>
+                <a:spcPct val="142000"/>
+              </a:lnSpc>
+            </a:pPr>
+            <a:r>
+              <a:rPr sz="1100" b="0">
+                <a:solidFill>
+                  <a:srgbClr val="6B6259"/>
+                </a:solidFill>
+                <a:latin typeface="맑은 고딕"/>
+              </a:rPr>
+              <a:t>통통 튀지 않고 고개를 숙이고 날개를 늦춥니다</a:t>
+            </a:r>
+          </a:p>
+          <a:p>
+            <a:pPr algn="l">
+              <a:lnSpc>
+                <a:spcPct val="142000"/>
+              </a:lnSpc>
+            </a:pPr>
+            <a:r>
+              <a:rPr sz="1100" b="0">
+                <a:solidFill>
+                  <a:srgbClr val="6B6259"/>
+                </a:solidFill>
+                <a:latin typeface="맑은 고딕"/>
+              </a:rPr>
+              <a:t>(consoling). 좋은 소식엔 콘페티. 잡아 늘이면</a:t>
+            </a:r>
+          </a:p>
+          <a:p>
+            <a:pPr algn="l">
+              <a:lnSpc>
+                <a:spcPct val="142000"/>
+              </a:lnSpc>
+            </a:pPr>
+            <a:r>
+              <a:rPr sz="1100" b="0">
+                <a:solidFill>
+                  <a:srgbClr val="6B6259"/>
+                </a:solidFill>
+                <a:latin typeface="맑은 고딕"/>
+              </a:rPr>
+              <a:t>슬라임처럼 쫀득 — 외부 에셋 0의 절차적 3D.</a:t>
             </a:r>
           </a:p>
         </p:txBody>
@@ -3902,7 +4307,7 @@
                 </a:solidFill>
                 <a:latin typeface="맑은 고딕"/>
               </a:rPr>
-              <a:t>SYSTEM</a:t>
+              <a:t>SCREENS</a:t>
             </a:r>
           </a:p>
         </p:txBody>
@@ -3941,7 +4346,7 @@
                 </a:solidFill>
                 <a:latin typeface="맑은 고딕"/>
               </a:rPr>
-              <a:t>8월 13일에 이 서버가 사라져도 계속 돕니다</a:t>
+              <a:t>지금 접속해 보실 수 있습니다</a:t>
             </a:r>
           </a:p>
         </p:txBody>
@@ -4024,59 +4429,35 @@
                 </a:solidFill>
                 <a:latin typeface="맑은 고딕"/>
               </a:rPr>
-              <a:t>개발용 GPU 서버는 한시적입니다. 그래서 무거운 계산은 미리 끝내 파일로 남기고, 런타임은 그 파일만 읽습니다.</a:t>
-            </a:r>
-          </a:p>
-        </p:txBody>
-      </p:sp>
-      <p:sp>
-        <p:nvSpPr>
-          <p:cNvPr id="6" name="Rounded Rectangle 5"/>
-          <p:cNvSpPr/>
-          <p:nvPr/>
-        </p:nvSpPr>
+              <a:t>kb-kkulbee-smallbiz-multiagent.onrender.com — 목업이 아니라 배포 중인 실서비스의 화면입니다.</a:t>
+            </a:r>
+          </a:p>
+        </p:txBody>
+      </p:sp>
+      <p:pic>
+        <p:nvPicPr>
+          <p:cNvPr id="6" name="Picture 5" descr="F1.png"/>
+          <p:cNvPicPr>
+            <a:picLocks noChangeAspect="1"/>
+          </p:cNvPicPr>
+          <p:nvPr/>
+        </p:nvPicPr>
+        <p:blipFill>
+          <a:blip r:embed="rId2"/>
+          <a:stretch>
+            <a:fillRect/>
+          </a:stretch>
+        </p:blipFill>
         <p:spPr>
           <a:xfrm>
             <a:off x="685800" y="2286000"/>
-            <a:ext cx="5257800" cy="2148840"/>
-          </a:xfrm>
-          <a:prstGeom prst="roundRect">
-            <a:avLst>
-              <a:gd name="adj" fmla="val 6000"/>
-            </a:avLst>
-          </a:prstGeom>
-          <a:solidFill>
-            <a:srgbClr val="FAF8F4"/>
-          </a:solidFill>
-          <a:ln w="12700">
-            <a:solidFill>
-              <a:srgbClr val="E4DED4"/>
-            </a:solidFill>
-          </a:ln>
-          <a:effectLst/>
-        </p:spPr>
-        <p:style>
-          <a:lnRef idx="1">
-            <a:schemeClr val="accent1"/>
-          </a:lnRef>
-          <a:fillRef idx="3">
-            <a:schemeClr val="accent1"/>
-          </a:fillRef>
-          <a:effectRef idx="2">
-            <a:schemeClr val="accent1"/>
-          </a:effectRef>
-          <a:fontRef idx="minor">
-            <a:schemeClr val="lt1"/>
-          </a:fontRef>
-        </p:style>
-        <p:txBody>
-          <a:bodyPr rtlCol="0" anchor="ctr"/>
-          <a:lstStyle/>
-          <a:p>
-            <a:pPr algn="ctr"/>
-          </a:p>
-        </p:txBody>
-      </p:sp>
+            <a:ext cx="5405548" cy="3566160"/>
+          </a:xfrm>
+          <a:prstGeom prst="rect">
+            <a:avLst/>
+          </a:prstGeom>
+        </p:spPr>
+      </p:pic>
       <p:sp>
         <p:nvSpPr>
           <p:cNvPr id="7" name="TextBox 6"/>
@@ -4085,81 +4466,61 @@
         </p:nvSpPr>
         <p:spPr>
           <a:xfrm>
-            <a:off x="960120" y="2468880"/>
-            <a:ext cx="4663440" cy="320040"/>
-          </a:xfrm>
-          <a:prstGeom prst="rect">
-            <a:avLst/>
-          </a:prstGeom>
-          <a:noFill/>
-        </p:spPr>
-        <p:txBody>
-          <a:bodyPr wrap="square" anchor="t" lIns="0" rIns="0" tIns="0" bIns="0">
-            <a:spAutoFit/>
-          </a:bodyPr>
-          <a:lstStyle/>
-          <a:p>
-            <a:pPr algn="l">
-              <a:lnSpc>
-                <a:spcPct val="125000"/>
-              </a:lnSpc>
-            </a:pPr>
-            <a:r>
-              <a:rPr sz="1400" b="1">
-                <a:solidFill>
-                  <a:srgbClr val="38322A"/>
-                </a:solidFill>
-                <a:latin typeface="맑은 고딕"/>
-              </a:rPr>
-              <a:t>사전 계산 (개발 시 · GPU)</a:t>
-            </a:r>
-          </a:p>
-        </p:txBody>
-      </p:sp>
-      <p:sp>
-        <p:nvSpPr>
-          <p:cNvPr id="8" name="Oval 7"/>
-          <p:cNvSpPr/>
-          <p:nvPr/>
-        </p:nvSpPr>
-        <p:spPr>
-          <a:xfrm>
-            <a:off x="960120" y="2944368"/>
-            <a:ext cx="76200" cy="76200"/>
-          </a:xfrm>
-          <a:prstGeom prst="ellipse">
-            <a:avLst/>
-          </a:prstGeom>
-          <a:solidFill>
-            <a:srgbClr val="FFBC00"/>
-          </a:solidFill>
-          <a:ln>
-            <a:noFill/>
-          </a:ln>
-          <a:effectLst/>
-        </p:spPr>
-        <p:style>
-          <a:lnRef idx="1">
-            <a:schemeClr val="accent1"/>
-          </a:lnRef>
-          <a:fillRef idx="3">
-            <a:schemeClr val="accent1"/>
-          </a:fillRef>
-          <a:effectRef idx="2">
-            <a:schemeClr val="accent1"/>
-          </a:effectRef>
-          <a:fontRef idx="minor">
-            <a:schemeClr val="lt1"/>
-          </a:fontRef>
-        </p:style>
-        <p:txBody>
-          <a:bodyPr rtlCol="0" anchor="ctr"/>
-          <a:lstStyle/>
-          <a:p>
-            <a:pPr algn="ctr"/>
-          </a:p>
-        </p:txBody>
-      </p:sp>
+            <a:off x="685800" y="5989320"/>
+            <a:ext cx="3474720" cy="320040"/>
+          </a:xfrm>
+          <a:prstGeom prst="rect">
+            <a:avLst/>
+          </a:prstGeom>
+          <a:noFill/>
+        </p:spPr>
+        <p:txBody>
+          <a:bodyPr wrap="square" anchor="t" lIns="0" rIns="0" tIns="0" bIns="0">
+            <a:spAutoFit/>
+          </a:bodyPr>
+          <a:lstStyle/>
+          <a:p>
+            <a:pPr algn="l">
+              <a:lnSpc>
+                <a:spcPct val="125000"/>
+              </a:lnSpc>
+            </a:pPr>
+            <a:r>
+              <a:rPr sz="1100" b="1">
+                <a:solidFill>
+                  <a:srgbClr val="544438"/>
+                </a:solidFill>
+                <a:latin typeface="맑은 고딕"/>
+              </a:rPr>
+              <a:t>첫 화면 — 다섯 갈래 선택</a:t>
+            </a:r>
+          </a:p>
+        </p:txBody>
+      </p:sp>
+      <p:pic>
+        <p:nvPicPr>
+          <p:cNvPr id="8" name="Picture 7" descr="tour.png"/>
+          <p:cNvPicPr>
+            <a:picLocks noChangeAspect="1"/>
+          </p:cNvPicPr>
+          <p:nvPr/>
+        </p:nvPicPr>
+        <p:blipFill>
+          <a:blip r:embed="rId3"/>
+          <a:stretch>
+            <a:fillRect/>
+          </a:stretch>
+        </p:blipFill>
+        <p:spPr>
+          <a:xfrm>
+            <a:off x="4709160" y="2286000"/>
+            <a:ext cx="3678776" cy="3566160"/>
+          </a:xfrm>
+          <a:prstGeom prst="rect">
+            <a:avLst/>
+          </a:prstGeom>
+        </p:spPr>
+      </p:pic>
       <p:sp>
         <p:nvSpPr>
           <p:cNvPr id="9" name="TextBox 8"/>
@@ -4168,81 +4529,61 @@
         </p:nvSpPr>
         <p:spPr>
           <a:xfrm>
-            <a:off x="1161288" y="2880360"/>
-            <a:ext cx="4553712" cy="365760"/>
-          </a:xfrm>
-          <a:prstGeom prst="rect">
-            <a:avLst/>
-          </a:prstGeom>
-          <a:noFill/>
-        </p:spPr>
-        <p:txBody>
-          <a:bodyPr wrap="square" anchor="t" lIns="0" rIns="0" tIns="0" bIns="0">
-            <a:spAutoFit/>
-          </a:bodyPr>
-          <a:lstStyle/>
-          <a:p>
-            <a:pPr algn="l">
-              <a:lnSpc>
-                <a:spcPct val="125000"/>
-              </a:lnSpc>
-            </a:pPr>
-            <a:r>
-              <a:rPr sz="1150" b="0">
-                <a:solidFill>
-                  <a:srgbClr val="38322A"/>
-                </a:solidFill>
-                <a:latin typeface="맑은 고딕"/>
-              </a:rPr>
-              <a:t>기업마당 900건 수집 → 구조화</a:t>
-            </a:r>
-          </a:p>
-        </p:txBody>
-      </p:sp>
-      <p:sp>
-        <p:nvSpPr>
-          <p:cNvPr id="10" name="Oval 9"/>
-          <p:cNvSpPr/>
-          <p:nvPr/>
-        </p:nvSpPr>
-        <p:spPr>
-          <a:xfrm>
-            <a:off x="960120" y="3273552"/>
-            <a:ext cx="76200" cy="76200"/>
-          </a:xfrm>
-          <a:prstGeom prst="ellipse">
-            <a:avLst/>
-          </a:prstGeom>
-          <a:solidFill>
-            <a:srgbClr val="FFBC00"/>
-          </a:solidFill>
-          <a:ln>
-            <a:noFill/>
-          </a:ln>
-          <a:effectLst/>
-        </p:spPr>
-        <p:style>
-          <a:lnRef idx="1">
-            <a:schemeClr val="accent1"/>
-          </a:lnRef>
-          <a:fillRef idx="3">
-            <a:schemeClr val="accent1"/>
-          </a:fillRef>
-          <a:effectRef idx="2">
-            <a:schemeClr val="accent1"/>
-          </a:effectRef>
-          <a:fontRef idx="minor">
-            <a:schemeClr val="lt1"/>
-          </a:fontRef>
-        </p:style>
-        <p:txBody>
-          <a:bodyPr rtlCol="0" anchor="ctr"/>
-          <a:lstStyle/>
-          <a:p>
-            <a:pPr algn="ctr"/>
-          </a:p>
-        </p:txBody>
-      </p:sp>
+            <a:off x="4709160" y="5989320"/>
+            <a:ext cx="3474720" cy="320040"/>
+          </a:xfrm>
+          <a:prstGeom prst="rect">
+            <a:avLst/>
+          </a:prstGeom>
+          <a:noFill/>
+        </p:spPr>
+        <p:txBody>
+          <a:bodyPr wrap="square" anchor="t" lIns="0" rIns="0" tIns="0" bIns="0">
+            <a:spAutoFit/>
+          </a:bodyPr>
+          <a:lstStyle/>
+          <a:p>
+            <a:pPr algn="l">
+              <a:lnSpc>
+                <a:spcPct val="125000"/>
+              </a:lnSpc>
+            </a:pPr>
+            <a:r>
+              <a:rPr sz="1100" b="1">
+                <a:solidFill>
+                  <a:srgbClr val="544438"/>
+                </a:solidFill>
+                <a:latin typeface="맑은 고딕"/>
+              </a:rPr>
+              <a:t>지도 투어 — 점포 위 자막</a:t>
+            </a:r>
+          </a:p>
+        </p:txBody>
+      </p:sp>
+      <p:pic>
+        <p:nvPicPr>
+          <p:cNvPr id="10" name="Picture 9" descr="policy.png"/>
+          <p:cNvPicPr>
+            <a:picLocks noChangeAspect="1"/>
+          </p:cNvPicPr>
+          <p:nvPr/>
+        </p:nvPicPr>
+        <p:blipFill>
+          <a:blip r:embed="rId4"/>
+          <a:stretch>
+            <a:fillRect/>
+          </a:stretch>
+        </p:blipFill>
+        <p:spPr>
+          <a:xfrm>
+            <a:off x="8366760" y="2286000"/>
+            <a:ext cx="3743253" cy="3017520"/>
+          </a:xfrm>
+          <a:prstGeom prst="rect">
+            <a:avLst/>
+          </a:prstGeom>
+        </p:spPr>
+      </p:pic>
       <p:sp>
         <p:nvSpPr>
           <p:cNvPr id="11" name="TextBox 10"/>
@@ -4251,760 +4592,72 @@
         </p:nvSpPr>
         <p:spPr>
           <a:xfrm>
-            <a:off x="1161288" y="3209544"/>
-            <a:ext cx="4553712" cy="365760"/>
-          </a:xfrm>
-          <a:prstGeom prst="rect">
-            <a:avLst/>
-          </a:prstGeom>
-          <a:noFill/>
-        </p:spPr>
-        <p:txBody>
-          <a:bodyPr wrap="square" anchor="t" lIns="0" rIns="0" tIns="0" bIns="0">
-            <a:spAutoFit/>
-          </a:bodyPr>
-          <a:lstStyle/>
-          <a:p>
-            <a:pPr algn="l">
-              <a:lnSpc>
-                <a:spcPct val="125000"/>
-              </a:lnSpc>
-            </a:pPr>
-            <a:r>
-              <a:rPr sz="1150" b="0">
-                <a:solidFill>
-                  <a:srgbClr val="38322A"/>
-                </a:solidFill>
-                <a:latin typeface="맑은 고딕"/>
-              </a:rPr>
-              <a:t>전국 점포 272만 개 → 행정동 집계</a:t>
-            </a:r>
-          </a:p>
-        </p:txBody>
-      </p:sp>
-      <p:sp>
-        <p:nvSpPr>
-          <p:cNvPr id="12" name="Oval 11"/>
-          <p:cNvSpPr/>
-          <p:nvPr/>
-        </p:nvSpPr>
-        <p:spPr>
-          <a:xfrm>
-            <a:off x="960120" y="3602736"/>
-            <a:ext cx="76200" cy="76200"/>
-          </a:xfrm>
-          <a:prstGeom prst="ellipse">
-            <a:avLst/>
-          </a:prstGeom>
-          <a:solidFill>
-            <a:srgbClr val="FFBC00"/>
-          </a:solidFill>
-          <a:ln>
-            <a:noFill/>
-          </a:ln>
-          <a:effectLst/>
-        </p:spPr>
-        <p:style>
-          <a:lnRef idx="1">
-            <a:schemeClr val="accent1"/>
-          </a:lnRef>
-          <a:fillRef idx="3">
-            <a:schemeClr val="accent1"/>
-          </a:fillRef>
-          <a:effectRef idx="2">
-            <a:schemeClr val="accent1"/>
-          </a:effectRef>
-          <a:fontRef idx="minor">
-            <a:schemeClr val="lt1"/>
-          </a:fontRef>
-        </p:style>
-        <p:txBody>
-          <a:bodyPr rtlCol="0" anchor="ctr"/>
-          <a:lstStyle/>
-          <a:p>
-            <a:pPr algn="ctr"/>
-          </a:p>
-        </p:txBody>
-      </p:sp>
-      <p:sp>
-        <p:nvSpPr>
-          <p:cNvPr id="13" name="TextBox 12"/>
-          <p:cNvSpPr txBox="1"/>
-          <p:nvPr/>
-        </p:nvSpPr>
-        <p:spPr>
-          <a:xfrm>
-            <a:off x="1161288" y="3538728"/>
-            <a:ext cx="4553712" cy="365760"/>
-          </a:xfrm>
-          <a:prstGeom prst="rect">
-            <a:avLst/>
-          </a:prstGeom>
-          <a:noFill/>
-        </p:spPr>
-        <p:txBody>
-          <a:bodyPr wrap="square" anchor="t" lIns="0" rIns="0" tIns="0" bIns="0">
-            <a:spAutoFit/>
-          </a:bodyPr>
-          <a:lstStyle/>
-          <a:p>
-            <a:pPr algn="l">
-              <a:lnSpc>
-                <a:spcPct val="125000"/>
-              </a:lnSpc>
-            </a:pPr>
-            <a:r>
-              <a:rPr sz="1150" b="0">
-                <a:solidFill>
-                  <a:srgbClr val="38322A"/>
-                </a:solidFill>
-                <a:latin typeface="맑은 고딕"/>
-              </a:rPr>
-              <a:t>임베딩 3,326개 → 평균 중심화</a:t>
-            </a:r>
-          </a:p>
-        </p:txBody>
-      </p:sp>
-      <p:sp>
-        <p:nvSpPr>
-          <p:cNvPr id="14" name="Oval 13"/>
-          <p:cNvSpPr/>
-          <p:nvPr/>
-        </p:nvSpPr>
-        <p:spPr>
-          <a:xfrm>
-            <a:off x="960120" y="3931920"/>
-            <a:ext cx="76200" cy="76200"/>
-          </a:xfrm>
-          <a:prstGeom prst="ellipse">
-            <a:avLst/>
-          </a:prstGeom>
-          <a:solidFill>
-            <a:srgbClr val="FFBC00"/>
-          </a:solidFill>
-          <a:ln>
-            <a:noFill/>
-          </a:ln>
-          <a:effectLst/>
-        </p:spPr>
-        <p:style>
-          <a:lnRef idx="1">
-            <a:schemeClr val="accent1"/>
-          </a:lnRef>
-          <a:fillRef idx="3">
-            <a:schemeClr val="accent1"/>
-          </a:fillRef>
-          <a:effectRef idx="2">
-            <a:schemeClr val="accent1"/>
-          </a:effectRef>
-          <a:fontRef idx="minor">
-            <a:schemeClr val="lt1"/>
-          </a:fontRef>
-        </p:style>
-        <p:txBody>
-          <a:bodyPr rtlCol="0" anchor="ctr"/>
-          <a:lstStyle/>
-          <a:p>
-            <a:pPr algn="ctr"/>
-          </a:p>
-        </p:txBody>
-      </p:sp>
-      <p:sp>
-        <p:nvSpPr>
-          <p:cNvPr id="15" name="TextBox 14"/>
-          <p:cNvSpPr txBox="1"/>
-          <p:nvPr/>
-        </p:nvSpPr>
-        <p:spPr>
-          <a:xfrm>
-            <a:off x="1161288" y="3867912"/>
-            <a:ext cx="4553712" cy="365760"/>
-          </a:xfrm>
-          <a:prstGeom prst="rect">
-            <a:avLst/>
-          </a:prstGeom>
-          <a:noFill/>
-        </p:spPr>
-        <p:txBody>
-          <a:bodyPr wrap="square" anchor="t" lIns="0" rIns="0" tIns="0" bIns="0">
-            <a:spAutoFit/>
-          </a:bodyPr>
-          <a:lstStyle/>
-          <a:p>
-            <a:pPr algn="l">
-              <a:lnSpc>
-                <a:spcPct val="125000"/>
-              </a:lnSpc>
-            </a:pPr>
-            <a:r>
-              <a:rPr sz="1150" b="0">
-                <a:solidFill>
-                  <a:srgbClr val="38322A"/>
-                </a:solidFill>
-                <a:latin typeface="맑은 고딕"/>
-              </a:rPr>
-              <a:t>결과: 색인 파일 23.8MB (저장소에 포함)</a:t>
-            </a:r>
-          </a:p>
-        </p:txBody>
-      </p:sp>
-      <p:sp>
-        <p:nvSpPr>
-          <p:cNvPr id="16" name="Rounded Rectangle 15"/>
-          <p:cNvSpPr/>
-          <p:nvPr/>
-        </p:nvSpPr>
-        <p:spPr>
-          <a:xfrm>
-            <a:off x="6217920" y="2286000"/>
-            <a:ext cx="5257800" cy="2148840"/>
-          </a:xfrm>
-          <a:prstGeom prst="roundRect">
-            <a:avLst>
-              <a:gd name="adj" fmla="val 6000"/>
-            </a:avLst>
-          </a:prstGeom>
-          <a:solidFill>
-            <a:srgbClr val="FAF8F4"/>
-          </a:solidFill>
-          <a:ln w="12700">
-            <a:solidFill>
-              <a:srgbClr val="E4DED4"/>
-            </a:solidFill>
-          </a:ln>
-          <a:effectLst/>
-        </p:spPr>
-        <p:style>
-          <a:lnRef idx="1">
-            <a:schemeClr val="accent1"/>
-          </a:lnRef>
-          <a:fillRef idx="3">
-            <a:schemeClr val="accent1"/>
-          </a:fillRef>
-          <a:effectRef idx="2">
-            <a:schemeClr val="accent1"/>
-          </a:effectRef>
-          <a:fontRef idx="minor">
-            <a:schemeClr val="lt1"/>
-          </a:fontRef>
-        </p:style>
-        <p:txBody>
-          <a:bodyPr rtlCol="0" anchor="ctr"/>
-          <a:lstStyle/>
-          <a:p>
-            <a:pPr algn="ctr"/>
-          </a:p>
-        </p:txBody>
-      </p:sp>
-      <p:sp>
-        <p:nvSpPr>
-          <p:cNvPr id="17" name="TextBox 16"/>
-          <p:cNvSpPr txBox="1"/>
-          <p:nvPr/>
-        </p:nvSpPr>
-        <p:spPr>
-          <a:xfrm>
-            <a:off x="6492240" y="2468880"/>
-            <a:ext cx="4663440" cy="320040"/>
-          </a:xfrm>
-          <a:prstGeom prst="rect">
-            <a:avLst/>
-          </a:prstGeom>
-          <a:noFill/>
-        </p:spPr>
-        <p:txBody>
-          <a:bodyPr wrap="square" anchor="t" lIns="0" rIns="0" tIns="0" bIns="0">
-            <a:spAutoFit/>
-          </a:bodyPr>
-          <a:lstStyle/>
-          <a:p>
-            <a:pPr algn="l">
-              <a:lnSpc>
-                <a:spcPct val="125000"/>
-              </a:lnSpc>
-            </a:pPr>
-            <a:r>
-              <a:rPr sz="1400" b="1">
-                <a:solidFill>
-                  <a:srgbClr val="38322A"/>
-                </a:solidFill>
-                <a:latin typeface="맑은 고딕"/>
-              </a:rPr>
-              <a:t>런타임 (배포 · CPU만)</a:t>
-            </a:r>
-          </a:p>
-        </p:txBody>
-      </p:sp>
-      <p:sp>
-        <p:nvSpPr>
-          <p:cNvPr id="18" name="Oval 17"/>
-          <p:cNvSpPr/>
-          <p:nvPr/>
-        </p:nvSpPr>
-        <p:spPr>
-          <a:xfrm>
-            <a:off x="6492240" y="2944368"/>
-            <a:ext cx="76200" cy="76200"/>
-          </a:xfrm>
-          <a:prstGeom prst="ellipse">
-            <a:avLst/>
-          </a:prstGeom>
-          <a:solidFill>
-            <a:srgbClr val="FFBC00"/>
-          </a:solidFill>
-          <a:ln>
-            <a:noFill/>
-          </a:ln>
-          <a:effectLst/>
-        </p:spPr>
-        <p:style>
-          <a:lnRef idx="1">
-            <a:schemeClr val="accent1"/>
-          </a:lnRef>
-          <a:fillRef idx="3">
-            <a:schemeClr val="accent1"/>
-          </a:fillRef>
-          <a:effectRef idx="2">
-            <a:schemeClr val="accent1"/>
-          </a:effectRef>
-          <a:fontRef idx="minor">
-            <a:schemeClr val="lt1"/>
-          </a:fontRef>
-        </p:style>
-        <p:txBody>
-          <a:bodyPr rtlCol="0" anchor="ctr"/>
-          <a:lstStyle/>
-          <a:p>
-            <a:pPr algn="ctr"/>
-          </a:p>
-        </p:txBody>
-      </p:sp>
-      <p:sp>
-        <p:nvSpPr>
-          <p:cNvPr id="19" name="TextBox 18"/>
-          <p:cNvSpPr txBox="1"/>
-          <p:nvPr/>
-        </p:nvSpPr>
-        <p:spPr>
-          <a:xfrm>
-            <a:off x="6693408" y="2880360"/>
-            <a:ext cx="4553712" cy="365760"/>
-          </a:xfrm>
-          <a:prstGeom prst="rect">
-            <a:avLst/>
-          </a:prstGeom>
-          <a:noFill/>
-        </p:spPr>
-        <p:txBody>
-          <a:bodyPr wrap="square" anchor="t" lIns="0" rIns="0" tIns="0" bIns="0">
-            <a:spAutoFit/>
-          </a:bodyPr>
-          <a:lstStyle/>
-          <a:p>
-            <a:pPr algn="l">
-              <a:lnSpc>
-                <a:spcPct val="125000"/>
-              </a:lnSpc>
-            </a:pPr>
-            <a:r>
-              <a:rPr sz="1150" b="0">
-                <a:solidFill>
-                  <a:srgbClr val="38322A"/>
-                </a:solidFill>
-                <a:latin typeface="맑은 고딕"/>
-              </a:rPr>
-              <a:t>질의 임베딩: int8 ONNX · 5ms · 키 불필요</a:t>
-            </a:r>
-          </a:p>
-        </p:txBody>
-      </p:sp>
-      <p:sp>
-        <p:nvSpPr>
-          <p:cNvPr id="20" name="Oval 19"/>
-          <p:cNvSpPr/>
-          <p:nvPr/>
-        </p:nvSpPr>
-        <p:spPr>
-          <a:xfrm>
-            <a:off x="6492240" y="3273552"/>
-            <a:ext cx="76200" cy="76200"/>
-          </a:xfrm>
-          <a:prstGeom prst="ellipse">
-            <a:avLst/>
-          </a:prstGeom>
-          <a:solidFill>
-            <a:srgbClr val="FFBC00"/>
-          </a:solidFill>
-          <a:ln>
-            <a:noFill/>
-          </a:ln>
-          <a:effectLst/>
-        </p:spPr>
-        <p:style>
-          <a:lnRef idx="1">
-            <a:schemeClr val="accent1"/>
-          </a:lnRef>
-          <a:fillRef idx="3">
-            <a:schemeClr val="accent1"/>
-          </a:fillRef>
-          <a:effectRef idx="2">
-            <a:schemeClr val="accent1"/>
-          </a:effectRef>
-          <a:fontRef idx="minor">
-            <a:schemeClr val="lt1"/>
-          </a:fontRef>
-        </p:style>
-        <p:txBody>
-          <a:bodyPr rtlCol="0" anchor="ctr"/>
-          <a:lstStyle/>
-          <a:p>
-            <a:pPr algn="ctr"/>
-          </a:p>
-        </p:txBody>
-      </p:sp>
-      <p:sp>
-        <p:nvSpPr>
-          <p:cNvPr id="21" name="TextBox 20"/>
-          <p:cNvSpPr txBox="1"/>
-          <p:nvPr/>
-        </p:nvSpPr>
-        <p:spPr>
-          <a:xfrm>
-            <a:off x="6693408" y="3209544"/>
-            <a:ext cx="4553712" cy="365760"/>
-          </a:xfrm>
-          <a:prstGeom prst="rect">
-            <a:avLst/>
-          </a:prstGeom>
-          <a:noFill/>
-        </p:spPr>
-        <p:txBody>
-          <a:bodyPr wrap="square" anchor="t" lIns="0" rIns="0" tIns="0" bIns="0">
-            <a:spAutoFit/>
-          </a:bodyPr>
-          <a:lstStyle/>
-          <a:p>
-            <a:pPr algn="l">
-              <a:lnSpc>
-                <a:spcPct val="125000"/>
-              </a:lnSpc>
-            </a:pPr>
-            <a:r>
-              <a:rPr sz="1150" b="0">
-                <a:solidFill>
-                  <a:srgbClr val="38322A"/>
-                </a:solidFill>
-                <a:latin typeface="맑은 고딕"/>
-              </a:rPr>
-              <a:t>검색: BM25 + 코사인 · 12~55ms</a:t>
-            </a:r>
-          </a:p>
-        </p:txBody>
-      </p:sp>
-      <p:sp>
-        <p:nvSpPr>
-          <p:cNvPr id="22" name="Oval 21"/>
-          <p:cNvSpPr/>
-          <p:nvPr/>
-        </p:nvSpPr>
-        <p:spPr>
-          <a:xfrm>
-            <a:off x="6492240" y="3602736"/>
-            <a:ext cx="76200" cy="76200"/>
-          </a:xfrm>
-          <a:prstGeom prst="ellipse">
-            <a:avLst/>
-          </a:prstGeom>
-          <a:solidFill>
-            <a:srgbClr val="FFBC00"/>
-          </a:solidFill>
-          <a:ln>
-            <a:noFill/>
-          </a:ln>
-          <a:effectLst/>
-        </p:spPr>
-        <p:style>
-          <a:lnRef idx="1">
-            <a:schemeClr val="accent1"/>
-          </a:lnRef>
-          <a:fillRef idx="3">
-            <a:schemeClr val="accent1"/>
-          </a:fillRef>
-          <a:effectRef idx="2">
-            <a:schemeClr val="accent1"/>
-          </a:effectRef>
-          <a:fontRef idx="minor">
-            <a:schemeClr val="lt1"/>
-          </a:fontRef>
-        </p:style>
-        <p:txBody>
-          <a:bodyPr rtlCol="0" anchor="ctr"/>
-          <a:lstStyle/>
-          <a:p>
-            <a:pPr algn="ctr"/>
-          </a:p>
-        </p:txBody>
-      </p:sp>
-      <p:sp>
-        <p:nvSpPr>
-          <p:cNvPr id="23" name="TextBox 22"/>
-          <p:cNvSpPr txBox="1"/>
-          <p:nvPr/>
-        </p:nvSpPr>
-        <p:spPr>
-          <a:xfrm>
-            <a:off x="6693408" y="3538728"/>
-            <a:ext cx="4553712" cy="365760"/>
-          </a:xfrm>
-          <a:prstGeom prst="rect">
-            <a:avLst/>
-          </a:prstGeom>
-          <a:noFill/>
-        </p:spPr>
-        <p:txBody>
-          <a:bodyPr wrap="square" anchor="t" lIns="0" rIns="0" tIns="0" bIns="0">
-            <a:spAutoFit/>
-          </a:bodyPr>
-          <a:lstStyle/>
-          <a:p>
-            <a:pPr algn="l">
-              <a:lnSpc>
-                <a:spcPct val="125000"/>
-              </a:lnSpc>
-            </a:pPr>
-            <a:r>
-              <a:rPr sz="1150" b="0">
-                <a:solidFill>
-                  <a:srgbClr val="38322A"/>
-                </a:solidFill>
-                <a:latin typeface="맑은 고딕"/>
-              </a:rPr>
-              <a:t>LLM: Gemini (선택) · 없으면 규칙+템플릿</a:t>
-            </a:r>
-          </a:p>
-        </p:txBody>
-      </p:sp>
-      <p:sp>
-        <p:nvSpPr>
-          <p:cNvPr id="24" name="Oval 23"/>
-          <p:cNvSpPr/>
-          <p:nvPr/>
-        </p:nvSpPr>
-        <p:spPr>
-          <a:xfrm>
-            <a:off x="6492240" y="3931920"/>
-            <a:ext cx="76200" cy="76200"/>
-          </a:xfrm>
-          <a:prstGeom prst="ellipse">
-            <a:avLst/>
-          </a:prstGeom>
-          <a:solidFill>
-            <a:srgbClr val="FFBC00"/>
-          </a:solidFill>
-          <a:ln>
-            <a:noFill/>
-          </a:ln>
-          <a:effectLst/>
-        </p:spPr>
-        <p:style>
-          <a:lnRef idx="1">
-            <a:schemeClr val="accent1"/>
-          </a:lnRef>
-          <a:fillRef idx="3">
-            <a:schemeClr val="accent1"/>
-          </a:fillRef>
-          <a:effectRef idx="2">
-            <a:schemeClr val="accent1"/>
-          </a:effectRef>
-          <a:fontRef idx="minor">
-            <a:schemeClr val="lt1"/>
-          </a:fontRef>
-        </p:style>
-        <p:txBody>
-          <a:bodyPr rtlCol="0" anchor="ctr"/>
-          <a:lstStyle/>
-          <a:p>
-            <a:pPr algn="ctr"/>
-          </a:p>
-        </p:txBody>
-      </p:sp>
-      <p:sp>
-        <p:nvSpPr>
-          <p:cNvPr id="25" name="TextBox 24"/>
-          <p:cNvSpPr txBox="1"/>
-          <p:nvPr/>
-        </p:nvSpPr>
-        <p:spPr>
-          <a:xfrm>
-            <a:off x="6693408" y="3867912"/>
-            <a:ext cx="4553712" cy="365760"/>
-          </a:xfrm>
-          <a:prstGeom prst="rect">
-            <a:avLst/>
-          </a:prstGeom>
-          <a:noFill/>
-        </p:spPr>
-        <p:txBody>
-          <a:bodyPr wrap="square" anchor="t" lIns="0" rIns="0" tIns="0" bIns="0">
-            <a:spAutoFit/>
-          </a:bodyPr>
-          <a:lstStyle/>
-          <a:p>
-            <a:pPr algn="l">
-              <a:lnSpc>
-                <a:spcPct val="125000"/>
-              </a:lnSpc>
-            </a:pPr>
-            <a:r>
-              <a:rPr sz="1150" b="0">
-                <a:solidFill>
-                  <a:srgbClr val="38322A"/>
-                </a:solidFill>
-                <a:latin typeface="맑은 고딕"/>
-              </a:rPr>
-              <a:t>메모리: 354MB (무료 등급 512MB 안)</a:t>
-            </a:r>
-          </a:p>
-        </p:txBody>
-      </p:sp>
-      <p:sp>
-        <p:nvSpPr>
-          <p:cNvPr id="26" name="Rounded Rectangle 25"/>
-          <p:cNvSpPr/>
-          <p:nvPr/>
-        </p:nvSpPr>
-        <p:spPr>
-          <a:xfrm>
-            <a:off x="685800" y="4663440"/>
-            <a:ext cx="10789920" cy="1600200"/>
-          </a:xfrm>
-          <a:prstGeom prst="roundRect">
-            <a:avLst>
-              <a:gd name="adj" fmla="val 6000"/>
-            </a:avLst>
-          </a:prstGeom>
-          <a:solidFill>
-            <a:srgbClr val="FFF9E8"/>
-          </a:solidFill>
-          <a:ln w="12700">
-            <a:solidFill>
-              <a:srgbClr val="FFBC00"/>
-            </a:solidFill>
-          </a:ln>
-          <a:effectLst/>
-        </p:spPr>
-        <p:style>
-          <a:lnRef idx="1">
-            <a:schemeClr val="accent1"/>
-          </a:lnRef>
-          <a:fillRef idx="3">
-            <a:schemeClr val="accent1"/>
-          </a:fillRef>
-          <a:effectRef idx="2">
-            <a:schemeClr val="accent1"/>
-          </a:effectRef>
-          <a:fontRef idx="minor">
-            <a:schemeClr val="lt1"/>
-          </a:fontRef>
-        </p:style>
-        <p:txBody>
-          <a:bodyPr rtlCol="0" anchor="ctr"/>
-          <a:lstStyle/>
-          <a:p>
-            <a:pPr algn="ctr"/>
-          </a:p>
-        </p:txBody>
-      </p:sp>
-      <p:sp>
-        <p:nvSpPr>
-          <p:cNvPr id="27" name="TextBox 26"/>
-          <p:cNvSpPr txBox="1"/>
-          <p:nvPr/>
-        </p:nvSpPr>
-        <p:spPr>
-          <a:xfrm>
-            <a:off x="960120" y="4846320"/>
-            <a:ext cx="10241280" cy="320040"/>
-          </a:xfrm>
-          <a:prstGeom prst="rect">
-            <a:avLst/>
-          </a:prstGeom>
-          <a:noFill/>
-        </p:spPr>
-        <p:txBody>
-          <a:bodyPr wrap="square" anchor="t" lIns="0" rIns="0" tIns="0" bIns="0">
-            <a:spAutoFit/>
-          </a:bodyPr>
-          <a:lstStyle/>
-          <a:p>
-            <a:pPr algn="l">
-              <a:lnSpc>
-                <a:spcPct val="125000"/>
-              </a:lnSpc>
-            </a:pPr>
-            <a:r>
-              <a:rPr sz="1400" b="1">
-                <a:solidFill>
-                  <a:srgbClr val="38322A"/>
-                </a:solidFill>
-                <a:latin typeface="맑은 고딕"/>
-              </a:rPr>
-              <a:t>512MB에 넣기 위해 실제로 잰 것</a:t>
-            </a:r>
-          </a:p>
-        </p:txBody>
-      </p:sp>
-      <p:sp>
-        <p:nvSpPr>
-          <p:cNvPr id="28" name="TextBox 27"/>
-          <p:cNvSpPr txBox="1"/>
-          <p:nvPr/>
-        </p:nvSpPr>
-        <p:spPr>
-          <a:xfrm>
-            <a:off x="960120" y="5230368"/>
-            <a:ext cx="10241280" cy="914400"/>
-          </a:xfrm>
-          <a:prstGeom prst="rect">
-            <a:avLst/>
-          </a:prstGeom>
-          <a:noFill/>
-        </p:spPr>
-        <p:txBody>
-          <a:bodyPr wrap="square" anchor="t" lIns="0" rIns="0" tIns="0" bIns="0">
-            <a:spAutoFit/>
-          </a:bodyPr>
-          <a:lstStyle/>
-          <a:p>
-            <a:pPr algn="l">
-              <a:lnSpc>
-                <a:spcPct val="135000"/>
-              </a:lnSpc>
-            </a:pPr>
-            <a:r>
-              <a:rPr sz="1150" b="0">
+            <a:off x="8366760" y="5989320"/>
+            <a:ext cx="3474720" cy="320040"/>
+          </a:xfrm>
+          <a:prstGeom prst="rect">
+            <a:avLst/>
+          </a:prstGeom>
+          <a:noFill/>
+        </p:spPr>
+        <p:txBody>
+          <a:bodyPr wrap="square" anchor="t" lIns="0" rIns="0" tIns="0" bIns="0">
+            <a:spAutoFit/>
+          </a:bodyPr>
+          <a:lstStyle/>
+          <a:p>
+            <a:pPr algn="l">
+              <a:lnSpc>
+                <a:spcPct val="125000"/>
+              </a:lnSpc>
+            </a:pPr>
+            <a:r>
+              <a:rPr sz="1100" b="1">
                 <a:solidFill>
                   <a:srgbClr val="544438"/>
                 </a:solidFill>
                 <a:latin typeface="맑은 고딕"/>
               </a:rPr>
-              <a:t>배포 전에 메모리를 재 보니 611MB였습니다. 안 재고 올렸으면 그 자리에서 죽었습니다. 범인은 뜻밖에도 토크나이저였습니다 — 17MB짜리 tokenizer.json을 올리는 데 280MB를 씁니다.</a:t>
-            </a:r>
-          </a:p>
-          <a:p>
-            <a:pPr algn="l">
-              <a:lnSpc>
-                <a:spcPct val="135000"/>
-              </a:lnSpc>
-            </a:pPr>
-            <a:r>
-              <a:rPr sz="1150" b="0">
-                <a:solidFill>
-                  <a:srgbClr val="544438"/>
-                </a:solidFill>
-                <a:latin typeface="맑은 고딕"/>
-              </a:rPr>
-              <a:t>sentencepiece 원본(5MB)으로 바꾸면 70MB입니다. 다만 토큰 번호가 어긋나면 검색이 조용히 망가지므로, 두 방식의 출력을 대조해 **비트 단위로 같음**을 확인하고 바꿨습니다. ONNX 메모리 아레나도 껐습니다(200MB→9MB). 결과 611MB → 354MB.</a:t>
+              <a:t>자금 — 성격·추천 이유</a:t>
+            </a:r>
+          </a:p>
+        </p:txBody>
+      </p:sp>
+      <p:sp>
+        <p:nvSpPr>
+          <p:cNvPr id="12" name="TextBox 11"/>
+          <p:cNvSpPr txBox="1"/>
+          <p:nvPr/>
+        </p:nvSpPr>
+        <p:spPr>
+          <a:xfrm>
+            <a:off x="685800" y="6400800"/>
+            <a:ext cx="10789920" cy="320040"/>
+          </a:xfrm>
+          <a:prstGeom prst="rect">
+            <a:avLst/>
+          </a:prstGeom>
+          <a:noFill/>
+        </p:spPr>
+        <p:txBody>
+          <a:bodyPr wrap="square" anchor="t" lIns="0" rIns="0" tIns="0" bIns="0">
+            <a:spAutoFit/>
+          </a:bodyPr>
+          <a:lstStyle/>
+          <a:p>
+            <a:pPr algn="l">
+              <a:lnSpc>
+                <a:spcPct val="125000"/>
+              </a:lnSpc>
+            </a:pPr>
+            <a:r>
+              <a:rPr sz="1050" b="0">
+                <a:solidFill>
+                  <a:srgbClr val="6B6259"/>
+                </a:solidFill>
+                <a:latin typeface="맑은 고딕"/>
+              </a:rPr>
+              <a:t>그 밖의 결: 두 동네 비교(A vs B 요인 승부표) · 찜 D-day + RPA 원문 순찰 · 마감 캘린더(.ics) · 내 가게 원클릭 브리핑 · 상담 리포트 인쇄 · 음성 대화 · 금소법 검사기</a:t>
             </a:r>
           </a:p>
         </p:txBody>
@@ -5061,7 +4714,7 @@
                 </a:solidFill>
                 <a:latin typeface="맑은 고딕"/>
               </a:rPr>
-              <a:t>WHY US</a:t>
+              <a:t>SYSTEM</a:t>
             </a:r>
           </a:p>
         </p:txBody>
@@ -5100,7 +4753,7 @@
                 </a:solidFill>
                 <a:latin typeface="맑은 고딕"/>
               </a:rPr>
-              <a:t>정직을 설계에 넣었습니다</a:t>
+              <a:t>8월 13일에 이 서버가 사라져도 계속 돕니다</a:t>
             </a:r>
           </a:p>
         </p:txBody>
@@ -5157,8 +4810,95 @@
         </p:nvSpPr>
         <p:spPr>
           <a:xfrm>
-            <a:off x="685800" y="1828800"/>
-            <a:ext cx="3657600" cy="320040"/>
+            <a:off x="685800" y="1737360"/>
+            <a:ext cx="10789920" cy="365760"/>
+          </a:xfrm>
+          <a:prstGeom prst="rect">
+            <a:avLst/>
+          </a:prstGeom>
+          <a:noFill/>
+        </p:spPr>
+        <p:txBody>
+          <a:bodyPr wrap="square" anchor="t" lIns="0" rIns="0" tIns="0" bIns="0">
+            <a:spAutoFit/>
+          </a:bodyPr>
+          <a:lstStyle/>
+          <a:p>
+            <a:pPr algn="l">
+              <a:lnSpc>
+                <a:spcPct val="125000"/>
+              </a:lnSpc>
+            </a:pPr>
+            <a:r>
+              <a:rPr sz="1300" b="0">
+                <a:solidFill>
+                  <a:srgbClr val="6B6259"/>
+                </a:solidFill>
+                <a:latin typeface="맑은 고딕"/>
+              </a:rPr>
+              <a:t>개발용 GPU 서버는 한시적입니다. 그래서 무거운 계산은 미리 끝내 파일로 남기고, 런타임은 그 파일만 읽습니다.</a:t>
+            </a:r>
+          </a:p>
+        </p:txBody>
+      </p:sp>
+      <p:sp>
+        <p:nvSpPr>
+          <p:cNvPr id="6" name="Rounded Rectangle 5"/>
+          <p:cNvSpPr/>
+          <p:nvPr/>
+        </p:nvSpPr>
+        <p:spPr>
+          <a:xfrm>
+            <a:off x="685800" y="2286000"/>
+            <a:ext cx="5257800" cy="2148840"/>
+          </a:xfrm>
+          <a:prstGeom prst="roundRect">
+            <a:avLst>
+              <a:gd name="adj" fmla="val 6000"/>
+            </a:avLst>
+          </a:prstGeom>
+          <a:solidFill>
+            <a:srgbClr val="FAF8F4"/>
+          </a:solidFill>
+          <a:ln w="12700">
+            <a:solidFill>
+              <a:srgbClr val="E4DED4"/>
+            </a:solidFill>
+          </a:ln>
+          <a:effectLst/>
+        </p:spPr>
+        <p:style>
+          <a:lnRef idx="1">
+            <a:schemeClr val="accent1"/>
+          </a:lnRef>
+          <a:fillRef idx="3">
+            <a:schemeClr val="accent1"/>
+          </a:fillRef>
+          <a:effectRef idx="2">
+            <a:schemeClr val="accent1"/>
+          </a:effectRef>
+          <a:fontRef idx="minor">
+            <a:schemeClr val="lt1"/>
+          </a:fontRef>
+        </p:style>
+        <p:txBody>
+          <a:bodyPr rtlCol="0" anchor="ctr"/>
+          <a:lstStyle/>
+          <a:p>
+            <a:pPr algn="ctr"/>
+          </a:p>
+        </p:txBody>
+      </p:sp>
+      <p:sp>
+        <p:nvSpPr>
+          <p:cNvPr id="7" name="TextBox 6"/>
+          <p:cNvSpPr txBox="1"/>
+          <p:nvPr/>
+        </p:nvSpPr>
+        <p:spPr>
+          <a:xfrm>
+            <a:off x="960120" y="2468880"/>
+            <a:ext cx="4663440" cy="320040"/>
           </a:xfrm>
           <a:prstGeom prst="rect">
             <a:avLst/>
@@ -5183,60 +4923,401 @@
                 </a:solidFill>
                 <a:latin typeface="맑은 고딕"/>
               </a:rPr>
-              <a:t>모르면 모른다고 합니다</a:t>
-            </a:r>
-          </a:p>
-        </p:txBody>
-      </p:sp>
-      <p:sp>
-        <p:nvSpPr>
-          <p:cNvPr id="6" name="TextBox 5"/>
-          <p:cNvSpPr txBox="1"/>
-          <p:nvPr/>
-        </p:nvSpPr>
-        <p:spPr>
-          <a:xfrm>
-            <a:off x="4480560" y="1847088"/>
-            <a:ext cx="6949440" cy="640080"/>
-          </a:xfrm>
-          <a:prstGeom prst="rect">
-            <a:avLst/>
-          </a:prstGeom>
-          <a:noFill/>
-        </p:spPr>
-        <p:txBody>
-          <a:bodyPr wrap="square" anchor="t" lIns="0" rIns="0" tIns="0" bIns="0">
-            <a:spAutoFit/>
-          </a:bodyPr>
-          <a:lstStyle/>
-          <a:p>
-            <a:pPr algn="l">
-              <a:lnSpc>
-                <a:spcPct val="130000"/>
+              <a:t>사전 계산 (개발 시 · GPU)</a:t>
+            </a:r>
+          </a:p>
+        </p:txBody>
+      </p:sp>
+      <p:sp>
+        <p:nvSpPr>
+          <p:cNvPr id="8" name="Oval 7"/>
+          <p:cNvSpPr/>
+          <p:nvPr/>
+        </p:nvSpPr>
+        <p:spPr>
+          <a:xfrm>
+            <a:off x="960120" y="2944368"/>
+            <a:ext cx="76200" cy="76200"/>
+          </a:xfrm>
+          <a:prstGeom prst="ellipse">
+            <a:avLst/>
+          </a:prstGeom>
+          <a:solidFill>
+            <a:srgbClr val="FFBC00"/>
+          </a:solidFill>
+          <a:ln>
+            <a:noFill/>
+          </a:ln>
+          <a:effectLst/>
+        </p:spPr>
+        <p:style>
+          <a:lnRef idx="1">
+            <a:schemeClr val="accent1"/>
+          </a:lnRef>
+          <a:fillRef idx="3">
+            <a:schemeClr val="accent1"/>
+          </a:fillRef>
+          <a:effectRef idx="2">
+            <a:schemeClr val="accent1"/>
+          </a:effectRef>
+          <a:fontRef idx="minor">
+            <a:schemeClr val="lt1"/>
+          </a:fontRef>
+        </p:style>
+        <p:txBody>
+          <a:bodyPr rtlCol="0" anchor="ctr"/>
+          <a:lstStyle/>
+          <a:p>
+            <a:pPr algn="ctr"/>
+          </a:p>
+        </p:txBody>
+      </p:sp>
+      <p:sp>
+        <p:nvSpPr>
+          <p:cNvPr id="9" name="TextBox 8"/>
+          <p:cNvSpPr txBox="1"/>
+          <p:nvPr/>
+        </p:nvSpPr>
+        <p:spPr>
+          <a:xfrm>
+            <a:off x="1161288" y="2880360"/>
+            <a:ext cx="4553712" cy="365760"/>
+          </a:xfrm>
+          <a:prstGeom prst="rect">
+            <a:avLst/>
+          </a:prstGeom>
+          <a:noFill/>
+        </p:spPr>
+        <p:txBody>
+          <a:bodyPr wrap="square" anchor="t" lIns="0" rIns="0" tIns="0" bIns="0">
+            <a:spAutoFit/>
+          </a:bodyPr>
+          <a:lstStyle/>
+          <a:p>
+            <a:pPr algn="l">
+              <a:lnSpc>
+                <a:spcPct val="125000"/>
               </a:lnSpc>
             </a:pPr>
             <a:r>
               <a:rPr sz="1150" b="0">
                 <a:solidFill>
-                  <a:srgbClr val="6B6259"/>
-                </a:solidFill>
-                <a:latin typeface="맑은 고딕"/>
-              </a:rPr>
-              <a:t>맞는 공고가 없으면 빈손으로 답합니다. 900건 중 무엇이든 상위 다섯 개는 뽑히지만, 관련 없는 목록은 사장님의 시간을 뺏습니다.</a:t>
-            </a:r>
-          </a:p>
-        </p:txBody>
-      </p:sp>
-      <p:sp>
-        <p:nvSpPr>
-          <p:cNvPr id="7" name="TextBox 6"/>
-          <p:cNvSpPr txBox="1"/>
-          <p:nvPr/>
-        </p:nvSpPr>
-        <p:spPr>
-          <a:xfrm>
-            <a:off x="685800" y="2697480"/>
-            <a:ext cx="3657600" cy="320040"/>
+                  <a:srgbClr val="38322A"/>
+                </a:solidFill>
+                <a:latin typeface="맑은 고딕"/>
+              </a:rPr>
+              <a:t>기업마당 900건 수집 → 구조화</a:t>
+            </a:r>
+          </a:p>
+        </p:txBody>
+      </p:sp>
+      <p:sp>
+        <p:nvSpPr>
+          <p:cNvPr id="10" name="Oval 9"/>
+          <p:cNvSpPr/>
+          <p:nvPr/>
+        </p:nvSpPr>
+        <p:spPr>
+          <a:xfrm>
+            <a:off x="960120" y="3273552"/>
+            <a:ext cx="76200" cy="76200"/>
+          </a:xfrm>
+          <a:prstGeom prst="ellipse">
+            <a:avLst/>
+          </a:prstGeom>
+          <a:solidFill>
+            <a:srgbClr val="FFBC00"/>
+          </a:solidFill>
+          <a:ln>
+            <a:noFill/>
+          </a:ln>
+          <a:effectLst/>
+        </p:spPr>
+        <p:style>
+          <a:lnRef idx="1">
+            <a:schemeClr val="accent1"/>
+          </a:lnRef>
+          <a:fillRef idx="3">
+            <a:schemeClr val="accent1"/>
+          </a:fillRef>
+          <a:effectRef idx="2">
+            <a:schemeClr val="accent1"/>
+          </a:effectRef>
+          <a:fontRef idx="minor">
+            <a:schemeClr val="lt1"/>
+          </a:fontRef>
+        </p:style>
+        <p:txBody>
+          <a:bodyPr rtlCol="0" anchor="ctr"/>
+          <a:lstStyle/>
+          <a:p>
+            <a:pPr algn="ctr"/>
+          </a:p>
+        </p:txBody>
+      </p:sp>
+      <p:sp>
+        <p:nvSpPr>
+          <p:cNvPr id="11" name="TextBox 10"/>
+          <p:cNvSpPr txBox="1"/>
+          <p:nvPr/>
+        </p:nvSpPr>
+        <p:spPr>
+          <a:xfrm>
+            <a:off x="1161288" y="3209544"/>
+            <a:ext cx="4553712" cy="365760"/>
+          </a:xfrm>
+          <a:prstGeom prst="rect">
+            <a:avLst/>
+          </a:prstGeom>
+          <a:noFill/>
+        </p:spPr>
+        <p:txBody>
+          <a:bodyPr wrap="square" anchor="t" lIns="0" rIns="0" tIns="0" bIns="0">
+            <a:spAutoFit/>
+          </a:bodyPr>
+          <a:lstStyle/>
+          <a:p>
+            <a:pPr algn="l">
+              <a:lnSpc>
+                <a:spcPct val="125000"/>
+              </a:lnSpc>
+            </a:pPr>
+            <a:r>
+              <a:rPr sz="1150" b="0">
+                <a:solidFill>
+                  <a:srgbClr val="38322A"/>
+                </a:solidFill>
+                <a:latin typeface="맑은 고딕"/>
+              </a:rPr>
+              <a:t>전국 점포 272만 개 → 행정동 집계</a:t>
+            </a:r>
+          </a:p>
+        </p:txBody>
+      </p:sp>
+      <p:sp>
+        <p:nvSpPr>
+          <p:cNvPr id="12" name="Oval 11"/>
+          <p:cNvSpPr/>
+          <p:nvPr/>
+        </p:nvSpPr>
+        <p:spPr>
+          <a:xfrm>
+            <a:off x="960120" y="3602736"/>
+            <a:ext cx="76200" cy="76200"/>
+          </a:xfrm>
+          <a:prstGeom prst="ellipse">
+            <a:avLst/>
+          </a:prstGeom>
+          <a:solidFill>
+            <a:srgbClr val="FFBC00"/>
+          </a:solidFill>
+          <a:ln>
+            <a:noFill/>
+          </a:ln>
+          <a:effectLst/>
+        </p:spPr>
+        <p:style>
+          <a:lnRef idx="1">
+            <a:schemeClr val="accent1"/>
+          </a:lnRef>
+          <a:fillRef idx="3">
+            <a:schemeClr val="accent1"/>
+          </a:fillRef>
+          <a:effectRef idx="2">
+            <a:schemeClr val="accent1"/>
+          </a:effectRef>
+          <a:fontRef idx="minor">
+            <a:schemeClr val="lt1"/>
+          </a:fontRef>
+        </p:style>
+        <p:txBody>
+          <a:bodyPr rtlCol="0" anchor="ctr"/>
+          <a:lstStyle/>
+          <a:p>
+            <a:pPr algn="ctr"/>
+          </a:p>
+        </p:txBody>
+      </p:sp>
+      <p:sp>
+        <p:nvSpPr>
+          <p:cNvPr id="13" name="TextBox 12"/>
+          <p:cNvSpPr txBox="1"/>
+          <p:nvPr/>
+        </p:nvSpPr>
+        <p:spPr>
+          <a:xfrm>
+            <a:off x="1161288" y="3538728"/>
+            <a:ext cx="4553712" cy="365760"/>
+          </a:xfrm>
+          <a:prstGeom prst="rect">
+            <a:avLst/>
+          </a:prstGeom>
+          <a:noFill/>
+        </p:spPr>
+        <p:txBody>
+          <a:bodyPr wrap="square" anchor="t" lIns="0" rIns="0" tIns="0" bIns="0">
+            <a:spAutoFit/>
+          </a:bodyPr>
+          <a:lstStyle/>
+          <a:p>
+            <a:pPr algn="l">
+              <a:lnSpc>
+                <a:spcPct val="125000"/>
+              </a:lnSpc>
+            </a:pPr>
+            <a:r>
+              <a:rPr sz="1150" b="0">
+                <a:solidFill>
+                  <a:srgbClr val="38322A"/>
+                </a:solidFill>
+                <a:latin typeface="맑은 고딕"/>
+              </a:rPr>
+              <a:t>임베딩 3,326개 → 평균 중심화</a:t>
+            </a:r>
+          </a:p>
+        </p:txBody>
+      </p:sp>
+      <p:sp>
+        <p:nvSpPr>
+          <p:cNvPr id="14" name="Oval 13"/>
+          <p:cNvSpPr/>
+          <p:nvPr/>
+        </p:nvSpPr>
+        <p:spPr>
+          <a:xfrm>
+            <a:off x="960120" y="3931920"/>
+            <a:ext cx="76200" cy="76200"/>
+          </a:xfrm>
+          <a:prstGeom prst="ellipse">
+            <a:avLst/>
+          </a:prstGeom>
+          <a:solidFill>
+            <a:srgbClr val="FFBC00"/>
+          </a:solidFill>
+          <a:ln>
+            <a:noFill/>
+          </a:ln>
+          <a:effectLst/>
+        </p:spPr>
+        <p:style>
+          <a:lnRef idx="1">
+            <a:schemeClr val="accent1"/>
+          </a:lnRef>
+          <a:fillRef idx="3">
+            <a:schemeClr val="accent1"/>
+          </a:fillRef>
+          <a:effectRef idx="2">
+            <a:schemeClr val="accent1"/>
+          </a:effectRef>
+          <a:fontRef idx="minor">
+            <a:schemeClr val="lt1"/>
+          </a:fontRef>
+        </p:style>
+        <p:txBody>
+          <a:bodyPr rtlCol="0" anchor="ctr"/>
+          <a:lstStyle/>
+          <a:p>
+            <a:pPr algn="ctr"/>
+          </a:p>
+        </p:txBody>
+      </p:sp>
+      <p:sp>
+        <p:nvSpPr>
+          <p:cNvPr id="15" name="TextBox 14"/>
+          <p:cNvSpPr txBox="1"/>
+          <p:nvPr/>
+        </p:nvSpPr>
+        <p:spPr>
+          <a:xfrm>
+            <a:off x="1161288" y="3867912"/>
+            <a:ext cx="4553712" cy="365760"/>
+          </a:xfrm>
+          <a:prstGeom prst="rect">
+            <a:avLst/>
+          </a:prstGeom>
+          <a:noFill/>
+        </p:spPr>
+        <p:txBody>
+          <a:bodyPr wrap="square" anchor="t" lIns="0" rIns="0" tIns="0" bIns="0">
+            <a:spAutoFit/>
+          </a:bodyPr>
+          <a:lstStyle/>
+          <a:p>
+            <a:pPr algn="l">
+              <a:lnSpc>
+                <a:spcPct val="125000"/>
+              </a:lnSpc>
+            </a:pPr>
+            <a:r>
+              <a:rPr sz="1150" b="0">
+                <a:solidFill>
+                  <a:srgbClr val="38322A"/>
+                </a:solidFill>
+                <a:latin typeface="맑은 고딕"/>
+              </a:rPr>
+              <a:t>결과: 색인 파일 23.8MB (저장소에 포함)</a:t>
+            </a:r>
+          </a:p>
+        </p:txBody>
+      </p:sp>
+      <p:sp>
+        <p:nvSpPr>
+          <p:cNvPr id="16" name="Rounded Rectangle 15"/>
+          <p:cNvSpPr/>
+          <p:nvPr/>
+        </p:nvSpPr>
+        <p:spPr>
+          <a:xfrm>
+            <a:off x="6217920" y="2286000"/>
+            <a:ext cx="5257800" cy="2148840"/>
+          </a:xfrm>
+          <a:prstGeom prst="roundRect">
+            <a:avLst>
+              <a:gd name="adj" fmla="val 6000"/>
+            </a:avLst>
+          </a:prstGeom>
+          <a:solidFill>
+            <a:srgbClr val="FAF8F4"/>
+          </a:solidFill>
+          <a:ln w="12700">
+            <a:solidFill>
+              <a:srgbClr val="E4DED4"/>
+            </a:solidFill>
+          </a:ln>
+          <a:effectLst/>
+        </p:spPr>
+        <p:style>
+          <a:lnRef idx="1">
+            <a:schemeClr val="accent1"/>
+          </a:lnRef>
+          <a:fillRef idx="3">
+            <a:schemeClr val="accent1"/>
+          </a:fillRef>
+          <a:effectRef idx="2">
+            <a:schemeClr val="accent1"/>
+          </a:effectRef>
+          <a:fontRef idx="minor">
+            <a:schemeClr val="lt1"/>
+          </a:fontRef>
+        </p:style>
+        <p:txBody>
+          <a:bodyPr rtlCol="0" anchor="ctr"/>
+          <a:lstStyle/>
+          <a:p>
+            <a:pPr algn="ctr"/>
+          </a:p>
+        </p:txBody>
+      </p:sp>
+      <p:sp>
+        <p:nvSpPr>
+          <p:cNvPr id="17" name="TextBox 16"/>
+          <p:cNvSpPr txBox="1"/>
+          <p:nvPr/>
+        </p:nvSpPr>
+        <p:spPr>
+          <a:xfrm>
+            <a:off x="6492240" y="2468880"/>
+            <a:ext cx="4663440" cy="320040"/>
           </a:xfrm>
           <a:prstGeom prst="rect">
             <a:avLst/>
@@ -5261,60 +5342,401 @@
                 </a:solidFill>
                 <a:latin typeface="맑은 고딕"/>
               </a:rPr>
-              <a:t>재지 못한 것을 같은 자리에 적습니다</a:t>
-            </a:r>
-          </a:p>
-        </p:txBody>
-      </p:sp>
-      <p:sp>
-        <p:nvSpPr>
-          <p:cNvPr id="8" name="TextBox 7"/>
-          <p:cNvSpPr txBox="1"/>
-          <p:nvPr/>
-        </p:nvSpPr>
-        <p:spPr>
-          <a:xfrm>
-            <a:off x="4480560" y="2715768"/>
-            <a:ext cx="6949440" cy="640080"/>
-          </a:xfrm>
-          <a:prstGeom prst="rect">
-            <a:avLst/>
-          </a:prstGeom>
-          <a:noFill/>
-        </p:spPr>
-        <p:txBody>
-          <a:bodyPr wrap="square" anchor="t" lIns="0" rIns="0" tIns="0" bIns="0">
-            <a:spAutoFit/>
-          </a:bodyPr>
-          <a:lstStyle/>
-          <a:p>
-            <a:pPr algn="l">
-              <a:lnSpc>
-                <a:spcPct val="130000"/>
+              <a:t>런타임 (배포 · CPU만)</a:t>
+            </a:r>
+          </a:p>
+        </p:txBody>
+      </p:sp>
+      <p:sp>
+        <p:nvSpPr>
+          <p:cNvPr id="18" name="Oval 17"/>
+          <p:cNvSpPr/>
+          <p:nvPr/>
+        </p:nvSpPr>
+        <p:spPr>
+          <a:xfrm>
+            <a:off x="6492240" y="2944368"/>
+            <a:ext cx="76200" cy="76200"/>
+          </a:xfrm>
+          <a:prstGeom prst="ellipse">
+            <a:avLst/>
+          </a:prstGeom>
+          <a:solidFill>
+            <a:srgbClr val="FFBC00"/>
+          </a:solidFill>
+          <a:ln>
+            <a:noFill/>
+          </a:ln>
+          <a:effectLst/>
+        </p:spPr>
+        <p:style>
+          <a:lnRef idx="1">
+            <a:schemeClr val="accent1"/>
+          </a:lnRef>
+          <a:fillRef idx="3">
+            <a:schemeClr val="accent1"/>
+          </a:fillRef>
+          <a:effectRef idx="2">
+            <a:schemeClr val="accent1"/>
+          </a:effectRef>
+          <a:fontRef idx="minor">
+            <a:schemeClr val="lt1"/>
+          </a:fontRef>
+        </p:style>
+        <p:txBody>
+          <a:bodyPr rtlCol="0" anchor="ctr"/>
+          <a:lstStyle/>
+          <a:p>
+            <a:pPr algn="ctr"/>
+          </a:p>
+        </p:txBody>
+      </p:sp>
+      <p:sp>
+        <p:nvSpPr>
+          <p:cNvPr id="19" name="TextBox 18"/>
+          <p:cNvSpPr txBox="1"/>
+          <p:nvPr/>
+        </p:nvSpPr>
+        <p:spPr>
+          <a:xfrm>
+            <a:off x="6693408" y="2880360"/>
+            <a:ext cx="4553712" cy="365760"/>
+          </a:xfrm>
+          <a:prstGeom prst="rect">
+            <a:avLst/>
+          </a:prstGeom>
+          <a:noFill/>
+        </p:spPr>
+        <p:txBody>
+          <a:bodyPr wrap="square" anchor="t" lIns="0" rIns="0" tIns="0" bIns="0">
+            <a:spAutoFit/>
+          </a:bodyPr>
+          <a:lstStyle/>
+          <a:p>
+            <a:pPr algn="l">
+              <a:lnSpc>
+                <a:spcPct val="125000"/>
               </a:lnSpc>
             </a:pPr>
             <a:r>
               <a:rPr sz="1150" b="0">
                 <a:solidFill>
-                  <a:srgbClr val="6B6259"/>
-                </a:solidFill>
-                <a:latin typeface="맑은 고딕"/>
-              </a:rPr>
-              <a:t>유동인구·매출·폐업률을 점수에 안 넣었다는 사실이 상권 카드 안에 있습니다. 다른 화면에서 찾아봐야 알면 감춘 것입니다.</a:t>
-            </a:r>
-          </a:p>
-        </p:txBody>
-      </p:sp>
-      <p:sp>
-        <p:nvSpPr>
-          <p:cNvPr id="9" name="TextBox 8"/>
-          <p:cNvSpPr txBox="1"/>
-          <p:nvPr/>
-        </p:nvSpPr>
-        <p:spPr>
-          <a:xfrm>
-            <a:off x="685800" y="3566160"/>
-            <a:ext cx="3657600" cy="320040"/>
+                  <a:srgbClr val="38322A"/>
+                </a:solidFill>
+                <a:latin typeface="맑은 고딕"/>
+              </a:rPr>
+              <a:t>질의 임베딩: int8 ONNX · 5ms · 키 불필요</a:t>
+            </a:r>
+          </a:p>
+        </p:txBody>
+      </p:sp>
+      <p:sp>
+        <p:nvSpPr>
+          <p:cNvPr id="20" name="Oval 19"/>
+          <p:cNvSpPr/>
+          <p:nvPr/>
+        </p:nvSpPr>
+        <p:spPr>
+          <a:xfrm>
+            <a:off x="6492240" y="3273552"/>
+            <a:ext cx="76200" cy="76200"/>
+          </a:xfrm>
+          <a:prstGeom prst="ellipse">
+            <a:avLst/>
+          </a:prstGeom>
+          <a:solidFill>
+            <a:srgbClr val="FFBC00"/>
+          </a:solidFill>
+          <a:ln>
+            <a:noFill/>
+          </a:ln>
+          <a:effectLst/>
+        </p:spPr>
+        <p:style>
+          <a:lnRef idx="1">
+            <a:schemeClr val="accent1"/>
+          </a:lnRef>
+          <a:fillRef idx="3">
+            <a:schemeClr val="accent1"/>
+          </a:fillRef>
+          <a:effectRef idx="2">
+            <a:schemeClr val="accent1"/>
+          </a:effectRef>
+          <a:fontRef idx="minor">
+            <a:schemeClr val="lt1"/>
+          </a:fontRef>
+        </p:style>
+        <p:txBody>
+          <a:bodyPr rtlCol="0" anchor="ctr"/>
+          <a:lstStyle/>
+          <a:p>
+            <a:pPr algn="ctr"/>
+          </a:p>
+        </p:txBody>
+      </p:sp>
+      <p:sp>
+        <p:nvSpPr>
+          <p:cNvPr id="21" name="TextBox 20"/>
+          <p:cNvSpPr txBox="1"/>
+          <p:nvPr/>
+        </p:nvSpPr>
+        <p:spPr>
+          <a:xfrm>
+            <a:off x="6693408" y="3209544"/>
+            <a:ext cx="4553712" cy="365760"/>
+          </a:xfrm>
+          <a:prstGeom prst="rect">
+            <a:avLst/>
+          </a:prstGeom>
+          <a:noFill/>
+        </p:spPr>
+        <p:txBody>
+          <a:bodyPr wrap="square" anchor="t" lIns="0" rIns="0" tIns="0" bIns="0">
+            <a:spAutoFit/>
+          </a:bodyPr>
+          <a:lstStyle/>
+          <a:p>
+            <a:pPr algn="l">
+              <a:lnSpc>
+                <a:spcPct val="125000"/>
+              </a:lnSpc>
+            </a:pPr>
+            <a:r>
+              <a:rPr sz="1150" b="0">
+                <a:solidFill>
+                  <a:srgbClr val="38322A"/>
+                </a:solidFill>
+                <a:latin typeface="맑은 고딕"/>
+              </a:rPr>
+              <a:t>검색: BM25 + 코사인 · 12~55ms</a:t>
+            </a:r>
+          </a:p>
+        </p:txBody>
+      </p:sp>
+      <p:sp>
+        <p:nvSpPr>
+          <p:cNvPr id="22" name="Oval 21"/>
+          <p:cNvSpPr/>
+          <p:nvPr/>
+        </p:nvSpPr>
+        <p:spPr>
+          <a:xfrm>
+            <a:off x="6492240" y="3602736"/>
+            <a:ext cx="76200" cy="76200"/>
+          </a:xfrm>
+          <a:prstGeom prst="ellipse">
+            <a:avLst/>
+          </a:prstGeom>
+          <a:solidFill>
+            <a:srgbClr val="FFBC00"/>
+          </a:solidFill>
+          <a:ln>
+            <a:noFill/>
+          </a:ln>
+          <a:effectLst/>
+        </p:spPr>
+        <p:style>
+          <a:lnRef idx="1">
+            <a:schemeClr val="accent1"/>
+          </a:lnRef>
+          <a:fillRef idx="3">
+            <a:schemeClr val="accent1"/>
+          </a:fillRef>
+          <a:effectRef idx="2">
+            <a:schemeClr val="accent1"/>
+          </a:effectRef>
+          <a:fontRef idx="minor">
+            <a:schemeClr val="lt1"/>
+          </a:fontRef>
+        </p:style>
+        <p:txBody>
+          <a:bodyPr rtlCol="0" anchor="ctr"/>
+          <a:lstStyle/>
+          <a:p>
+            <a:pPr algn="ctr"/>
+          </a:p>
+        </p:txBody>
+      </p:sp>
+      <p:sp>
+        <p:nvSpPr>
+          <p:cNvPr id="23" name="TextBox 22"/>
+          <p:cNvSpPr txBox="1"/>
+          <p:nvPr/>
+        </p:nvSpPr>
+        <p:spPr>
+          <a:xfrm>
+            <a:off x="6693408" y="3538728"/>
+            <a:ext cx="4553712" cy="365760"/>
+          </a:xfrm>
+          <a:prstGeom prst="rect">
+            <a:avLst/>
+          </a:prstGeom>
+          <a:noFill/>
+        </p:spPr>
+        <p:txBody>
+          <a:bodyPr wrap="square" anchor="t" lIns="0" rIns="0" tIns="0" bIns="0">
+            <a:spAutoFit/>
+          </a:bodyPr>
+          <a:lstStyle/>
+          <a:p>
+            <a:pPr algn="l">
+              <a:lnSpc>
+                <a:spcPct val="125000"/>
+              </a:lnSpc>
+            </a:pPr>
+            <a:r>
+              <a:rPr sz="1150" b="0">
+                <a:solidFill>
+                  <a:srgbClr val="38322A"/>
+                </a:solidFill>
+                <a:latin typeface="맑은 고딕"/>
+              </a:rPr>
+              <a:t>LLM: Gemini (선택) · 없으면 규칙+템플릿</a:t>
+            </a:r>
+          </a:p>
+        </p:txBody>
+      </p:sp>
+      <p:sp>
+        <p:nvSpPr>
+          <p:cNvPr id="24" name="Oval 23"/>
+          <p:cNvSpPr/>
+          <p:nvPr/>
+        </p:nvSpPr>
+        <p:spPr>
+          <a:xfrm>
+            <a:off x="6492240" y="3931920"/>
+            <a:ext cx="76200" cy="76200"/>
+          </a:xfrm>
+          <a:prstGeom prst="ellipse">
+            <a:avLst/>
+          </a:prstGeom>
+          <a:solidFill>
+            <a:srgbClr val="FFBC00"/>
+          </a:solidFill>
+          <a:ln>
+            <a:noFill/>
+          </a:ln>
+          <a:effectLst/>
+        </p:spPr>
+        <p:style>
+          <a:lnRef idx="1">
+            <a:schemeClr val="accent1"/>
+          </a:lnRef>
+          <a:fillRef idx="3">
+            <a:schemeClr val="accent1"/>
+          </a:fillRef>
+          <a:effectRef idx="2">
+            <a:schemeClr val="accent1"/>
+          </a:effectRef>
+          <a:fontRef idx="minor">
+            <a:schemeClr val="lt1"/>
+          </a:fontRef>
+        </p:style>
+        <p:txBody>
+          <a:bodyPr rtlCol="0" anchor="ctr"/>
+          <a:lstStyle/>
+          <a:p>
+            <a:pPr algn="ctr"/>
+          </a:p>
+        </p:txBody>
+      </p:sp>
+      <p:sp>
+        <p:nvSpPr>
+          <p:cNvPr id="25" name="TextBox 24"/>
+          <p:cNvSpPr txBox="1"/>
+          <p:nvPr/>
+        </p:nvSpPr>
+        <p:spPr>
+          <a:xfrm>
+            <a:off x="6693408" y="3867912"/>
+            <a:ext cx="4553712" cy="365760"/>
+          </a:xfrm>
+          <a:prstGeom prst="rect">
+            <a:avLst/>
+          </a:prstGeom>
+          <a:noFill/>
+        </p:spPr>
+        <p:txBody>
+          <a:bodyPr wrap="square" anchor="t" lIns="0" rIns="0" tIns="0" bIns="0">
+            <a:spAutoFit/>
+          </a:bodyPr>
+          <a:lstStyle/>
+          <a:p>
+            <a:pPr algn="l">
+              <a:lnSpc>
+                <a:spcPct val="125000"/>
+              </a:lnSpc>
+            </a:pPr>
+            <a:r>
+              <a:rPr sz="1150" b="0">
+                <a:solidFill>
+                  <a:srgbClr val="38322A"/>
+                </a:solidFill>
+                <a:latin typeface="맑은 고딕"/>
+              </a:rPr>
+              <a:t>메모리: 354MB (무료 등급 512MB 안)</a:t>
+            </a:r>
+          </a:p>
+        </p:txBody>
+      </p:sp>
+      <p:sp>
+        <p:nvSpPr>
+          <p:cNvPr id="26" name="Rounded Rectangle 25"/>
+          <p:cNvSpPr/>
+          <p:nvPr/>
+        </p:nvSpPr>
+        <p:spPr>
+          <a:xfrm>
+            <a:off x="685800" y="4663440"/>
+            <a:ext cx="10789920" cy="1600200"/>
+          </a:xfrm>
+          <a:prstGeom prst="roundRect">
+            <a:avLst>
+              <a:gd name="adj" fmla="val 6000"/>
+            </a:avLst>
+          </a:prstGeom>
+          <a:solidFill>
+            <a:srgbClr val="FFF9E8"/>
+          </a:solidFill>
+          <a:ln w="12700">
+            <a:solidFill>
+              <a:srgbClr val="FFBC00"/>
+            </a:solidFill>
+          </a:ln>
+          <a:effectLst/>
+        </p:spPr>
+        <p:style>
+          <a:lnRef idx="1">
+            <a:schemeClr val="accent1"/>
+          </a:lnRef>
+          <a:fillRef idx="3">
+            <a:schemeClr val="accent1"/>
+          </a:fillRef>
+          <a:effectRef idx="2">
+            <a:schemeClr val="accent1"/>
+          </a:effectRef>
+          <a:fontRef idx="minor">
+            <a:schemeClr val="lt1"/>
+          </a:fontRef>
+        </p:style>
+        <p:txBody>
+          <a:bodyPr rtlCol="0" anchor="ctr"/>
+          <a:lstStyle/>
+          <a:p>
+            <a:pPr algn="ctr"/>
+          </a:p>
+        </p:txBody>
+      </p:sp>
+      <p:sp>
+        <p:nvSpPr>
+          <p:cNvPr id="27" name="TextBox 26"/>
+          <p:cNvSpPr txBox="1"/>
+          <p:nvPr/>
+        </p:nvSpPr>
+        <p:spPr>
+          <a:xfrm>
+            <a:off x="960120" y="4846320"/>
+            <a:ext cx="10241280" cy="320040"/>
           </a:xfrm>
           <a:prstGeom prst="rect">
             <a:avLst/>
@@ -5339,202 +5761,62 @@
                 </a:solidFill>
                 <a:latin typeface="맑은 고딕"/>
               </a:rPr>
-              <a:t>숫자마다 원문 링크가 붙습니다</a:t>
-            </a:r>
-          </a:p>
-        </p:txBody>
-      </p:sp>
-      <p:sp>
-        <p:nvSpPr>
-          <p:cNvPr id="10" name="TextBox 9"/>
-          <p:cNvSpPr txBox="1"/>
-          <p:nvPr/>
-        </p:nvSpPr>
-        <p:spPr>
-          <a:xfrm>
-            <a:off x="4480560" y="3584448"/>
-            <a:ext cx="6949440" cy="640080"/>
-          </a:xfrm>
-          <a:prstGeom prst="rect">
-            <a:avLst/>
-          </a:prstGeom>
-          <a:noFill/>
-        </p:spPr>
-        <p:txBody>
-          <a:bodyPr wrap="square" anchor="t" lIns="0" rIns="0" tIns="0" bIns="0">
-            <a:spAutoFit/>
-          </a:bodyPr>
-          <a:lstStyle/>
-          <a:p>
-            <a:pPr algn="l">
-              <a:lnSpc>
-                <a:spcPct val="130000"/>
+              <a:t>512MB에 넣기 위해 실제로 잰 것</a:t>
+            </a:r>
+          </a:p>
+        </p:txBody>
+      </p:sp>
+      <p:sp>
+        <p:nvSpPr>
+          <p:cNvPr id="28" name="TextBox 27"/>
+          <p:cNvSpPr txBox="1"/>
+          <p:nvPr/>
+        </p:nvSpPr>
+        <p:spPr>
+          <a:xfrm>
+            <a:off x="960120" y="5230368"/>
+            <a:ext cx="10241280" cy="914400"/>
+          </a:xfrm>
+          <a:prstGeom prst="rect">
+            <a:avLst/>
+          </a:prstGeom>
+          <a:noFill/>
+        </p:spPr>
+        <p:txBody>
+          <a:bodyPr wrap="square" anchor="t" lIns="0" rIns="0" tIns="0" bIns="0">
+            <a:spAutoFit/>
+          </a:bodyPr>
+          <a:lstStyle/>
+          <a:p>
+            <a:pPr algn="l">
+              <a:lnSpc>
+                <a:spcPct val="135000"/>
               </a:lnSpc>
             </a:pPr>
             <a:r>
               <a:rPr sz="1150" b="0">
                 <a:solidFill>
-                  <a:srgbClr val="6B6259"/>
-                </a:solidFill>
-                <a:latin typeface="맑은 고딕"/>
-              </a:rPr>
-              <a:t>추천한 공고마다 기업마당 원문 주소가 함께 나갑니다. 우리가 요약한 것을 직접 대조하실 수 있어야 합니다.</a:t>
-            </a:r>
-          </a:p>
-        </p:txBody>
-      </p:sp>
-      <p:sp>
-        <p:nvSpPr>
-          <p:cNvPr id="11" name="TextBox 10"/>
-          <p:cNvSpPr txBox="1"/>
-          <p:nvPr/>
-        </p:nvSpPr>
-        <p:spPr>
-          <a:xfrm>
-            <a:off x="685800" y="4434840"/>
-            <a:ext cx="3657600" cy="320040"/>
-          </a:xfrm>
-          <a:prstGeom prst="rect">
-            <a:avLst/>
-          </a:prstGeom>
-          <a:noFill/>
-        </p:spPr>
-        <p:txBody>
-          <a:bodyPr wrap="square" anchor="t" lIns="0" rIns="0" tIns="0" bIns="0">
-            <a:spAutoFit/>
-          </a:bodyPr>
-          <a:lstStyle/>
-          <a:p>
-            <a:pPr algn="l">
-              <a:lnSpc>
-                <a:spcPct val="125000"/>
-              </a:lnSpc>
-            </a:pPr>
-            <a:r>
-              <a:rPr sz="1400" b="1">
-                <a:solidFill>
-                  <a:srgbClr val="38322A"/>
-                </a:solidFill>
-                <a:latin typeface="맑은 고딕"/>
-              </a:rPr>
-              <a:t>금액은 근거가 있을 때만 씁니다</a:t>
-            </a:r>
-          </a:p>
-        </p:txBody>
-      </p:sp>
-      <p:sp>
-        <p:nvSpPr>
-          <p:cNvPr id="12" name="TextBox 11"/>
-          <p:cNvSpPr txBox="1"/>
-          <p:nvPr/>
-        </p:nvSpPr>
-        <p:spPr>
-          <a:xfrm>
-            <a:off x="4480560" y="4453128"/>
-            <a:ext cx="6949440" cy="640080"/>
-          </a:xfrm>
-          <a:prstGeom prst="rect">
-            <a:avLst/>
-          </a:prstGeom>
-          <a:noFill/>
-        </p:spPr>
-        <p:txBody>
-          <a:bodyPr wrap="square" anchor="t" lIns="0" rIns="0" tIns="0" bIns="0">
-            <a:spAutoFit/>
-          </a:bodyPr>
-          <a:lstStyle/>
-          <a:p>
-            <a:pPr algn="l">
-              <a:lnSpc>
-                <a:spcPct val="130000"/>
+                  <a:srgbClr val="544438"/>
+                </a:solidFill>
+                <a:latin typeface="맑은 고딕"/>
+              </a:rPr>
+              <a:t>배포 전에 메모리를 재 보니 611MB였습니다. 안 재고 올렸으면 그 자리에서 죽었습니다. 범인은 뜻밖에도 토크나이저였습니다 — 17MB짜리 tokenizer.json을 올리는 데 280MB를 씁니다.</a:t>
+            </a:r>
+          </a:p>
+          <a:p>
+            <a:pPr algn="l">
+              <a:lnSpc>
+                <a:spcPct val="135000"/>
               </a:lnSpc>
             </a:pPr>
             <a:r>
               <a:rPr sz="1150" b="0">
                 <a:solidFill>
-                  <a:srgbClr val="6B6259"/>
-                </a:solidFill>
-                <a:latin typeface="맑은 고딕"/>
-              </a:rPr>
-              <a:t>본문에서 찾은 가장 큰 금액을 한도로 적어 '총사업비 4,000억원'이 한도로 둔갑했습니다. '한도·최대·이내'가 곁에 있을 때만 읽고, 무엇으로 읽었는지 남깁니다.</a:t>
-            </a:r>
-          </a:p>
-        </p:txBody>
-      </p:sp>
-      <p:sp>
-        <p:nvSpPr>
-          <p:cNvPr id="13" name="TextBox 12"/>
-          <p:cNvSpPr txBox="1"/>
-          <p:nvPr/>
-        </p:nvSpPr>
-        <p:spPr>
-          <a:xfrm>
-            <a:off x="685800" y="5303520"/>
-            <a:ext cx="3657600" cy="320040"/>
-          </a:xfrm>
-          <a:prstGeom prst="rect">
-            <a:avLst/>
-          </a:prstGeom>
-          <a:noFill/>
-        </p:spPr>
-        <p:txBody>
-          <a:bodyPr wrap="square" anchor="t" lIns="0" rIns="0" tIns="0" bIns="0">
-            <a:spAutoFit/>
-          </a:bodyPr>
-          <a:lstStyle/>
-          <a:p>
-            <a:pPr algn="l">
-              <a:lnSpc>
-                <a:spcPct val="125000"/>
-              </a:lnSpc>
-            </a:pPr>
-            <a:r>
-              <a:rPr sz="1400" b="1">
-                <a:solidFill>
-                  <a:srgbClr val="38322A"/>
-                </a:solidFill>
-                <a:latin typeface="맑은 고딕"/>
-              </a:rPr>
-              <a:t>LLM이 사실을 만들 수 없는 구조입니다</a:t>
-            </a:r>
-          </a:p>
-        </p:txBody>
-      </p:sp>
-      <p:sp>
-        <p:nvSpPr>
-          <p:cNvPr id="14" name="TextBox 13"/>
-          <p:cNvSpPr txBox="1"/>
-          <p:nvPr/>
-        </p:nvSpPr>
-        <p:spPr>
-          <a:xfrm>
-            <a:off x="4480560" y="5321808"/>
-            <a:ext cx="6949440" cy="640080"/>
-          </a:xfrm>
-          <a:prstGeom prst="rect">
-            <a:avLst/>
-          </a:prstGeom>
-          <a:noFill/>
-        </p:spPr>
-        <p:txBody>
-          <a:bodyPr wrap="square" anchor="t" lIns="0" rIns="0" tIns="0" bIns="0">
-            <a:spAutoFit/>
-          </a:bodyPr>
-          <a:lstStyle/>
-          <a:p>
-            <a:pPr algn="l">
-              <a:lnSpc>
-                <a:spcPct val="130000"/>
-              </a:lnSpc>
-            </a:pPr>
-            <a:r>
-              <a:rPr sz="1150" b="0">
-                <a:solidFill>
-                  <a:srgbClr val="6B6259"/>
-                </a:solidFill>
-                <a:latin typeface="맑은 고딕"/>
-              </a:rPr>
-              <a:t>LLM은 갈래를 고르고 문장을 엮을 뿐, 공고와 숫자는 색인에서 나옵니다. 그 문장도 가드레일을 반드시 거칩니다.</a:t>
+                  <a:srgbClr val="544438"/>
+                </a:solidFill>
+                <a:latin typeface="맑은 고딕"/>
+              </a:rPr>
+              <a:t>sentencepiece 원본(5MB)으로 바꾸면 70MB입니다. 다만 토큰 번호가 어긋나면 검색이 조용히 망가지므로, 두 방식의 출력을 대조해 **비트 단위로 같음**을 확인하고 바꿨습니다. ONNX 메모리 아레나도 껐습니다(200MB→9MB). 결과 611MB → 354MB.</a:t>
             </a:r>
           </a:p>
         </p:txBody>
@@ -5548,6 +5830,536 @@
 </file>
 
 <file path=ppt/slides/slide13.xml><?xml version="1.0" encoding="utf-8"?>
+<p:sld xmlns:a="http://schemas.openxmlformats.org/drawingml/2006/main" xmlns:p="http://schemas.openxmlformats.org/presentationml/2006/main" xmlns:r="http://schemas.openxmlformats.org/officeDocument/2006/relationships">
+  <p:cSld>
+    <p:spTree>
+      <p:nvGrpSpPr>
+        <p:cNvPr id="1" name=""/>
+        <p:cNvGrpSpPr/>
+        <p:nvPr/>
+      </p:nvGrpSpPr>
+      <p:grpSpPr/>
+      <p:sp>
+        <p:nvSpPr>
+          <p:cNvPr id="2" name="TextBox 1"/>
+          <p:cNvSpPr txBox="1"/>
+          <p:nvPr/>
+        </p:nvSpPr>
+        <p:spPr>
+          <a:xfrm>
+            <a:off x="685800" y="457200"/>
+            <a:ext cx="10058400" cy="274320"/>
+          </a:xfrm>
+          <a:prstGeom prst="rect">
+            <a:avLst/>
+          </a:prstGeom>
+          <a:noFill/>
+        </p:spPr>
+        <p:txBody>
+          <a:bodyPr wrap="square" anchor="t" lIns="0" rIns="0" tIns="0" bIns="0">
+            <a:spAutoFit/>
+          </a:bodyPr>
+          <a:lstStyle/>
+          <a:p>
+            <a:pPr algn="l">
+              <a:lnSpc>
+                <a:spcPct val="125000"/>
+              </a:lnSpc>
+            </a:pPr>
+            <a:r>
+              <a:rPr sz="1200" b="1">
+                <a:solidFill>
+                  <a:srgbClr val="FFBC00"/>
+                </a:solidFill>
+                <a:latin typeface="맑은 고딕"/>
+              </a:rPr>
+              <a:t>WHY US</a:t>
+            </a:r>
+          </a:p>
+        </p:txBody>
+      </p:sp>
+      <p:sp>
+        <p:nvSpPr>
+          <p:cNvPr id="3" name="TextBox 2"/>
+          <p:cNvSpPr txBox="1"/>
+          <p:nvPr/>
+        </p:nvSpPr>
+        <p:spPr>
+          <a:xfrm>
+            <a:off x="685800" y="749808"/>
+            <a:ext cx="10789920" cy="548640"/>
+          </a:xfrm>
+          <a:prstGeom prst="rect">
+            <a:avLst/>
+          </a:prstGeom>
+          <a:noFill/>
+        </p:spPr>
+        <p:txBody>
+          <a:bodyPr wrap="square" anchor="t" lIns="0" rIns="0" tIns="0" bIns="0">
+            <a:spAutoFit/>
+          </a:bodyPr>
+          <a:lstStyle/>
+          <a:p>
+            <a:pPr algn="l">
+              <a:lnSpc>
+                <a:spcPct val="125000"/>
+              </a:lnSpc>
+            </a:pPr>
+            <a:r>
+              <a:rPr sz="2700" b="1">
+                <a:solidFill>
+                  <a:srgbClr val="38322A"/>
+                </a:solidFill>
+                <a:latin typeface="맑은 고딕"/>
+              </a:rPr>
+              <a:t>정직을 설계에 넣었습니다</a:t>
+            </a:r>
+          </a:p>
+        </p:txBody>
+      </p:sp>
+      <p:sp>
+        <p:nvSpPr>
+          <p:cNvPr id="4" name="Rectangle 3"/>
+          <p:cNvSpPr/>
+          <p:nvPr/>
+        </p:nvSpPr>
+        <p:spPr>
+          <a:xfrm>
+            <a:off x="685800" y="1417320"/>
+            <a:ext cx="10789920" cy="19050"/>
+          </a:xfrm>
+          <a:prstGeom prst="rect">
+            <a:avLst/>
+          </a:prstGeom>
+          <a:solidFill>
+            <a:srgbClr val="E4DED4"/>
+          </a:solidFill>
+          <a:ln>
+            <a:noFill/>
+          </a:ln>
+          <a:effectLst/>
+        </p:spPr>
+        <p:style>
+          <a:lnRef idx="1">
+            <a:schemeClr val="accent1"/>
+          </a:lnRef>
+          <a:fillRef idx="3">
+            <a:schemeClr val="accent1"/>
+          </a:fillRef>
+          <a:effectRef idx="2">
+            <a:schemeClr val="accent1"/>
+          </a:effectRef>
+          <a:fontRef idx="minor">
+            <a:schemeClr val="lt1"/>
+          </a:fontRef>
+        </p:style>
+        <p:txBody>
+          <a:bodyPr rtlCol="0" anchor="ctr"/>
+          <a:lstStyle/>
+          <a:p>
+            <a:pPr algn="ctr"/>
+          </a:p>
+        </p:txBody>
+      </p:sp>
+      <p:sp>
+        <p:nvSpPr>
+          <p:cNvPr id="5" name="TextBox 4"/>
+          <p:cNvSpPr txBox="1"/>
+          <p:nvPr/>
+        </p:nvSpPr>
+        <p:spPr>
+          <a:xfrm>
+            <a:off x="685800" y="1828800"/>
+            <a:ext cx="3657600" cy="320040"/>
+          </a:xfrm>
+          <a:prstGeom prst="rect">
+            <a:avLst/>
+          </a:prstGeom>
+          <a:noFill/>
+        </p:spPr>
+        <p:txBody>
+          <a:bodyPr wrap="square" anchor="t" lIns="0" rIns="0" tIns="0" bIns="0">
+            <a:spAutoFit/>
+          </a:bodyPr>
+          <a:lstStyle/>
+          <a:p>
+            <a:pPr algn="l">
+              <a:lnSpc>
+                <a:spcPct val="125000"/>
+              </a:lnSpc>
+            </a:pPr>
+            <a:r>
+              <a:rPr sz="1400" b="1">
+                <a:solidFill>
+                  <a:srgbClr val="38322A"/>
+                </a:solidFill>
+                <a:latin typeface="맑은 고딕"/>
+              </a:rPr>
+              <a:t>모르면 모른다고 합니다</a:t>
+            </a:r>
+          </a:p>
+        </p:txBody>
+      </p:sp>
+      <p:sp>
+        <p:nvSpPr>
+          <p:cNvPr id="6" name="TextBox 5"/>
+          <p:cNvSpPr txBox="1"/>
+          <p:nvPr/>
+        </p:nvSpPr>
+        <p:spPr>
+          <a:xfrm>
+            <a:off x="4480560" y="1847088"/>
+            <a:ext cx="6949440" cy="640080"/>
+          </a:xfrm>
+          <a:prstGeom prst="rect">
+            <a:avLst/>
+          </a:prstGeom>
+          <a:noFill/>
+        </p:spPr>
+        <p:txBody>
+          <a:bodyPr wrap="square" anchor="t" lIns="0" rIns="0" tIns="0" bIns="0">
+            <a:spAutoFit/>
+          </a:bodyPr>
+          <a:lstStyle/>
+          <a:p>
+            <a:pPr algn="l">
+              <a:lnSpc>
+                <a:spcPct val="130000"/>
+              </a:lnSpc>
+            </a:pPr>
+            <a:r>
+              <a:rPr sz="1150" b="0">
+                <a:solidFill>
+                  <a:srgbClr val="6B6259"/>
+                </a:solidFill>
+                <a:latin typeface="맑은 고딕"/>
+              </a:rPr>
+              <a:t>맞는 공고가 없으면 빈손으로 답합니다. 900건 중 무엇이든 상위 다섯 개는 뽑히지만, 관련 없는 목록은 사장님의 시간을 뺏습니다.</a:t>
+            </a:r>
+          </a:p>
+        </p:txBody>
+      </p:sp>
+      <p:sp>
+        <p:nvSpPr>
+          <p:cNvPr id="7" name="TextBox 6"/>
+          <p:cNvSpPr txBox="1"/>
+          <p:nvPr/>
+        </p:nvSpPr>
+        <p:spPr>
+          <a:xfrm>
+            <a:off x="685800" y="2697480"/>
+            <a:ext cx="3657600" cy="320040"/>
+          </a:xfrm>
+          <a:prstGeom prst="rect">
+            <a:avLst/>
+          </a:prstGeom>
+          <a:noFill/>
+        </p:spPr>
+        <p:txBody>
+          <a:bodyPr wrap="square" anchor="t" lIns="0" rIns="0" tIns="0" bIns="0">
+            <a:spAutoFit/>
+          </a:bodyPr>
+          <a:lstStyle/>
+          <a:p>
+            <a:pPr algn="l">
+              <a:lnSpc>
+                <a:spcPct val="125000"/>
+              </a:lnSpc>
+            </a:pPr>
+            <a:r>
+              <a:rPr sz="1400" b="1">
+                <a:solidFill>
+                  <a:srgbClr val="38322A"/>
+                </a:solidFill>
+                <a:latin typeface="맑은 고딕"/>
+              </a:rPr>
+              <a:t>재지 못한 것을 같은 자리에 적습니다</a:t>
+            </a:r>
+          </a:p>
+        </p:txBody>
+      </p:sp>
+      <p:sp>
+        <p:nvSpPr>
+          <p:cNvPr id="8" name="TextBox 7"/>
+          <p:cNvSpPr txBox="1"/>
+          <p:nvPr/>
+        </p:nvSpPr>
+        <p:spPr>
+          <a:xfrm>
+            <a:off x="4480560" y="2715768"/>
+            <a:ext cx="6949440" cy="640080"/>
+          </a:xfrm>
+          <a:prstGeom prst="rect">
+            <a:avLst/>
+          </a:prstGeom>
+          <a:noFill/>
+        </p:spPr>
+        <p:txBody>
+          <a:bodyPr wrap="square" anchor="t" lIns="0" rIns="0" tIns="0" bIns="0">
+            <a:spAutoFit/>
+          </a:bodyPr>
+          <a:lstStyle/>
+          <a:p>
+            <a:pPr algn="l">
+              <a:lnSpc>
+                <a:spcPct val="130000"/>
+              </a:lnSpc>
+            </a:pPr>
+            <a:r>
+              <a:rPr sz="1150" b="0">
+                <a:solidFill>
+                  <a:srgbClr val="6B6259"/>
+                </a:solidFill>
+                <a:latin typeface="맑은 고딕"/>
+              </a:rPr>
+              <a:t>유동인구·매출·폐업률을 점수에 안 넣었다는 사실이 상권 카드 안에 있습니다. 다른 화면에서 찾아봐야 알면 감춘 것입니다.</a:t>
+            </a:r>
+          </a:p>
+        </p:txBody>
+      </p:sp>
+      <p:sp>
+        <p:nvSpPr>
+          <p:cNvPr id="9" name="TextBox 8"/>
+          <p:cNvSpPr txBox="1"/>
+          <p:nvPr/>
+        </p:nvSpPr>
+        <p:spPr>
+          <a:xfrm>
+            <a:off x="685800" y="3566160"/>
+            <a:ext cx="3657600" cy="320040"/>
+          </a:xfrm>
+          <a:prstGeom prst="rect">
+            <a:avLst/>
+          </a:prstGeom>
+          <a:noFill/>
+        </p:spPr>
+        <p:txBody>
+          <a:bodyPr wrap="square" anchor="t" lIns="0" rIns="0" tIns="0" bIns="0">
+            <a:spAutoFit/>
+          </a:bodyPr>
+          <a:lstStyle/>
+          <a:p>
+            <a:pPr algn="l">
+              <a:lnSpc>
+                <a:spcPct val="125000"/>
+              </a:lnSpc>
+            </a:pPr>
+            <a:r>
+              <a:rPr sz="1400" b="1">
+                <a:solidFill>
+                  <a:srgbClr val="38322A"/>
+                </a:solidFill>
+                <a:latin typeface="맑은 고딕"/>
+              </a:rPr>
+              <a:t>숫자마다 원문 링크가 붙습니다</a:t>
+            </a:r>
+          </a:p>
+        </p:txBody>
+      </p:sp>
+      <p:sp>
+        <p:nvSpPr>
+          <p:cNvPr id="10" name="TextBox 9"/>
+          <p:cNvSpPr txBox="1"/>
+          <p:nvPr/>
+        </p:nvSpPr>
+        <p:spPr>
+          <a:xfrm>
+            <a:off x="4480560" y="3584448"/>
+            <a:ext cx="6949440" cy="640080"/>
+          </a:xfrm>
+          <a:prstGeom prst="rect">
+            <a:avLst/>
+          </a:prstGeom>
+          <a:noFill/>
+        </p:spPr>
+        <p:txBody>
+          <a:bodyPr wrap="square" anchor="t" lIns="0" rIns="0" tIns="0" bIns="0">
+            <a:spAutoFit/>
+          </a:bodyPr>
+          <a:lstStyle/>
+          <a:p>
+            <a:pPr algn="l">
+              <a:lnSpc>
+                <a:spcPct val="130000"/>
+              </a:lnSpc>
+            </a:pPr>
+            <a:r>
+              <a:rPr sz="1150" b="0">
+                <a:solidFill>
+                  <a:srgbClr val="6B6259"/>
+                </a:solidFill>
+                <a:latin typeface="맑은 고딕"/>
+              </a:rPr>
+              <a:t>추천한 공고마다 기업마당 원문 주소가 함께 나갑니다. 우리가 요약한 것을 직접 대조하실 수 있어야 합니다.</a:t>
+            </a:r>
+          </a:p>
+        </p:txBody>
+      </p:sp>
+      <p:sp>
+        <p:nvSpPr>
+          <p:cNvPr id="11" name="TextBox 10"/>
+          <p:cNvSpPr txBox="1"/>
+          <p:nvPr/>
+        </p:nvSpPr>
+        <p:spPr>
+          <a:xfrm>
+            <a:off x="685800" y="4434840"/>
+            <a:ext cx="3657600" cy="320040"/>
+          </a:xfrm>
+          <a:prstGeom prst="rect">
+            <a:avLst/>
+          </a:prstGeom>
+          <a:noFill/>
+        </p:spPr>
+        <p:txBody>
+          <a:bodyPr wrap="square" anchor="t" lIns="0" rIns="0" tIns="0" bIns="0">
+            <a:spAutoFit/>
+          </a:bodyPr>
+          <a:lstStyle/>
+          <a:p>
+            <a:pPr algn="l">
+              <a:lnSpc>
+                <a:spcPct val="125000"/>
+              </a:lnSpc>
+            </a:pPr>
+            <a:r>
+              <a:rPr sz="1400" b="1">
+                <a:solidFill>
+                  <a:srgbClr val="38322A"/>
+                </a:solidFill>
+                <a:latin typeface="맑은 고딕"/>
+              </a:rPr>
+              <a:t>금액은 근거가 있을 때만 씁니다</a:t>
+            </a:r>
+          </a:p>
+        </p:txBody>
+      </p:sp>
+      <p:sp>
+        <p:nvSpPr>
+          <p:cNvPr id="12" name="TextBox 11"/>
+          <p:cNvSpPr txBox="1"/>
+          <p:nvPr/>
+        </p:nvSpPr>
+        <p:spPr>
+          <a:xfrm>
+            <a:off x="4480560" y="4453128"/>
+            <a:ext cx="6949440" cy="640080"/>
+          </a:xfrm>
+          <a:prstGeom prst="rect">
+            <a:avLst/>
+          </a:prstGeom>
+          <a:noFill/>
+        </p:spPr>
+        <p:txBody>
+          <a:bodyPr wrap="square" anchor="t" lIns="0" rIns="0" tIns="0" bIns="0">
+            <a:spAutoFit/>
+          </a:bodyPr>
+          <a:lstStyle/>
+          <a:p>
+            <a:pPr algn="l">
+              <a:lnSpc>
+                <a:spcPct val="130000"/>
+              </a:lnSpc>
+            </a:pPr>
+            <a:r>
+              <a:rPr sz="1150" b="0">
+                <a:solidFill>
+                  <a:srgbClr val="6B6259"/>
+                </a:solidFill>
+                <a:latin typeface="맑은 고딕"/>
+              </a:rPr>
+              <a:t>본문에서 찾은 가장 큰 금액을 한도로 적어 '총사업비 4,000억원'이 한도로 둔갑했습니다. '한도·최대·이내'가 곁에 있을 때만 읽고, 무엇으로 읽었는지 남깁니다.</a:t>
+            </a:r>
+          </a:p>
+        </p:txBody>
+      </p:sp>
+      <p:sp>
+        <p:nvSpPr>
+          <p:cNvPr id="13" name="TextBox 12"/>
+          <p:cNvSpPr txBox="1"/>
+          <p:nvPr/>
+        </p:nvSpPr>
+        <p:spPr>
+          <a:xfrm>
+            <a:off x="685800" y="5303520"/>
+            <a:ext cx="3657600" cy="320040"/>
+          </a:xfrm>
+          <a:prstGeom prst="rect">
+            <a:avLst/>
+          </a:prstGeom>
+          <a:noFill/>
+        </p:spPr>
+        <p:txBody>
+          <a:bodyPr wrap="square" anchor="t" lIns="0" rIns="0" tIns="0" bIns="0">
+            <a:spAutoFit/>
+          </a:bodyPr>
+          <a:lstStyle/>
+          <a:p>
+            <a:pPr algn="l">
+              <a:lnSpc>
+                <a:spcPct val="125000"/>
+              </a:lnSpc>
+            </a:pPr>
+            <a:r>
+              <a:rPr sz="1400" b="1">
+                <a:solidFill>
+                  <a:srgbClr val="38322A"/>
+                </a:solidFill>
+                <a:latin typeface="맑은 고딕"/>
+              </a:rPr>
+              <a:t>LLM이 사실을 만들 수 없는 구조입니다</a:t>
+            </a:r>
+          </a:p>
+        </p:txBody>
+      </p:sp>
+      <p:sp>
+        <p:nvSpPr>
+          <p:cNvPr id="14" name="TextBox 13"/>
+          <p:cNvSpPr txBox="1"/>
+          <p:nvPr/>
+        </p:nvSpPr>
+        <p:spPr>
+          <a:xfrm>
+            <a:off x="4480560" y="5321808"/>
+            <a:ext cx="6949440" cy="640080"/>
+          </a:xfrm>
+          <a:prstGeom prst="rect">
+            <a:avLst/>
+          </a:prstGeom>
+          <a:noFill/>
+        </p:spPr>
+        <p:txBody>
+          <a:bodyPr wrap="square" anchor="t" lIns="0" rIns="0" tIns="0" bIns="0">
+            <a:spAutoFit/>
+          </a:bodyPr>
+          <a:lstStyle/>
+          <a:p>
+            <a:pPr algn="l">
+              <a:lnSpc>
+                <a:spcPct val="130000"/>
+              </a:lnSpc>
+            </a:pPr>
+            <a:r>
+              <a:rPr sz="1150" b="0">
+                <a:solidFill>
+                  <a:srgbClr val="6B6259"/>
+                </a:solidFill>
+                <a:latin typeface="맑은 고딕"/>
+              </a:rPr>
+              <a:t>LLM은 갈래를 고르고 문장을 엮을 뿐, 공고와 숫자는 색인에서 나옵니다. 그 문장도 가드레일을 반드시 거칩니다.</a:t>
+            </a:r>
+          </a:p>
+        </p:txBody>
+      </p:sp>
+    </p:spTree>
+  </p:cSld>
+  <p:clrMapOvr>
+    <a:masterClrMapping/>
+  </p:clrMapOvr>
+</p:sld>
+</file>
+
+<file path=ppt/slides/slide14.xml><?xml version="1.0" encoding="utf-8"?>
 <p:sld xmlns:a="http://schemas.openxmlformats.org/drawingml/2006/main" xmlns:p="http://schemas.openxmlformats.org/presentationml/2006/main" xmlns:r="http://schemas.openxmlformats.org/officeDocument/2006/relationships">
   <p:cSld>
     <p:spTree>

--- a/docs/꿀비_기술설명서.pptx
+++ b/docs/꿀비_기술설명서.pptx
@@ -4451,7 +4451,7 @@
         <p:spPr>
           <a:xfrm>
             <a:off x="685800" y="2286000"/>
-            <a:ext cx="5405548" cy="3566160"/>
+            <a:ext cx="6006164" cy="3566160"/>
           </a:xfrm>
           <a:prstGeom prst="rect">
             <a:avLst/>

--- a/docs/꿀비_기술설명서.pptx
+++ b/docs/꿀비_기술설명서.pptx
@@ -4451,7 +4451,7 @@
         <p:spPr>
           <a:xfrm>
             <a:off x="685800" y="2286000"/>
-            <a:ext cx="6006164" cy="3566160"/>
+            <a:ext cx="5405548" cy="3566160"/>
           </a:xfrm>
           <a:prstGeom prst="rect">
             <a:avLst/>

--- a/docs/꿀비_기술설명서.pptx
+++ b/docs/꿀비_기술설명서.pptx
@@ -4514,7 +4514,7 @@
         <p:spPr>
           <a:xfrm>
             <a:off x="4709160" y="2286000"/>
-            <a:ext cx="3678776" cy="3566160"/>
+            <a:ext cx="4063545" cy="3566160"/>
           </a:xfrm>
           <a:prstGeom prst="rect">
             <a:avLst/>
@@ -4577,7 +4577,7 @@
         <p:spPr>
           <a:xfrm>
             <a:off x="8366760" y="2286000"/>
-            <a:ext cx="3743253" cy="3017520"/>
+            <a:ext cx="3757923" cy="2834640"/>
           </a:xfrm>
           <a:prstGeom prst="rect">
             <a:avLst/>

--- a/docs/꿀비_기술설명서.pptx
+++ b/docs/꿀비_기술설명서.pptx
@@ -4124,7 +4124,7 @@
                 </a:solidFill>
                 <a:latin typeface="맑은 고딕"/>
               </a:rPr>
-              <a:t>감정 연동 3D 에이전트</a:t>
+              <a:t>자금 설계사</a:t>
             </a:r>
           </a:p>
         </p:txBody>
@@ -4163,7 +4163,7 @@
                 </a:solidFill>
                 <a:latin typeface="맑은 고딕"/>
               </a:rPr>
-              <a:t>몸짓·말·화면이 한 감정으로</a:t>
+              <a:t>공고 나열이 아니라 조달 설계</a:t>
             </a:r>
           </a:p>
         </p:txBody>
@@ -4202,7 +4202,7 @@
                 </a:solidFill>
                 <a:latin typeface="맑은 고딕"/>
               </a:rPr>
-              <a:t>"장사가 너무 힘들어요"라고 하면 꿀비는</a:t>
+              <a:t>"5천만원이 필요한데 어떻게 만들죠?" —</a:t>
             </a:r>
           </a:p>
           <a:p>
@@ -4218,7 +4218,7 @@
                 </a:solidFill>
                 <a:latin typeface="맑은 고딕"/>
               </a:rPr>
-              <a:t>통통 튀지 않고 고개를 숙이고 날개를 늦춥니다</a:t>
+              <a:t>실공고 900건에서 주는 돈 → 보증·이자지원 →</a:t>
             </a:r>
           </a:p>
           <a:p>
@@ -4234,7 +4234,7 @@
                 </a:solidFill>
                 <a:latin typeface="맑은 고딕"/>
               </a:rPr>
-              <a:t>(consoling). 좋은 소식엔 콘페티. 잡아 늘이면</a:t>
+              <a:t>융자 순으로 쌓아 갚을 돈을 최소화하고, 융자분은</a:t>
             </a:r>
           </a:p>
           <a:p>
@@ -4250,7 +4250,23 @@
                 </a:solidFill>
                 <a:latin typeface="맑은 고딕"/>
               </a:rPr>
-              <a:t>슬라임처럼 쫀득 — 외부 에셋 0의 절차적 3D.</a:t>
+              <a:t>월 상환액까지. 금액 근거 없는 공고는 스택에</a:t>
+            </a:r>
+          </a:p>
+          <a:p>
+            <a:pPr algn="l">
+              <a:lnSpc>
+                <a:spcPct val="142000"/>
+              </a:lnSpc>
+            </a:pPr>
+            <a:r>
+              <a:rPr sz="1100" b="0">
+                <a:solidFill>
+                  <a:srgbClr val="6B6259"/>
+                </a:solidFill>
+                <a:latin typeface="맑은 고딕"/>
+              </a:rPr>
+              <a:t>넣지 않고 '검토 후보'로만 — 전 항목 원문 링크.</a:t>
             </a:r>
           </a:p>
         </p:txBody>
@@ -4577,7 +4593,7 @@
         <p:spPr>
           <a:xfrm>
             <a:off x="8366760" y="2286000"/>
-            <a:ext cx="3757923" cy="2834640"/>
+            <a:ext cx="3682609" cy="2834640"/>
           </a:xfrm>
           <a:prstGeom prst="rect">
             <a:avLst/>

--- a/docs/꿀비_기술설명서.pptx
+++ b/docs/꿀비_기술설명서.pptx
@@ -19,6 +19,7 @@
     <p:sldId id="267" r:id="rId18"/>
     <p:sldId id="268" r:id="rId19"/>
     <p:sldId id="269" r:id="rId20"/>
+    <p:sldId id="270" r:id="rId21"/>
   </p:sldIdLst>
   <p:sldSz cx="12191695" cy="6858000" type="screen4x3"/>
   <p:notesSz cx="6858000" cy="9144000"/>
@@ -4234,7 +4235,7 @@
                 </a:solidFill>
                 <a:latin typeface="맑은 고딕"/>
               </a:rPr>
-              <a:t>융자 순으로 쌓아 갚을 돈을 최소화하고, 융자분은</a:t>
+              <a:t>융자 순으로 쌓고 월 상환액까지. 전액 시중</a:t>
             </a:r>
           </a:p>
           <a:p>
@@ -4250,7 +4251,7 @@
                 </a:solidFill>
                 <a:latin typeface="맑은 고딕"/>
               </a:rPr>
-              <a:t>월 상환액까지. 금액 근거 없는 공고는 스택에</a:t>
+              <a:t>대출 대비 "○○만원 아낍니다"를 숫자로 —</a:t>
             </a:r>
           </a:p>
           <a:p>
@@ -4266,7 +4267,7 @@
                 </a:solidFill>
                 <a:latin typeface="맑은 고딕"/>
               </a:rPr>
-              <a:t>넣지 않고 '검토 후보'로만 — 전 항목 원문 링크.</a:t>
+              <a:t>기준 금리는 '가정' 명시, 전 항목 원문 링크.</a:t>
             </a:r>
           </a:p>
         </p:txBody>
@@ -4730,7 +4731,7 @@
                 </a:solidFill>
                 <a:latin typeface="맑은 고딕"/>
               </a:rPr>
-              <a:t>SYSTEM</a:t>
+              <a:t>SCREENS Ⅱ</a:t>
             </a:r>
           </a:p>
         </p:txBody>
@@ -4769,7 +4770,7 @@
                 </a:solidFill>
                 <a:latin typeface="맑은 고딕"/>
               </a:rPr>
-              <a:t>8월 13일에 이 서버가 사라져도 계속 돕니다</a:t>
+              <a:t>과정은 글라스박스로, 가치는 원 단위로</a:t>
             </a:r>
           </a:p>
         </p:txBody>
@@ -4852,59 +4853,35 @@
                 </a:solidFill>
                 <a:latin typeface="맑은 고딕"/>
               </a:rPr>
-              <a:t>개발용 GPU 서버는 한시적입니다. 그래서 무거운 계산은 미리 끝내 파일로 남기고, 런타임은 그 파일만 읽습니다.</a:t>
-            </a:r>
-          </a:p>
-        </p:txBody>
-      </p:sp>
-      <p:sp>
-        <p:nvSpPr>
-          <p:cNvPr id="6" name="Rounded Rectangle 5"/>
-          <p:cNvSpPr/>
-          <p:nvPr/>
-        </p:nvSpPr>
+              <a:t>AI가 어떻게 답했는지(실측 로그), 설계가 얼마를 아끼는지(이자 절감), 권리가 언제 사라지는지(D-day) — 전부 실서비스 화면입니다.</a:t>
+            </a:r>
+          </a:p>
+        </p:txBody>
+      </p:sp>
+      <p:pic>
+        <p:nvPicPr>
+          <p:cNvPr id="6" name="Picture 5" descr="glassbox3.png"/>
+          <p:cNvPicPr>
+            <a:picLocks noChangeAspect="1"/>
+          </p:cNvPicPr>
+          <p:nvPr/>
+        </p:nvPicPr>
+        <p:blipFill>
+          <a:blip r:embed="rId2"/>
+          <a:stretch>
+            <a:fillRect/>
+          </a:stretch>
+        </p:blipFill>
         <p:spPr>
           <a:xfrm>
             <a:off x="685800" y="2286000"/>
-            <a:ext cx="5257800" cy="2148840"/>
-          </a:xfrm>
-          <a:prstGeom prst="roundRect">
-            <a:avLst>
-              <a:gd name="adj" fmla="val 6000"/>
-            </a:avLst>
-          </a:prstGeom>
-          <a:solidFill>
-            <a:srgbClr val="FAF8F4"/>
-          </a:solidFill>
-          <a:ln w="12700">
-            <a:solidFill>
-              <a:srgbClr val="E4DED4"/>
-            </a:solidFill>
-          </a:ln>
-          <a:effectLst/>
-        </p:spPr>
-        <p:style>
-          <a:lnRef idx="1">
-            <a:schemeClr val="accent1"/>
-          </a:lnRef>
-          <a:fillRef idx="3">
-            <a:schemeClr val="accent1"/>
-          </a:fillRef>
-          <a:effectRef idx="2">
-            <a:schemeClr val="accent1"/>
-          </a:effectRef>
-          <a:fontRef idx="minor">
-            <a:schemeClr val="lt1"/>
-          </a:fontRef>
-        </p:style>
-        <p:txBody>
-          <a:bodyPr rtlCol="0" anchor="ctr"/>
-          <a:lstStyle/>
-          <a:p>
-            <a:pPr algn="ctr"/>
-          </a:p>
-        </p:txBody>
-      </p:sp>
+            <a:ext cx="3101009" cy="3566160"/>
+          </a:xfrm>
+          <a:prstGeom prst="rect">
+            <a:avLst/>
+          </a:prstGeom>
+        </p:spPr>
+      </p:pic>
       <p:sp>
         <p:nvSpPr>
           <p:cNvPr id="7" name="TextBox 6"/>
@@ -4913,81 +4890,61 @@
         </p:nvSpPr>
         <p:spPr>
           <a:xfrm>
-            <a:off x="960120" y="2468880"/>
-            <a:ext cx="4663440" cy="320040"/>
-          </a:xfrm>
-          <a:prstGeom prst="rect">
-            <a:avLst/>
-          </a:prstGeom>
-          <a:noFill/>
-        </p:spPr>
-        <p:txBody>
-          <a:bodyPr wrap="square" anchor="t" lIns="0" rIns="0" tIns="0" bIns="0">
-            <a:spAutoFit/>
-          </a:bodyPr>
-          <a:lstStyle/>
-          <a:p>
-            <a:pPr algn="l">
-              <a:lnSpc>
-                <a:spcPct val="125000"/>
-              </a:lnSpc>
-            </a:pPr>
-            <a:r>
-              <a:rPr sz="1400" b="1">
-                <a:solidFill>
-                  <a:srgbClr val="38322A"/>
-                </a:solidFill>
-                <a:latin typeface="맑은 고딕"/>
-              </a:rPr>
-              <a:t>사전 계산 (개발 시 · GPU)</a:t>
-            </a:r>
-          </a:p>
-        </p:txBody>
-      </p:sp>
-      <p:sp>
-        <p:nvSpPr>
-          <p:cNvPr id="8" name="Oval 7"/>
-          <p:cNvSpPr/>
-          <p:nvPr/>
-        </p:nvSpPr>
-        <p:spPr>
-          <a:xfrm>
-            <a:off x="960120" y="2944368"/>
-            <a:ext cx="76200" cy="76200"/>
-          </a:xfrm>
-          <a:prstGeom prst="ellipse">
-            <a:avLst/>
-          </a:prstGeom>
-          <a:solidFill>
-            <a:srgbClr val="FFBC00"/>
-          </a:solidFill>
-          <a:ln>
-            <a:noFill/>
-          </a:ln>
-          <a:effectLst/>
-        </p:spPr>
-        <p:style>
-          <a:lnRef idx="1">
-            <a:schemeClr val="accent1"/>
-          </a:lnRef>
-          <a:fillRef idx="3">
-            <a:schemeClr val="accent1"/>
-          </a:fillRef>
-          <a:effectRef idx="2">
-            <a:schemeClr val="accent1"/>
-          </a:effectRef>
-          <a:fontRef idx="minor">
-            <a:schemeClr val="lt1"/>
-          </a:fontRef>
-        </p:style>
-        <p:txBody>
-          <a:bodyPr rtlCol="0" anchor="ctr"/>
-          <a:lstStyle/>
-          <a:p>
-            <a:pPr algn="ctr"/>
-          </a:p>
-        </p:txBody>
-      </p:sp>
+            <a:off x="685800" y="5989320"/>
+            <a:ext cx="2560320" cy="320040"/>
+          </a:xfrm>
+          <a:prstGeom prst="rect">
+            <a:avLst/>
+          </a:prstGeom>
+          <a:noFill/>
+        </p:spPr>
+        <p:txBody>
+          <a:bodyPr wrap="square" anchor="t" lIns="0" rIns="0" tIns="0" bIns="0">
+            <a:spAutoFit/>
+          </a:bodyPr>
+          <a:lstStyle/>
+          <a:p>
+            <a:pPr algn="l">
+              <a:lnSpc>
+                <a:spcPct val="125000"/>
+              </a:lnSpc>
+            </a:pPr>
+            <a:r>
+              <a:rPr sz="1100" b="1">
+                <a:solidFill>
+                  <a:srgbClr val="544438"/>
+                </a:solidFill>
+                <a:latin typeface="맑은 고딕"/>
+              </a:rPr>
+              <a:t>글라스박스 — 실측 로그</a:t>
+            </a:r>
+          </a:p>
+        </p:txBody>
+      </p:sp>
+      <p:pic>
+        <p:nvPicPr>
+          <p:cNvPr id="8" name="Picture 7" descr="plan_bench.png"/>
+          <p:cNvPicPr>
+            <a:picLocks noChangeAspect="1"/>
+          </p:cNvPicPr>
+          <p:nvPr/>
+        </p:nvPicPr>
+        <p:blipFill>
+          <a:blip r:embed="rId3"/>
+          <a:stretch>
+            <a:fillRect/>
+          </a:stretch>
+        </p:blipFill>
+        <p:spPr>
+          <a:xfrm>
+            <a:off x="3429000" y="2286000"/>
+            <a:ext cx="3579913" cy="2514600"/>
+          </a:xfrm>
+          <a:prstGeom prst="rect">
+            <a:avLst/>
+          </a:prstGeom>
+        </p:spPr>
+      </p:pic>
       <p:sp>
         <p:nvSpPr>
           <p:cNvPr id="9" name="TextBox 8"/>
@@ -4996,81 +4953,61 @@
         </p:nvSpPr>
         <p:spPr>
           <a:xfrm>
-            <a:off x="1161288" y="2880360"/>
-            <a:ext cx="4553712" cy="365760"/>
-          </a:xfrm>
-          <a:prstGeom prst="rect">
-            <a:avLst/>
-          </a:prstGeom>
-          <a:noFill/>
-        </p:spPr>
-        <p:txBody>
-          <a:bodyPr wrap="square" anchor="t" lIns="0" rIns="0" tIns="0" bIns="0">
-            <a:spAutoFit/>
-          </a:bodyPr>
-          <a:lstStyle/>
-          <a:p>
-            <a:pPr algn="l">
-              <a:lnSpc>
-                <a:spcPct val="125000"/>
-              </a:lnSpc>
-            </a:pPr>
-            <a:r>
-              <a:rPr sz="1150" b="0">
-                <a:solidFill>
-                  <a:srgbClr val="38322A"/>
-                </a:solidFill>
-                <a:latin typeface="맑은 고딕"/>
-              </a:rPr>
-              <a:t>기업마당 900건 수집 → 구조화</a:t>
-            </a:r>
-          </a:p>
-        </p:txBody>
-      </p:sp>
-      <p:sp>
-        <p:nvSpPr>
-          <p:cNvPr id="10" name="Oval 9"/>
-          <p:cNvSpPr/>
-          <p:nvPr/>
-        </p:nvSpPr>
-        <p:spPr>
-          <a:xfrm>
-            <a:off x="960120" y="3273552"/>
-            <a:ext cx="76200" cy="76200"/>
-          </a:xfrm>
-          <a:prstGeom prst="ellipse">
-            <a:avLst/>
-          </a:prstGeom>
-          <a:solidFill>
-            <a:srgbClr val="FFBC00"/>
-          </a:solidFill>
-          <a:ln>
-            <a:noFill/>
-          </a:ln>
-          <a:effectLst/>
-        </p:spPr>
-        <p:style>
-          <a:lnRef idx="1">
-            <a:schemeClr val="accent1"/>
-          </a:lnRef>
-          <a:fillRef idx="3">
-            <a:schemeClr val="accent1"/>
-          </a:fillRef>
-          <a:effectRef idx="2">
-            <a:schemeClr val="accent1"/>
-          </a:effectRef>
-          <a:fontRef idx="minor">
-            <a:schemeClr val="lt1"/>
-          </a:fontRef>
-        </p:style>
-        <p:txBody>
-          <a:bodyPr rtlCol="0" anchor="ctr"/>
-          <a:lstStyle/>
-          <a:p>
-            <a:pPr algn="ctr"/>
-          </a:p>
-        </p:txBody>
-      </p:sp>
+            <a:off x="3429000" y="5989320"/>
+            <a:ext cx="3566160" cy="320040"/>
+          </a:xfrm>
+          <a:prstGeom prst="rect">
+            <a:avLst/>
+          </a:prstGeom>
+          <a:noFill/>
+        </p:spPr>
+        <p:txBody>
+          <a:bodyPr wrap="square" anchor="t" lIns="0" rIns="0" tIns="0" bIns="0">
+            <a:spAutoFit/>
+          </a:bodyPr>
+          <a:lstStyle/>
+          <a:p>
+            <a:pPr algn="l">
+              <a:lnSpc>
+                <a:spcPct val="125000"/>
+              </a:lnSpc>
+            </a:pPr>
+            <a:r>
+              <a:rPr sz="1100" b="1">
+                <a:solidFill>
+                  <a:srgbClr val="544438"/>
+                </a:solidFill>
+                <a:latin typeface="맑은 고딕"/>
+              </a:rPr>
+              <a:t>자금 설계 — 시중 대출 대비 절감액</a:t>
+            </a:r>
+          </a:p>
+        </p:txBody>
+      </p:sp>
+      <p:pic>
+        <p:nvPicPr>
+          <p:cNvPr id="10" name="Picture 9" descr="goldentime.png"/>
+          <p:cNvPicPr>
+            <a:picLocks noChangeAspect="1"/>
+          </p:cNvPicPr>
+          <p:nvPr/>
+        </p:nvPicPr>
+        <p:blipFill>
+          <a:blip r:embed="rId4"/>
+          <a:stretch>
+            <a:fillRect/>
+          </a:stretch>
+        </p:blipFill>
+        <p:spPr>
+          <a:xfrm>
+            <a:off x="7635240" y="2286000"/>
+            <a:ext cx="3809048" cy="1965960"/>
+          </a:xfrm>
+          <a:prstGeom prst="rect">
+            <a:avLst/>
+          </a:prstGeom>
+        </p:spPr>
+      </p:pic>
       <p:sp>
         <p:nvSpPr>
           <p:cNvPr id="11" name="TextBox 10"/>
@@ -5079,760 +5016,33 @@
         </p:nvSpPr>
         <p:spPr>
           <a:xfrm>
-            <a:off x="1161288" y="3209544"/>
-            <a:ext cx="4553712" cy="365760"/>
-          </a:xfrm>
-          <a:prstGeom prst="rect">
-            <a:avLst/>
-          </a:prstGeom>
-          <a:noFill/>
-        </p:spPr>
-        <p:txBody>
-          <a:bodyPr wrap="square" anchor="t" lIns="0" rIns="0" tIns="0" bIns="0">
-            <a:spAutoFit/>
-          </a:bodyPr>
-          <a:lstStyle/>
-          <a:p>
-            <a:pPr algn="l">
-              <a:lnSpc>
-                <a:spcPct val="125000"/>
-              </a:lnSpc>
-            </a:pPr>
-            <a:r>
-              <a:rPr sz="1150" b="0">
-                <a:solidFill>
-                  <a:srgbClr val="38322A"/>
-                </a:solidFill>
-                <a:latin typeface="맑은 고딕"/>
-              </a:rPr>
-              <a:t>전국 점포 272만 개 → 행정동 집계</a:t>
-            </a:r>
-          </a:p>
-        </p:txBody>
-      </p:sp>
-      <p:sp>
-        <p:nvSpPr>
-          <p:cNvPr id="12" name="Oval 11"/>
-          <p:cNvSpPr/>
-          <p:nvPr/>
-        </p:nvSpPr>
-        <p:spPr>
-          <a:xfrm>
-            <a:off x="960120" y="3602736"/>
-            <a:ext cx="76200" cy="76200"/>
-          </a:xfrm>
-          <a:prstGeom prst="ellipse">
-            <a:avLst/>
-          </a:prstGeom>
-          <a:solidFill>
-            <a:srgbClr val="FFBC00"/>
-          </a:solidFill>
-          <a:ln>
-            <a:noFill/>
-          </a:ln>
-          <a:effectLst/>
-        </p:spPr>
-        <p:style>
-          <a:lnRef idx="1">
-            <a:schemeClr val="accent1"/>
-          </a:lnRef>
-          <a:fillRef idx="3">
-            <a:schemeClr val="accent1"/>
-          </a:fillRef>
-          <a:effectRef idx="2">
-            <a:schemeClr val="accent1"/>
-          </a:effectRef>
-          <a:fontRef idx="minor">
-            <a:schemeClr val="lt1"/>
-          </a:fontRef>
-        </p:style>
-        <p:txBody>
-          <a:bodyPr rtlCol="0" anchor="ctr"/>
-          <a:lstStyle/>
-          <a:p>
-            <a:pPr algn="ctr"/>
-          </a:p>
-        </p:txBody>
-      </p:sp>
-      <p:sp>
-        <p:nvSpPr>
-          <p:cNvPr id="13" name="TextBox 12"/>
-          <p:cNvSpPr txBox="1"/>
-          <p:nvPr/>
-        </p:nvSpPr>
-        <p:spPr>
-          <a:xfrm>
-            <a:off x="1161288" y="3538728"/>
-            <a:ext cx="4553712" cy="365760"/>
-          </a:xfrm>
-          <a:prstGeom prst="rect">
-            <a:avLst/>
-          </a:prstGeom>
-          <a:noFill/>
-        </p:spPr>
-        <p:txBody>
-          <a:bodyPr wrap="square" anchor="t" lIns="0" rIns="0" tIns="0" bIns="0">
-            <a:spAutoFit/>
-          </a:bodyPr>
-          <a:lstStyle/>
-          <a:p>
-            <a:pPr algn="l">
-              <a:lnSpc>
-                <a:spcPct val="125000"/>
-              </a:lnSpc>
-            </a:pPr>
-            <a:r>
-              <a:rPr sz="1150" b="0">
-                <a:solidFill>
-                  <a:srgbClr val="38322A"/>
-                </a:solidFill>
-                <a:latin typeface="맑은 고딕"/>
-              </a:rPr>
-              <a:t>임베딩 3,326개 → 평균 중심화</a:t>
-            </a:r>
-          </a:p>
-        </p:txBody>
-      </p:sp>
-      <p:sp>
-        <p:nvSpPr>
-          <p:cNvPr id="14" name="Oval 13"/>
-          <p:cNvSpPr/>
-          <p:nvPr/>
-        </p:nvSpPr>
-        <p:spPr>
-          <a:xfrm>
-            <a:off x="960120" y="3931920"/>
-            <a:ext cx="76200" cy="76200"/>
-          </a:xfrm>
-          <a:prstGeom prst="ellipse">
-            <a:avLst/>
-          </a:prstGeom>
-          <a:solidFill>
-            <a:srgbClr val="FFBC00"/>
-          </a:solidFill>
-          <a:ln>
-            <a:noFill/>
-          </a:ln>
-          <a:effectLst/>
-        </p:spPr>
-        <p:style>
-          <a:lnRef idx="1">
-            <a:schemeClr val="accent1"/>
-          </a:lnRef>
-          <a:fillRef idx="3">
-            <a:schemeClr val="accent1"/>
-          </a:fillRef>
-          <a:effectRef idx="2">
-            <a:schemeClr val="accent1"/>
-          </a:effectRef>
-          <a:fontRef idx="minor">
-            <a:schemeClr val="lt1"/>
-          </a:fontRef>
-        </p:style>
-        <p:txBody>
-          <a:bodyPr rtlCol="0" anchor="ctr"/>
-          <a:lstStyle/>
-          <a:p>
-            <a:pPr algn="ctr"/>
-          </a:p>
-        </p:txBody>
-      </p:sp>
-      <p:sp>
-        <p:nvSpPr>
-          <p:cNvPr id="15" name="TextBox 14"/>
-          <p:cNvSpPr txBox="1"/>
-          <p:nvPr/>
-        </p:nvSpPr>
-        <p:spPr>
-          <a:xfrm>
-            <a:off x="1161288" y="3867912"/>
-            <a:ext cx="4553712" cy="365760"/>
-          </a:xfrm>
-          <a:prstGeom prst="rect">
-            <a:avLst/>
-          </a:prstGeom>
-          <a:noFill/>
-        </p:spPr>
-        <p:txBody>
-          <a:bodyPr wrap="square" anchor="t" lIns="0" rIns="0" tIns="0" bIns="0">
-            <a:spAutoFit/>
-          </a:bodyPr>
-          <a:lstStyle/>
-          <a:p>
-            <a:pPr algn="l">
-              <a:lnSpc>
-                <a:spcPct val="125000"/>
-              </a:lnSpc>
-            </a:pPr>
-            <a:r>
-              <a:rPr sz="1150" b="0">
-                <a:solidFill>
-                  <a:srgbClr val="38322A"/>
-                </a:solidFill>
-                <a:latin typeface="맑은 고딕"/>
-              </a:rPr>
-              <a:t>결과: 색인 파일 23.8MB (저장소에 포함)</a:t>
-            </a:r>
-          </a:p>
-        </p:txBody>
-      </p:sp>
-      <p:sp>
-        <p:nvSpPr>
-          <p:cNvPr id="16" name="Rounded Rectangle 15"/>
-          <p:cNvSpPr/>
-          <p:nvPr/>
-        </p:nvSpPr>
-        <p:spPr>
-          <a:xfrm>
-            <a:off x="6217920" y="2286000"/>
-            <a:ext cx="5257800" cy="2148840"/>
-          </a:xfrm>
-          <a:prstGeom prst="roundRect">
-            <a:avLst>
-              <a:gd name="adj" fmla="val 6000"/>
-            </a:avLst>
-          </a:prstGeom>
-          <a:solidFill>
-            <a:srgbClr val="FAF8F4"/>
-          </a:solidFill>
-          <a:ln w="12700">
-            <a:solidFill>
-              <a:srgbClr val="E4DED4"/>
-            </a:solidFill>
-          </a:ln>
-          <a:effectLst/>
-        </p:spPr>
-        <p:style>
-          <a:lnRef idx="1">
-            <a:schemeClr val="accent1"/>
-          </a:lnRef>
-          <a:fillRef idx="3">
-            <a:schemeClr val="accent1"/>
-          </a:fillRef>
-          <a:effectRef idx="2">
-            <a:schemeClr val="accent1"/>
-          </a:effectRef>
-          <a:fontRef idx="minor">
-            <a:schemeClr val="lt1"/>
-          </a:fontRef>
-        </p:style>
-        <p:txBody>
-          <a:bodyPr rtlCol="0" anchor="ctr"/>
-          <a:lstStyle/>
-          <a:p>
-            <a:pPr algn="ctr"/>
-          </a:p>
-        </p:txBody>
-      </p:sp>
-      <p:sp>
-        <p:nvSpPr>
-          <p:cNvPr id="17" name="TextBox 16"/>
-          <p:cNvSpPr txBox="1"/>
-          <p:nvPr/>
-        </p:nvSpPr>
-        <p:spPr>
-          <a:xfrm>
-            <a:off x="6492240" y="2468880"/>
-            <a:ext cx="4663440" cy="320040"/>
-          </a:xfrm>
-          <a:prstGeom prst="rect">
-            <a:avLst/>
-          </a:prstGeom>
-          <a:noFill/>
-        </p:spPr>
-        <p:txBody>
-          <a:bodyPr wrap="square" anchor="t" lIns="0" rIns="0" tIns="0" bIns="0">
-            <a:spAutoFit/>
-          </a:bodyPr>
-          <a:lstStyle/>
-          <a:p>
-            <a:pPr algn="l">
-              <a:lnSpc>
-                <a:spcPct val="125000"/>
-              </a:lnSpc>
-            </a:pPr>
-            <a:r>
-              <a:rPr sz="1400" b="1">
-                <a:solidFill>
-                  <a:srgbClr val="38322A"/>
-                </a:solidFill>
-                <a:latin typeface="맑은 고딕"/>
-              </a:rPr>
-              <a:t>런타임 (배포 · CPU만)</a:t>
-            </a:r>
-          </a:p>
-        </p:txBody>
-      </p:sp>
-      <p:sp>
-        <p:nvSpPr>
-          <p:cNvPr id="18" name="Oval 17"/>
-          <p:cNvSpPr/>
-          <p:nvPr/>
-        </p:nvSpPr>
-        <p:spPr>
-          <a:xfrm>
-            <a:off x="6492240" y="2944368"/>
-            <a:ext cx="76200" cy="76200"/>
-          </a:xfrm>
-          <a:prstGeom prst="ellipse">
-            <a:avLst/>
-          </a:prstGeom>
-          <a:solidFill>
-            <a:srgbClr val="FFBC00"/>
-          </a:solidFill>
-          <a:ln>
-            <a:noFill/>
-          </a:ln>
-          <a:effectLst/>
-        </p:spPr>
-        <p:style>
-          <a:lnRef idx="1">
-            <a:schemeClr val="accent1"/>
-          </a:lnRef>
-          <a:fillRef idx="3">
-            <a:schemeClr val="accent1"/>
-          </a:fillRef>
-          <a:effectRef idx="2">
-            <a:schemeClr val="accent1"/>
-          </a:effectRef>
-          <a:fontRef idx="minor">
-            <a:schemeClr val="lt1"/>
-          </a:fontRef>
-        </p:style>
-        <p:txBody>
-          <a:bodyPr rtlCol="0" anchor="ctr"/>
-          <a:lstStyle/>
-          <a:p>
-            <a:pPr algn="ctr"/>
-          </a:p>
-        </p:txBody>
-      </p:sp>
-      <p:sp>
-        <p:nvSpPr>
-          <p:cNvPr id="19" name="TextBox 18"/>
-          <p:cNvSpPr txBox="1"/>
-          <p:nvPr/>
-        </p:nvSpPr>
-        <p:spPr>
-          <a:xfrm>
-            <a:off x="6693408" y="2880360"/>
-            <a:ext cx="4553712" cy="365760"/>
-          </a:xfrm>
-          <a:prstGeom prst="rect">
-            <a:avLst/>
-          </a:prstGeom>
-          <a:noFill/>
-        </p:spPr>
-        <p:txBody>
-          <a:bodyPr wrap="square" anchor="t" lIns="0" rIns="0" tIns="0" bIns="0">
-            <a:spAutoFit/>
-          </a:bodyPr>
-          <a:lstStyle/>
-          <a:p>
-            <a:pPr algn="l">
-              <a:lnSpc>
-                <a:spcPct val="125000"/>
-              </a:lnSpc>
-            </a:pPr>
-            <a:r>
-              <a:rPr sz="1150" b="0">
-                <a:solidFill>
-                  <a:srgbClr val="38322A"/>
-                </a:solidFill>
-                <a:latin typeface="맑은 고딕"/>
-              </a:rPr>
-              <a:t>질의 임베딩: int8 ONNX · 5ms · 키 불필요</a:t>
-            </a:r>
-          </a:p>
-        </p:txBody>
-      </p:sp>
-      <p:sp>
-        <p:nvSpPr>
-          <p:cNvPr id="20" name="Oval 19"/>
-          <p:cNvSpPr/>
-          <p:nvPr/>
-        </p:nvSpPr>
-        <p:spPr>
-          <a:xfrm>
-            <a:off x="6492240" y="3273552"/>
-            <a:ext cx="76200" cy="76200"/>
-          </a:xfrm>
-          <a:prstGeom prst="ellipse">
-            <a:avLst/>
-          </a:prstGeom>
-          <a:solidFill>
-            <a:srgbClr val="FFBC00"/>
-          </a:solidFill>
-          <a:ln>
-            <a:noFill/>
-          </a:ln>
-          <a:effectLst/>
-        </p:spPr>
-        <p:style>
-          <a:lnRef idx="1">
-            <a:schemeClr val="accent1"/>
-          </a:lnRef>
-          <a:fillRef idx="3">
-            <a:schemeClr val="accent1"/>
-          </a:fillRef>
-          <a:effectRef idx="2">
-            <a:schemeClr val="accent1"/>
-          </a:effectRef>
-          <a:fontRef idx="minor">
-            <a:schemeClr val="lt1"/>
-          </a:fontRef>
-        </p:style>
-        <p:txBody>
-          <a:bodyPr rtlCol="0" anchor="ctr"/>
-          <a:lstStyle/>
-          <a:p>
-            <a:pPr algn="ctr"/>
-          </a:p>
-        </p:txBody>
-      </p:sp>
-      <p:sp>
-        <p:nvSpPr>
-          <p:cNvPr id="21" name="TextBox 20"/>
-          <p:cNvSpPr txBox="1"/>
-          <p:nvPr/>
-        </p:nvSpPr>
-        <p:spPr>
-          <a:xfrm>
-            <a:off x="6693408" y="3209544"/>
-            <a:ext cx="4553712" cy="365760"/>
-          </a:xfrm>
-          <a:prstGeom prst="rect">
-            <a:avLst/>
-          </a:prstGeom>
-          <a:noFill/>
-        </p:spPr>
-        <p:txBody>
-          <a:bodyPr wrap="square" anchor="t" lIns="0" rIns="0" tIns="0" bIns="0">
-            <a:spAutoFit/>
-          </a:bodyPr>
-          <a:lstStyle/>
-          <a:p>
-            <a:pPr algn="l">
-              <a:lnSpc>
-                <a:spcPct val="125000"/>
-              </a:lnSpc>
-            </a:pPr>
-            <a:r>
-              <a:rPr sz="1150" b="0">
-                <a:solidFill>
-                  <a:srgbClr val="38322A"/>
-                </a:solidFill>
-                <a:latin typeface="맑은 고딕"/>
-              </a:rPr>
-              <a:t>검색: BM25 + 코사인 · 12~55ms</a:t>
-            </a:r>
-          </a:p>
-        </p:txBody>
-      </p:sp>
-      <p:sp>
-        <p:nvSpPr>
-          <p:cNvPr id="22" name="Oval 21"/>
-          <p:cNvSpPr/>
-          <p:nvPr/>
-        </p:nvSpPr>
-        <p:spPr>
-          <a:xfrm>
-            <a:off x="6492240" y="3602736"/>
-            <a:ext cx="76200" cy="76200"/>
-          </a:xfrm>
-          <a:prstGeom prst="ellipse">
-            <a:avLst/>
-          </a:prstGeom>
-          <a:solidFill>
-            <a:srgbClr val="FFBC00"/>
-          </a:solidFill>
-          <a:ln>
-            <a:noFill/>
-          </a:ln>
-          <a:effectLst/>
-        </p:spPr>
-        <p:style>
-          <a:lnRef idx="1">
-            <a:schemeClr val="accent1"/>
-          </a:lnRef>
-          <a:fillRef idx="3">
-            <a:schemeClr val="accent1"/>
-          </a:fillRef>
-          <a:effectRef idx="2">
-            <a:schemeClr val="accent1"/>
-          </a:effectRef>
-          <a:fontRef idx="minor">
-            <a:schemeClr val="lt1"/>
-          </a:fontRef>
-        </p:style>
-        <p:txBody>
-          <a:bodyPr rtlCol="0" anchor="ctr"/>
-          <a:lstStyle/>
-          <a:p>
-            <a:pPr algn="ctr"/>
-          </a:p>
-        </p:txBody>
-      </p:sp>
-      <p:sp>
-        <p:nvSpPr>
-          <p:cNvPr id="23" name="TextBox 22"/>
-          <p:cNvSpPr txBox="1"/>
-          <p:nvPr/>
-        </p:nvSpPr>
-        <p:spPr>
-          <a:xfrm>
-            <a:off x="6693408" y="3538728"/>
-            <a:ext cx="4553712" cy="365760"/>
-          </a:xfrm>
-          <a:prstGeom prst="rect">
-            <a:avLst/>
-          </a:prstGeom>
-          <a:noFill/>
-        </p:spPr>
-        <p:txBody>
-          <a:bodyPr wrap="square" anchor="t" lIns="0" rIns="0" tIns="0" bIns="0">
-            <a:spAutoFit/>
-          </a:bodyPr>
-          <a:lstStyle/>
-          <a:p>
-            <a:pPr algn="l">
-              <a:lnSpc>
-                <a:spcPct val="125000"/>
-              </a:lnSpc>
-            </a:pPr>
-            <a:r>
-              <a:rPr sz="1150" b="0">
-                <a:solidFill>
-                  <a:srgbClr val="38322A"/>
-                </a:solidFill>
-                <a:latin typeface="맑은 고딕"/>
-              </a:rPr>
-              <a:t>LLM: Gemini (선택) · 없으면 규칙+템플릿</a:t>
-            </a:r>
-          </a:p>
-        </p:txBody>
-      </p:sp>
-      <p:sp>
-        <p:nvSpPr>
-          <p:cNvPr id="24" name="Oval 23"/>
-          <p:cNvSpPr/>
-          <p:nvPr/>
-        </p:nvSpPr>
-        <p:spPr>
-          <a:xfrm>
-            <a:off x="6492240" y="3931920"/>
-            <a:ext cx="76200" cy="76200"/>
-          </a:xfrm>
-          <a:prstGeom prst="ellipse">
-            <a:avLst/>
-          </a:prstGeom>
-          <a:solidFill>
-            <a:srgbClr val="FFBC00"/>
-          </a:solidFill>
-          <a:ln>
-            <a:noFill/>
-          </a:ln>
-          <a:effectLst/>
-        </p:spPr>
-        <p:style>
-          <a:lnRef idx="1">
-            <a:schemeClr val="accent1"/>
-          </a:lnRef>
-          <a:fillRef idx="3">
-            <a:schemeClr val="accent1"/>
-          </a:fillRef>
-          <a:effectRef idx="2">
-            <a:schemeClr val="accent1"/>
-          </a:effectRef>
-          <a:fontRef idx="minor">
-            <a:schemeClr val="lt1"/>
-          </a:fontRef>
-        </p:style>
-        <p:txBody>
-          <a:bodyPr rtlCol="0" anchor="ctr"/>
-          <a:lstStyle/>
-          <a:p>
-            <a:pPr algn="ctr"/>
-          </a:p>
-        </p:txBody>
-      </p:sp>
-      <p:sp>
-        <p:nvSpPr>
-          <p:cNvPr id="25" name="TextBox 24"/>
-          <p:cNvSpPr txBox="1"/>
-          <p:nvPr/>
-        </p:nvSpPr>
-        <p:spPr>
-          <a:xfrm>
-            <a:off x="6693408" y="3867912"/>
-            <a:ext cx="4553712" cy="365760"/>
-          </a:xfrm>
-          <a:prstGeom prst="rect">
-            <a:avLst/>
-          </a:prstGeom>
-          <a:noFill/>
-        </p:spPr>
-        <p:txBody>
-          <a:bodyPr wrap="square" anchor="t" lIns="0" rIns="0" tIns="0" bIns="0">
-            <a:spAutoFit/>
-          </a:bodyPr>
-          <a:lstStyle/>
-          <a:p>
-            <a:pPr algn="l">
-              <a:lnSpc>
-                <a:spcPct val="125000"/>
-              </a:lnSpc>
-            </a:pPr>
-            <a:r>
-              <a:rPr sz="1150" b="0">
-                <a:solidFill>
-                  <a:srgbClr val="38322A"/>
-                </a:solidFill>
-                <a:latin typeface="맑은 고딕"/>
-              </a:rPr>
-              <a:t>메모리: 354MB (무료 등급 512MB 안)</a:t>
-            </a:r>
-          </a:p>
-        </p:txBody>
-      </p:sp>
-      <p:sp>
-        <p:nvSpPr>
-          <p:cNvPr id="26" name="Rounded Rectangle 25"/>
-          <p:cNvSpPr/>
-          <p:nvPr/>
-        </p:nvSpPr>
-        <p:spPr>
-          <a:xfrm>
-            <a:off x="685800" y="4663440"/>
-            <a:ext cx="10789920" cy="1600200"/>
-          </a:xfrm>
-          <a:prstGeom prst="roundRect">
-            <a:avLst>
-              <a:gd name="adj" fmla="val 6000"/>
-            </a:avLst>
-          </a:prstGeom>
-          <a:solidFill>
-            <a:srgbClr val="FFF9E8"/>
-          </a:solidFill>
-          <a:ln w="12700">
-            <a:solidFill>
-              <a:srgbClr val="FFBC00"/>
-            </a:solidFill>
-          </a:ln>
-          <a:effectLst/>
-        </p:spPr>
-        <p:style>
-          <a:lnRef idx="1">
-            <a:schemeClr val="accent1"/>
-          </a:lnRef>
-          <a:fillRef idx="3">
-            <a:schemeClr val="accent1"/>
-          </a:fillRef>
-          <a:effectRef idx="2">
-            <a:schemeClr val="accent1"/>
-          </a:effectRef>
-          <a:fontRef idx="minor">
-            <a:schemeClr val="lt1"/>
-          </a:fontRef>
-        </p:style>
-        <p:txBody>
-          <a:bodyPr rtlCol="0" anchor="ctr"/>
-          <a:lstStyle/>
-          <a:p>
-            <a:pPr algn="ctr"/>
-          </a:p>
-        </p:txBody>
-      </p:sp>
-      <p:sp>
-        <p:nvSpPr>
-          <p:cNvPr id="27" name="TextBox 26"/>
-          <p:cNvSpPr txBox="1"/>
-          <p:nvPr/>
-        </p:nvSpPr>
-        <p:spPr>
-          <a:xfrm>
-            <a:off x="960120" y="4846320"/>
-            <a:ext cx="10241280" cy="320040"/>
-          </a:xfrm>
-          <a:prstGeom prst="rect">
-            <a:avLst/>
-          </a:prstGeom>
-          <a:noFill/>
-        </p:spPr>
-        <p:txBody>
-          <a:bodyPr wrap="square" anchor="t" lIns="0" rIns="0" tIns="0" bIns="0">
-            <a:spAutoFit/>
-          </a:bodyPr>
-          <a:lstStyle/>
-          <a:p>
-            <a:pPr algn="l">
-              <a:lnSpc>
-                <a:spcPct val="125000"/>
-              </a:lnSpc>
-            </a:pPr>
-            <a:r>
-              <a:rPr sz="1400" b="1">
-                <a:solidFill>
-                  <a:srgbClr val="38322A"/>
-                </a:solidFill>
-                <a:latin typeface="맑은 고딕"/>
-              </a:rPr>
-              <a:t>512MB에 넣기 위해 실제로 잰 것</a:t>
-            </a:r>
-          </a:p>
-        </p:txBody>
-      </p:sp>
-      <p:sp>
-        <p:nvSpPr>
-          <p:cNvPr id="28" name="TextBox 27"/>
-          <p:cNvSpPr txBox="1"/>
-          <p:nvPr/>
-        </p:nvSpPr>
-        <p:spPr>
-          <a:xfrm>
-            <a:off x="960120" y="5230368"/>
-            <a:ext cx="10241280" cy="914400"/>
-          </a:xfrm>
-          <a:prstGeom prst="rect">
-            <a:avLst/>
-          </a:prstGeom>
-          <a:noFill/>
-        </p:spPr>
-        <p:txBody>
-          <a:bodyPr wrap="square" anchor="t" lIns="0" rIns="0" tIns="0" bIns="0">
-            <a:spAutoFit/>
-          </a:bodyPr>
-          <a:lstStyle/>
-          <a:p>
-            <a:pPr algn="l">
-              <a:lnSpc>
-                <a:spcPct val="135000"/>
-              </a:lnSpc>
-            </a:pPr>
-            <a:r>
-              <a:rPr sz="1150" b="0">
+            <a:off x="7635240" y="5989320"/>
+            <a:ext cx="3840480" cy="320040"/>
+          </a:xfrm>
+          <a:prstGeom prst="rect">
+            <a:avLst/>
+          </a:prstGeom>
+          <a:noFill/>
+        </p:spPr>
+        <p:txBody>
+          <a:bodyPr wrap="square" anchor="t" lIns="0" rIns="0" tIns="0" bIns="0">
+            <a:spAutoFit/>
+          </a:bodyPr>
+          <a:lstStyle/>
+          <a:p>
+            <a:pPr algn="l">
+              <a:lnSpc>
+                <a:spcPct val="125000"/>
+              </a:lnSpc>
+            </a:pPr>
+            <a:r>
+              <a:rPr sz="1100" b="1">
                 <a:solidFill>
                   <a:srgbClr val="544438"/>
                 </a:solidFill>
                 <a:latin typeface="맑은 고딕"/>
               </a:rPr>
-              <a:t>배포 전에 메모리를 재 보니 611MB였습니다. 안 재고 올렸으면 그 자리에서 죽었습니다. 범인은 뜻밖에도 토크나이저였습니다 — 17MB짜리 tokenizer.json을 올리는 데 280MB를 씁니다.</a:t>
-            </a:r>
-          </a:p>
-          <a:p>
-            <a:pPr algn="l">
-              <a:lnSpc>
-                <a:spcPct val="135000"/>
-              </a:lnSpc>
-            </a:pPr>
-            <a:r>
-              <a:rPr sz="1150" b="0">
-                <a:solidFill>
-                  <a:srgbClr val="544438"/>
-                </a:solidFill>
-                <a:latin typeface="맑은 고딕"/>
-              </a:rPr>
-              <a:t>sentencepiece 원본(5MB)으로 바꾸면 70MB입니다. 다만 토큰 번호가 어긋나면 검색이 조용히 망가지므로, 두 방식의 출력을 대조해 **비트 단위로 같음**을 확인하고 바꿨습니다. ONNX 메모리 아레나도 껐습니다(200MB→9MB). 결과 611MB → 354MB.</a:t>
+              <a:t>골든타임 — 권리 마감 D-day</a:t>
             </a:r>
           </a:p>
         </p:txBody>
@@ -5889,7 +5099,7 @@
                 </a:solidFill>
                 <a:latin typeface="맑은 고딕"/>
               </a:rPr>
-              <a:t>WHY US</a:t>
+              <a:t>SYSTEM</a:t>
             </a:r>
           </a:p>
         </p:txBody>
@@ -5928,7 +5138,7 @@
                 </a:solidFill>
                 <a:latin typeface="맑은 고딕"/>
               </a:rPr>
-              <a:t>정직을 설계에 넣었습니다</a:t>
+              <a:t>8월 13일에 이 서버가 사라져도 계속 돕니다</a:t>
             </a:r>
           </a:p>
         </p:txBody>
@@ -5985,8 +5195,95 @@
         </p:nvSpPr>
         <p:spPr>
           <a:xfrm>
-            <a:off x="685800" y="1828800"/>
-            <a:ext cx="3657600" cy="320040"/>
+            <a:off x="685800" y="1737360"/>
+            <a:ext cx="10789920" cy="365760"/>
+          </a:xfrm>
+          <a:prstGeom prst="rect">
+            <a:avLst/>
+          </a:prstGeom>
+          <a:noFill/>
+        </p:spPr>
+        <p:txBody>
+          <a:bodyPr wrap="square" anchor="t" lIns="0" rIns="0" tIns="0" bIns="0">
+            <a:spAutoFit/>
+          </a:bodyPr>
+          <a:lstStyle/>
+          <a:p>
+            <a:pPr algn="l">
+              <a:lnSpc>
+                <a:spcPct val="125000"/>
+              </a:lnSpc>
+            </a:pPr>
+            <a:r>
+              <a:rPr sz="1300" b="0">
+                <a:solidFill>
+                  <a:srgbClr val="6B6259"/>
+                </a:solidFill>
+                <a:latin typeface="맑은 고딕"/>
+              </a:rPr>
+              <a:t>개발용 GPU 서버는 한시적입니다. 그래서 무거운 계산은 미리 끝내 파일로 남기고, 런타임은 그 파일만 읽습니다.</a:t>
+            </a:r>
+          </a:p>
+        </p:txBody>
+      </p:sp>
+      <p:sp>
+        <p:nvSpPr>
+          <p:cNvPr id="6" name="Rounded Rectangle 5"/>
+          <p:cNvSpPr/>
+          <p:nvPr/>
+        </p:nvSpPr>
+        <p:spPr>
+          <a:xfrm>
+            <a:off x="685800" y="2286000"/>
+            <a:ext cx="5257800" cy="2148840"/>
+          </a:xfrm>
+          <a:prstGeom prst="roundRect">
+            <a:avLst>
+              <a:gd name="adj" fmla="val 6000"/>
+            </a:avLst>
+          </a:prstGeom>
+          <a:solidFill>
+            <a:srgbClr val="FAF8F4"/>
+          </a:solidFill>
+          <a:ln w="12700">
+            <a:solidFill>
+              <a:srgbClr val="E4DED4"/>
+            </a:solidFill>
+          </a:ln>
+          <a:effectLst/>
+        </p:spPr>
+        <p:style>
+          <a:lnRef idx="1">
+            <a:schemeClr val="accent1"/>
+          </a:lnRef>
+          <a:fillRef idx="3">
+            <a:schemeClr val="accent1"/>
+          </a:fillRef>
+          <a:effectRef idx="2">
+            <a:schemeClr val="accent1"/>
+          </a:effectRef>
+          <a:fontRef idx="minor">
+            <a:schemeClr val="lt1"/>
+          </a:fontRef>
+        </p:style>
+        <p:txBody>
+          <a:bodyPr rtlCol="0" anchor="ctr"/>
+          <a:lstStyle/>
+          <a:p>
+            <a:pPr algn="ctr"/>
+          </a:p>
+        </p:txBody>
+      </p:sp>
+      <p:sp>
+        <p:nvSpPr>
+          <p:cNvPr id="7" name="TextBox 6"/>
+          <p:cNvSpPr txBox="1"/>
+          <p:nvPr/>
+        </p:nvSpPr>
+        <p:spPr>
+          <a:xfrm>
+            <a:off x="960120" y="2468880"/>
+            <a:ext cx="4663440" cy="320040"/>
           </a:xfrm>
           <a:prstGeom prst="rect">
             <a:avLst/>
@@ -6011,60 +5308,401 @@
                 </a:solidFill>
                 <a:latin typeface="맑은 고딕"/>
               </a:rPr>
-              <a:t>모르면 모른다고 합니다</a:t>
-            </a:r>
-          </a:p>
-        </p:txBody>
-      </p:sp>
-      <p:sp>
-        <p:nvSpPr>
-          <p:cNvPr id="6" name="TextBox 5"/>
-          <p:cNvSpPr txBox="1"/>
-          <p:nvPr/>
-        </p:nvSpPr>
-        <p:spPr>
-          <a:xfrm>
-            <a:off x="4480560" y="1847088"/>
-            <a:ext cx="6949440" cy="640080"/>
-          </a:xfrm>
-          <a:prstGeom prst="rect">
-            <a:avLst/>
-          </a:prstGeom>
-          <a:noFill/>
-        </p:spPr>
-        <p:txBody>
-          <a:bodyPr wrap="square" anchor="t" lIns="0" rIns="0" tIns="0" bIns="0">
-            <a:spAutoFit/>
-          </a:bodyPr>
-          <a:lstStyle/>
-          <a:p>
-            <a:pPr algn="l">
-              <a:lnSpc>
-                <a:spcPct val="130000"/>
+              <a:t>사전 계산 (개발 시 · GPU)</a:t>
+            </a:r>
+          </a:p>
+        </p:txBody>
+      </p:sp>
+      <p:sp>
+        <p:nvSpPr>
+          <p:cNvPr id="8" name="Oval 7"/>
+          <p:cNvSpPr/>
+          <p:nvPr/>
+        </p:nvSpPr>
+        <p:spPr>
+          <a:xfrm>
+            <a:off x="960120" y="2944368"/>
+            <a:ext cx="76200" cy="76200"/>
+          </a:xfrm>
+          <a:prstGeom prst="ellipse">
+            <a:avLst/>
+          </a:prstGeom>
+          <a:solidFill>
+            <a:srgbClr val="FFBC00"/>
+          </a:solidFill>
+          <a:ln>
+            <a:noFill/>
+          </a:ln>
+          <a:effectLst/>
+        </p:spPr>
+        <p:style>
+          <a:lnRef idx="1">
+            <a:schemeClr val="accent1"/>
+          </a:lnRef>
+          <a:fillRef idx="3">
+            <a:schemeClr val="accent1"/>
+          </a:fillRef>
+          <a:effectRef idx="2">
+            <a:schemeClr val="accent1"/>
+          </a:effectRef>
+          <a:fontRef idx="minor">
+            <a:schemeClr val="lt1"/>
+          </a:fontRef>
+        </p:style>
+        <p:txBody>
+          <a:bodyPr rtlCol="0" anchor="ctr"/>
+          <a:lstStyle/>
+          <a:p>
+            <a:pPr algn="ctr"/>
+          </a:p>
+        </p:txBody>
+      </p:sp>
+      <p:sp>
+        <p:nvSpPr>
+          <p:cNvPr id="9" name="TextBox 8"/>
+          <p:cNvSpPr txBox="1"/>
+          <p:nvPr/>
+        </p:nvSpPr>
+        <p:spPr>
+          <a:xfrm>
+            <a:off x="1161288" y="2880360"/>
+            <a:ext cx="4553712" cy="365760"/>
+          </a:xfrm>
+          <a:prstGeom prst="rect">
+            <a:avLst/>
+          </a:prstGeom>
+          <a:noFill/>
+        </p:spPr>
+        <p:txBody>
+          <a:bodyPr wrap="square" anchor="t" lIns="0" rIns="0" tIns="0" bIns="0">
+            <a:spAutoFit/>
+          </a:bodyPr>
+          <a:lstStyle/>
+          <a:p>
+            <a:pPr algn="l">
+              <a:lnSpc>
+                <a:spcPct val="125000"/>
               </a:lnSpc>
             </a:pPr>
             <a:r>
               <a:rPr sz="1150" b="0">
                 <a:solidFill>
-                  <a:srgbClr val="6B6259"/>
-                </a:solidFill>
-                <a:latin typeface="맑은 고딕"/>
-              </a:rPr>
-              <a:t>맞는 공고가 없으면 빈손으로 답합니다. 900건 중 무엇이든 상위 다섯 개는 뽑히지만, 관련 없는 목록은 사장님의 시간을 뺏습니다.</a:t>
-            </a:r>
-          </a:p>
-        </p:txBody>
-      </p:sp>
-      <p:sp>
-        <p:nvSpPr>
-          <p:cNvPr id="7" name="TextBox 6"/>
-          <p:cNvSpPr txBox="1"/>
-          <p:nvPr/>
-        </p:nvSpPr>
-        <p:spPr>
-          <a:xfrm>
-            <a:off x="685800" y="2697480"/>
-            <a:ext cx="3657600" cy="320040"/>
+                  <a:srgbClr val="38322A"/>
+                </a:solidFill>
+                <a:latin typeface="맑은 고딕"/>
+              </a:rPr>
+              <a:t>기업마당 900건 수집 → 구조화</a:t>
+            </a:r>
+          </a:p>
+        </p:txBody>
+      </p:sp>
+      <p:sp>
+        <p:nvSpPr>
+          <p:cNvPr id="10" name="Oval 9"/>
+          <p:cNvSpPr/>
+          <p:nvPr/>
+        </p:nvSpPr>
+        <p:spPr>
+          <a:xfrm>
+            <a:off x="960120" y="3273552"/>
+            <a:ext cx="76200" cy="76200"/>
+          </a:xfrm>
+          <a:prstGeom prst="ellipse">
+            <a:avLst/>
+          </a:prstGeom>
+          <a:solidFill>
+            <a:srgbClr val="FFBC00"/>
+          </a:solidFill>
+          <a:ln>
+            <a:noFill/>
+          </a:ln>
+          <a:effectLst/>
+        </p:spPr>
+        <p:style>
+          <a:lnRef idx="1">
+            <a:schemeClr val="accent1"/>
+          </a:lnRef>
+          <a:fillRef idx="3">
+            <a:schemeClr val="accent1"/>
+          </a:fillRef>
+          <a:effectRef idx="2">
+            <a:schemeClr val="accent1"/>
+          </a:effectRef>
+          <a:fontRef idx="minor">
+            <a:schemeClr val="lt1"/>
+          </a:fontRef>
+        </p:style>
+        <p:txBody>
+          <a:bodyPr rtlCol="0" anchor="ctr"/>
+          <a:lstStyle/>
+          <a:p>
+            <a:pPr algn="ctr"/>
+          </a:p>
+        </p:txBody>
+      </p:sp>
+      <p:sp>
+        <p:nvSpPr>
+          <p:cNvPr id="11" name="TextBox 10"/>
+          <p:cNvSpPr txBox="1"/>
+          <p:nvPr/>
+        </p:nvSpPr>
+        <p:spPr>
+          <a:xfrm>
+            <a:off x="1161288" y="3209544"/>
+            <a:ext cx="4553712" cy="365760"/>
+          </a:xfrm>
+          <a:prstGeom prst="rect">
+            <a:avLst/>
+          </a:prstGeom>
+          <a:noFill/>
+        </p:spPr>
+        <p:txBody>
+          <a:bodyPr wrap="square" anchor="t" lIns="0" rIns="0" tIns="0" bIns="0">
+            <a:spAutoFit/>
+          </a:bodyPr>
+          <a:lstStyle/>
+          <a:p>
+            <a:pPr algn="l">
+              <a:lnSpc>
+                <a:spcPct val="125000"/>
+              </a:lnSpc>
+            </a:pPr>
+            <a:r>
+              <a:rPr sz="1150" b="0">
+                <a:solidFill>
+                  <a:srgbClr val="38322A"/>
+                </a:solidFill>
+                <a:latin typeface="맑은 고딕"/>
+              </a:rPr>
+              <a:t>전국 점포 272만 개 → 행정동 집계</a:t>
+            </a:r>
+          </a:p>
+        </p:txBody>
+      </p:sp>
+      <p:sp>
+        <p:nvSpPr>
+          <p:cNvPr id="12" name="Oval 11"/>
+          <p:cNvSpPr/>
+          <p:nvPr/>
+        </p:nvSpPr>
+        <p:spPr>
+          <a:xfrm>
+            <a:off x="960120" y="3602736"/>
+            <a:ext cx="76200" cy="76200"/>
+          </a:xfrm>
+          <a:prstGeom prst="ellipse">
+            <a:avLst/>
+          </a:prstGeom>
+          <a:solidFill>
+            <a:srgbClr val="FFBC00"/>
+          </a:solidFill>
+          <a:ln>
+            <a:noFill/>
+          </a:ln>
+          <a:effectLst/>
+        </p:spPr>
+        <p:style>
+          <a:lnRef idx="1">
+            <a:schemeClr val="accent1"/>
+          </a:lnRef>
+          <a:fillRef idx="3">
+            <a:schemeClr val="accent1"/>
+          </a:fillRef>
+          <a:effectRef idx="2">
+            <a:schemeClr val="accent1"/>
+          </a:effectRef>
+          <a:fontRef idx="minor">
+            <a:schemeClr val="lt1"/>
+          </a:fontRef>
+        </p:style>
+        <p:txBody>
+          <a:bodyPr rtlCol="0" anchor="ctr"/>
+          <a:lstStyle/>
+          <a:p>
+            <a:pPr algn="ctr"/>
+          </a:p>
+        </p:txBody>
+      </p:sp>
+      <p:sp>
+        <p:nvSpPr>
+          <p:cNvPr id="13" name="TextBox 12"/>
+          <p:cNvSpPr txBox="1"/>
+          <p:nvPr/>
+        </p:nvSpPr>
+        <p:spPr>
+          <a:xfrm>
+            <a:off x="1161288" y="3538728"/>
+            <a:ext cx="4553712" cy="365760"/>
+          </a:xfrm>
+          <a:prstGeom prst="rect">
+            <a:avLst/>
+          </a:prstGeom>
+          <a:noFill/>
+        </p:spPr>
+        <p:txBody>
+          <a:bodyPr wrap="square" anchor="t" lIns="0" rIns="0" tIns="0" bIns="0">
+            <a:spAutoFit/>
+          </a:bodyPr>
+          <a:lstStyle/>
+          <a:p>
+            <a:pPr algn="l">
+              <a:lnSpc>
+                <a:spcPct val="125000"/>
+              </a:lnSpc>
+            </a:pPr>
+            <a:r>
+              <a:rPr sz="1150" b="0">
+                <a:solidFill>
+                  <a:srgbClr val="38322A"/>
+                </a:solidFill>
+                <a:latin typeface="맑은 고딕"/>
+              </a:rPr>
+              <a:t>임베딩 3,326개 → 평균 중심화</a:t>
+            </a:r>
+          </a:p>
+        </p:txBody>
+      </p:sp>
+      <p:sp>
+        <p:nvSpPr>
+          <p:cNvPr id="14" name="Oval 13"/>
+          <p:cNvSpPr/>
+          <p:nvPr/>
+        </p:nvSpPr>
+        <p:spPr>
+          <a:xfrm>
+            <a:off x="960120" y="3931920"/>
+            <a:ext cx="76200" cy="76200"/>
+          </a:xfrm>
+          <a:prstGeom prst="ellipse">
+            <a:avLst/>
+          </a:prstGeom>
+          <a:solidFill>
+            <a:srgbClr val="FFBC00"/>
+          </a:solidFill>
+          <a:ln>
+            <a:noFill/>
+          </a:ln>
+          <a:effectLst/>
+        </p:spPr>
+        <p:style>
+          <a:lnRef idx="1">
+            <a:schemeClr val="accent1"/>
+          </a:lnRef>
+          <a:fillRef idx="3">
+            <a:schemeClr val="accent1"/>
+          </a:fillRef>
+          <a:effectRef idx="2">
+            <a:schemeClr val="accent1"/>
+          </a:effectRef>
+          <a:fontRef idx="minor">
+            <a:schemeClr val="lt1"/>
+          </a:fontRef>
+        </p:style>
+        <p:txBody>
+          <a:bodyPr rtlCol="0" anchor="ctr"/>
+          <a:lstStyle/>
+          <a:p>
+            <a:pPr algn="ctr"/>
+          </a:p>
+        </p:txBody>
+      </p:sp>
+      <p:sp>
+        <p:nvSpPr>
+          <p:cNvPr id="15" name="TextBox 14"/>
+          <p:cNvSpPr txBox="1"/>
+          <p:nvPr/>
+        </p:nvSpPr>
+        <p:spPr>
+          <a:xfrm>
+            <a:off x="1161288" y="3867912"/>
+            <a:ext cx="4553712" cy="365760"/>
+          </a:xfrm>
+          <a:prstGeom prst="rect">
+            <a:avLst/>
+          </a:prstGeom>
+          <a:noFill/>
+        </p:spPr>
+        <p:txBody>
+          <a:bodyPr wrap="square" anchor="t" lIns="0" rIns="0" tIns="0" bIns="0">
+            <a:spAutoFit/>
+          </a:bodyPr>
+          <a:lstStyle/>
+          <a:p>
+            <a:pPr algn="l">
+              <a:lnSpc>
+                <a:spcPct val="125000"/>
+              </a:lnSpc>
+            </a:pPr>
+            <a:r>
+              <a:rPr sz="1150" b="0">
+                <a:solidFill>
+                  <a:srgbClr val="38322A"/>
+                </a:solidFill>
+                <a:latin typeface="맑은 고딕"/>
+              </a:rPr>
+              <a:t>결과: 색인 파일 23.8MB (저장소에 포함)</a:t>
+            </a:r>
+          </a:p>
+        </p:txBody>
+      </p:sp>
+      <p:sp>
+        <p:nvSpPr>
+          <p:cNvPr id="16" name="Rounded Rectangle 15"/>
+          <p:cNvSpPr/>
+          <p:nvPr/>
+        </p:nvSpPr>
+        <p:spPr>
+          <a:xfrm>
+            <a:off x="6217920" y="2286000"/>
+            <a:ext cx="5257800" cy="2148840"/>
+          </a:xfrm>
+          <a:prstGeom prst="roundRect">
+            <a:avLst>
+              <a:gd name="adj" fmla="val 6000"/>
+            </a:avLst>
+          </a:prstGeom>
+          <a:solidFill>
+            <a:srgbClr val="FAF8F4"/>
+          </a:solidFill>
+          <a:ln w="12700">
+            <a:solidFill>
+              <a:srgbClr val="E4DED4"/>
+            </a:solidFill>
+          </a:ln>
+          <a:effectLst/>
+        </p:spPr>
+        <p:style>
+          <a:lnRef idx="1">
+            <a:schemeClr val="accent1"/>
+          </a:lnRef>
+          <a:fillRef idx="3">
+            <a:schemeClr val="accent1"/>
+          </a:fillRef>
+          <a:effectRef idx="2">
+            <a:schemeClr val="accent1"/>
+          </a:effectRef>
+          <a:fontRef idx="minor">
+            <a:schemeClr val="lt1"/>
+          </a:fontRef>
+        </p:style>
+        <p:txBody>
+          <a:bodyPr rtlCol="0" anchor="ctr"/>
+          <a:lstStyle/>
+          <a:p>
+            <a:pPr algn="ctr"/>
+          </a:p>
+        </p:txBody>
+      </p:sp>
+      <p:sp>
+        <p:nvSpPr>
+          <p:cNvPr id="17" name="TextBox 16"/>
+          <p:cNvSpPr txBox="1"/>
+          <p:nvPr/>
+        </p:nvSpPr>
+        <p:spPr>
+          <a:xfrm>
+            <a:off x="6492240" y="2468880"/>
+            <a:ext cx="4663440" cy="320040"/>
           </a:xfrm>
           <a:prstGeom prst="rect">
             <a:avLst/>
@@ -6089,60 +5727,401 @@
                 </a:solidFill>
                 <a:latin typeface="맑은 고딕"/>
               </a:rPr>
-              <a:t>재지 못한 것을 같은 자리에 적습니다</a:t>
-            </a:r>
-          </a:p>
-        </p:txBody>
-      </p:sp>
-      <p:sp>
-        <p:nvSpPr>
-          <p:cNvPr id="8" name="TextBox 7"/>
-          <p:cNvSpPr txBox="1"/>
-          <p:nvPr/>
-        </p:nvSpPr>
-        <p:spPr>
-          <a:xfrm>
-            <a:off x="4480560" y="2715768"/>
-            <a:ext cx="6949440" cy="640080"/>
-          </a:xfrm>
-          <a:prstGeom prst="rect">
-            <a:avLst/>
-          </a:prstGeom>
-          <a:noFill/>
-        </p:spPr>
-        <p:txBody>
-          <a:bodyPr wrap="square" anchor="t" lIns="0" rIns="0" tIns="0" bIns="0">
-            <a:spAutoFit/>
-          </a:bodyPr>
-          <a:lstStyle/>
-          <a:p>
-            <a:pPr algn="l">
-              <a:lnSpc>
-                <a:spcPct val="130000"/>
+              <a:t>런타임 (배포 · CPU만)</a:t>
+            </a:r>
+          </a:p>
+        </p:txBody>
+      </p:sp>
+      <p:sp>
+        <p:nvSpPr>
+          <p:cNvPr id="18" name="Oval 17"/>
+          <p:cNvSpPr/>
+          <p:nvPr/>
+        </p:nvSpPr>
+        <p:spPr>
+          <a:xfrm>
+            <a:off x="6492240" y="2944368"/>
+            <a:ext cx="76200" cy="76200"/>
+          </a:xfrm>
+          <a:prstGeom prst="ellipse">
+            <a:avLst/>
+          </a:prstGeom>
+          <a:solidFill>
+            <a:srgbClr val="FFBC00"/>
+          </a:solidFill>
+          <a:ln>
+            <a:noFill/>
+          </a:ln>
+          <a:effectLst/>
+        </p:spPr>
+        <p:style>
+          <a:lnRef idx="1">
+            <a:schemeClr val="accent1"/>
+          </a:lnRef>
+          <a:fillRef idx="3">
+            <a:schemeClr val="accent1"/>
+          </a:fillRef>
+          <a:effectRef idx="2">
+            <a:schemeClr val="accent1"/>
+          </a:effectRef>
+          <a:fontRef idx="minor">
+            <a:schemeClr val="lt1"/>
+          </a:fontRef>
+        </p:style>
+        <p:txBody>
+          <a:bodyPr rtlCol="0" anchor="ctr"/>
+          <a:lstStyle/>
+          <a:p>
+            <a:pPr algn="ctr"/>
+          </a:p>
+        </p:txBody>
+      </p:sp>
+      <p:sp>
+        <p:nvSpPr>
+          <p:cNvPr id="19" name="TextBox 18"/>
+          <p:cNvSpPr txBox="1"/>
+          <p:nvPr/>
+        </p:nvSpPr>
+        <p:spPr>
+          <a:xfrm>
+            <a:off x="6693408" y="2880360"/>
+            <a:ext cx="4553712" cy="365760"/>
+          </a:xfrm>
+          <a:prstGeom prst="rect">
+            <a:avLst/>
+          </a:prstGeom>
+          <a:noFill/>
+        </p:spPr>
+        <p:txBody>
+          <a:bodyPr wrap="square" anchor="t" lIns="0" rIns="0" tIns="0" bIns="0">
+            <a:spAutoFit/>
+          </a:bodyPr>
+          <a:lstStyle/>
+          <a:p>
+            <a:pPr algn="l">
+              <a:lnSpc>
+                <a:spcPct val="125000"/>
               </a:lnSpc>
             </a:pPr>
             <a:r>
               <a:rPr sz="1150" b="0">
                 <a:solidFill>
-                  <a:srgbClr val="6B6259"/>
-                </a:solidFill>
-                <a:latin typeface="맑은 고딕"/>
-              </a:rPr>
-              <a:t>유동인구·매출·폐업률을 점수에 안 넣었다는 사실이 상권 카드 안에 있습니다. 다른 화면에서 찾아봐야 알면 감춘 것입니다.</a:t>
-            </a:r>
-          </a:p>
-        </p:txBody>
-      </p:sp>
-      <p:sp>
-        <p:nvSpPr>
-          <p:cNvPr id="9" name="TextBox 8"/>
-          <p:cNvSpPr txBox="1"/>
-          <p:nvPr/>
-        </p:nvSpPr>
-        <p:spPr>
-          <a:xfrm>
-            <a:off x="685800" y="3566160"/>
-            <a:ext cx="3657600" cy="320040"/>
+                  <a:srgbClr val="38322A"/>
+                </a:solidFill>
+                <a:latin typeface="맑은 고딕"/>
+              </a:rPr>
+              <a:t>질의 임베딩: int8 ONNX · 5ms · 키 불필요</a:t>
+            </a:r>
+          </a:p>
+        </p:txBody>
+      </p:sp>
+      <p:sp>
+        <p:nvSpPr>
+          <p:cNvPr id="20" name="Oval 19"/>
+          <p:cNvSpPr/>
+          <p:nvPr/>
+        </p:nvSpPr>
+        <p:spPr>
+          <a:xfrm>
+            <a:off x="6492240" y="3273552"/>
+            <a:ext cx="76200" cy="76200"/>
+          </a:xfrm>
+          <a:prstGeom prst="ellipse">
+            <a:avLst/>
+          </a:prstGeom>
+          <a:solidFill>
+            <a:srgbClr val="FFBC00"/>
+          </a:solidFill>
+          <a:ln>
+            <a:noFill/>
+          </a:ln>
+          <a:effectLst/>
+        </p:spPr>
+        <p:style>
+          <a:lnRef idx="1">
+            <a:schemeClr val="accent1"/>
+          </a:lnRef>
+          <a:fillRef idx="3">
+            <a:schemeClr val="accent1"/>
+          </a:fillRef>
+          <a:effectRef idx="2">
+            <a:schemeClr val="accent1"/>
+          </a:effectRef>
+          <a:fontRef idx="minor">
+            <a:schemeClr val="lt1"/>
+          </a:fontRef>
+        </p:style>
+        <p:txBody>
+          <a:bodyPr rtlCol="0" anchor="ctr"/>
+          <a:lstStyle/>
+          <a:p>
+            <a:pPr algn="ctr"/>
+          </a:p>
+        </p:txBody>
+      </p:sp>
+      <p:sp>
+        <p:nvSpPr>
+          <p:cNvPr id="21" name="TextBox 20"/>
+          <p:cNvSpPr txBox="1"/>
+          <p:nvPr/>
+        </p:nvSpPr>
+        <p:spPr>
+          <a:xfrm>
+            <a:off x="6693408" y="3209544"/>
+            <a:ext cx="4553712" cy="365760"/>
+          </a:xfrm>
+          <a:prstGeom prst="rect">
+            <a:avLst/>
+          </a:prstGeom>
+          <a:noFill/>
+        </p:spPr>
+        <p:txBody>
+          <a:bodyPr wrap="square" anchor="t" lIns="0" rIns="0" tIns="0" bIns="0">
+            <a:spAutoFit/>
+          </a:bodyPr>
+          <a:lstStyle/>
+          <a:p>
+            <a:pPr algn="l">
+              <a:lnSpc>
+                <a:spcPct val="125000"/>
+              </a:lnSpc>
+            </a:pPr>
+            <a:r>
+              <a:rPr sz="1150" b="0">
+                <a:solidFill>
+                  <a:srgbClr val="38322A"/>
+                </a:solidFill>
+                <a:latin typeface="맑은 고딕"/>
+              </a:rPr>
+              <a:t>검색: BM25 + 코사인 · 12~55ms</a:t>
+            </a:r>
+          </a:p>
+        </p:txBody>
+      </p:sp>
+      <p:sp>
+        <p:nvSpPr>
+          <p:cNvPr id="22" name="Oval 21"/>
+          <p:cNvSpPr/>
+          <p:nvPr/>
+        </p:nvSpPr>
+        <p:spPr>
+          <a:xfrm>
+            <a:off x="6492240" y="3602736"/>
+            <a:ext cx="76200" cy="76200"/>
+          </a:xfrm>
+          <a:prstGeom prst="ellipse">
+            <a:avLst/>
+          </a:prstGeom>
+          <a:solidFill>
+            <a:srgbClr val="FFBC00"/>
+          </a:solidFill>
+          <a:ln>
+            <a:noFill/>
+          </a:ln>
+          <a:effectLst/>
+        </p:spPr>
+        <p:style>
+          <a:lnRef idx="1">
+            <a:schemeClr val="accent1"/>
+          </a:lnRef>
+          <a:fillRef idx="3">
+            <a:schemeClr val="accent1"/>
+          </a:fillRef>
+          <a:effectRef idx="2">
+            <a:schemeClr val="accent1"/>
+          </a:effectRef>
+          <a:fontRef idx="minor">
+            <a:schemeClr val="lt1"/>
+          </a:fontRef>
+        </p:style>
+        <p:txBody>
+          <a:bodyPr rtlCol="0" anchor="ctr"/>
+          <a:lstStyle/>
+          <a:p>
+            <a:pPr algn="ctr"/>
+          </a:p>
+        </p:txBody>
+      </p:sp>
+      <p:sp>
+        <p:nvSpPr>
+          <p:cNvPr id="23" name="TextBox 22"/>
+          <p:cNvSpPr txBox="1"/>
+          <p:nvPr/>
+        </p:nvSpPr>
+        <p:spPr>
+          <a:xfrm>
+            <a:off x="6693408" y="3538728"/>
+            <a:ext cx="4553712" cy="365760"/>
+          </a:xfrm>
+          <a:prstGeom prst="rect">
+            <a:avLst/>
+          </a:prstGeom>
+          <a:noFill/>
+        </p:spPr>
+        <p:txBody>
+          <a:bodyPr wrap="square" anchor="t" lIns="0" rIns="0" tIns="0" bIns="0">
+            <a:spAutoFit/>
+          </a:bodyPr>
+          <a:lstStyle/>
+          <a:p>
+            <a:pPr algn="l">
+              <a:lnSpc>
+                <a:spcPct val="125000"/>
+              </a:lnSpc>
+            </a:pPr>
+            <a:r>
+              <a:rPr sz="1150" b="0">
+                <a:solidFill>
+                  <a:srgbClr val="38322A"/>
+                </a:solidFill>
+                <a:latin typeface="맑은 고딕"/>
+              </a:rPr>
+              <a:t>LLM: Gemini (선택) · 없으면 규칙+템플릿</a:t>
+            </a:r>
+          </a:p>
+        </p:txBody>
+      </p:sp>
+      <p:sp>
+        <p:nvSpPr>
+          <p:cNvPr id="24" name="Oval 23"/>
+          <p:cNvSpPr/>
+          <p:nvPr/>
+        </p:nvSpPr>
+        <p:spPr>
+          <a:xfrm>
+            <a:off x="6492240" y="3931920"/>
+            <a:ext cx="76200" cy="76200"/>
+          </a:xfrm>
+          <a:prstGeom prst="ellipse">
+            <a:avLst/>
+          </a:prstGeom>
+          <a:solidFill>
+            <a:srgbClr val="FFBC00"/>
+          </a:solidFill>
+          <a:ln>
+            <a:noFill/>
+          </a:ln>
+          <a:effectLst/>
+        </p:spPr>
+        <p:style>
+          <a:lnRef idx="1">
+            <a:schemeClr val="accent1"/>
+          </a:lnRef>
+          <a:fillRef idx="3">
+            <a:schemeClr val="accent1"/>
+          </a:fillRef>
+          <a:effectRef idx="2">
+            <a:schemeClr val="accent1"/>
+          </a:effectRef>
+          <a:fontRef idx="minor">
+            <a:schemeClr val="lt1"/>
+          </a:fontRef>
+        </p:style>
+        <p:txBody>
+          <a:bodyPr rtlCol="0" anchor="ctr"/>
+          <a:lstStyle/>
+          <a:p>
+            <a:pPr algn="ctr"/>
+          </a:p>
+        </p:txBody>
+      </p:sp>
+      <p:sp>
+        <p:nvSpPr>
+          <p:cNvPr id="25" name="TextBox 24"/>
+          <p:cNvSpPr txBox="1"/>
+          <p:nvPr/>
+        </p:nvSpPr>
+        <p:spPr>
+          <a:xfrm>
+            <a:off x="6693408" y="3867912"/>
+            <a:ext cx="4553712" cy="365760"/>
+          </a:xfrm>
+          <a:prstGeom prst="rect">
+            <a:avLst/>
+          </a:prstGeom>
+          <a:noFill/>
+        </p:spPr>
+        <p:txBody>
+          <a:bodyPr wrap="square" anchor="t" lIns="0" rIns="0" tIns="0" bIns="0">
+            <a:spAutoFit/>
+          </a:bodyPr>
+          <a:lstStyle/>
+          <a:p>
+            <a:pPr algn="l">
+              <a:lnSpc>
+                <a:spcPct val="125000"/>
+              </a:lnSpc>
+            </a:pPr>
+            <a:r>
+              <a:rPr sz="1150" b="0">
+                <a:solidFill>
+                  <a:srgbClr val="38322A"/>
+                </a:solidFill>
+                <a:latin typeface="맑은 고딕"/>
+              </a:rPr>
+              <a:t>메모리: 354MB (무료 등급 512MB 안)</a:t>
+            </a:r>
+          </a:p>
+        </p:txBody>
+      </p:sp>
+      <p:sp>
+        <p:nvSpPr>
+          <p:cNvPr id="26" name="Rounded Rectangle 25"/>
+          <p:cNvSpPr/>
+          <p:nvPr/>
+        </p:nvSpPr>
+        <p:spPr>
+          <a:xfrm>
+            <a:off x="685800" y="4663440"/>
+            <a:ext cx="10789920" cy="1600200"/>
+          </a:xfrm>
+          <a:prstGeom prst="roundRect">
+            <a:avLst>
+              <a:gd name="adj" fmla="val 6000"/>
+            </a:avLst>
+          </a:prstGeom>
+          <a:solidFill>
+            <a:srgbClr val="FFF9E8"/>
+          </a:solidFill>
+          <a:ln w="12700">
+            <a:solidFill>
+              <a:srgbClr val="FFBC00"/>
+            </a:solidFill>
+          </a:ln>
+          <a:effectLst/>
+        </p:spPr>
+        <p:style>
+          <a:lnRef idx="1">
+            <a:schemeClr val="accent1"/>
+          </a:lnRef>
+          <a:fillRef idx="3">
+            <a:schemeClr val="accent1"/>
+          </a:fillRef>
+          <a:effectRef idx="2">
+            <a:schemeClr val="accent1"/>
+          </a:effectRef>
+          <a:fontRef idx="minor">
+            <a:schemeClr val="lt1"/>
+          </a:fontRef>
+        </p:style>
+        <p:txBody>
+          <a:bodyPr rtlCol="0" anchor="ctr"/>
+          <a:lstStyle/>
+          <a:p>
+            <a:pPr algn="ctr"/>
+          </a:p>
+        </p:txBody>
+      </p:sp>
+      <p:sp>
+        <p:nvSpPr>
+          <p:cNvPr id="27" name="TextBox 26"/>
+          <p:cNvSpPr txBox="1"/>
+          <p:nvPr/>
+        </p:nvSpPr>
+        <p:spPr>
+          <a:xfrm>
+            <a:off x="960120" y="4846320"/>
+            <a:ext cx="10241280" cy="320040"/>
           </a:xfrm>
           <a:prstGeom prst="rect">
             <a:avLst/>
@@ -6167,202 +6146,62 @@
                 </a:solidFill>
                 <a:latin typeface="맑은 고딕"/>
               </a:rPr>
-              <a:t>숫자마다 원문 링크가 붙습니다</a:t>
-            </a:r>
-          </a:p>
-        </p:txBody>
-      </p:sp>
-      <p:sp>
-        <p:nvSpPr>
-          <p:cNvPr id="10" name="TextBox 9"/>
-          <p:cNvSpPr txBox="1"/>
-          <p:nvPr/>
-        </p:nvSpPr>
-        <p:spPr>
-          <a:xfrm>
-            <a:off x="4480560" y="3584448"/>
-            <a:ext cx="6949440" cy="640080"/>
-          </a:xfrm>
-          <a:prstGeom prst="rect">
-            <a:avLst/>
-          </a:prstGeom>
-          <a:noFill/>
-        </p:spPr>
-        <p:txBody>
-          <a:bodyPr wrap="square" anchor="t" lIns="0" rIns="0" tIns="0" bIns="0">
-            <a:spAutoFit/>
-          </a:bodyPr>
-          <a:lstStyle/>
-          <a:p>
-            <a:pPr algn="l">
-              <a:lnSpc>
-                <a:spcPct val="130000"/>
+              <a:t>512MB에 넣기 위해 실제로 잰 것</a:t>
+            </a:r>
+          </a:p>
+        </p:txBody>
+      </p:sp>
+      <p:sp>
+        <p:nvSpPr>
+          <p:cNvPr id="28" name="TextBox 27"/>
+          <p:cNvSpPr txBox="1"/>
+          <p:nvPr/>
+        </p:nvSpPr>
+        <p:spPr>
+          <a:xfrm>
+            <a:off x="960120" y="5230368"/>
+            <a:ext cx="10241280" cy="914400"/>
+          </a:xfrm>
+          <a:prstGeom prst="rect">
+            <a:avLst/>
+          </a:prstGeom>
+          <a:noFill/>
+        </p:spPr>
+        <p:txBody>
+          <a:bodyPr wrap="square" anchor="t" lIns="0" rIns="0" tIns="0" bIns="0">
+            <a:spAutoFit/>
+          </a:bodyPr>
+          <a:lstStyle/>
+          <a:p>
+            <a:pPr algn="l">
+              <a:lnSpc>
+                <a:spcPct val="135000"/>
               </a:lnSpc>
             </a:pPr>
             <a:r>
               <a:rPr sz="1150" b="0">
                 <a:solidFill>
-                  <a:srgbClr val="6B6259"/>
-                </a:solidFill>
-                <a:latin typeface="맑은 고딕"/>
-              </a:rPr>
-              <a:t>추천한 공고마다 기업마당 원문 주소가 함께 나갑니다. 우리가 요약한 것을 직접 대조하실 수 있어야 합니다.</a:t>
-            </a:r>
-          </a:p>
-        </p:txBody>
-      </p:sp>
-      <p:sp>
-        <p:nvSpPr>
-          <p:cNvPr id="11" name="TextBox 10"/>
-          <p:cNvSpPr txBox="1"/>
-          <p:nvPr/>
-        </p:nvSpPr>
-        <p:spPr>
-          <a:xfrm>
-            <a:off x="685800" y="4434840"/>
-            <a:ext cx="3657600" cy="320040"/>
-          </a:xfrm>
-          <a:prstGeom prst="rect">
-            <a:avLst/>
-          </a:prstGeom>
-          <a:noFill/>
-        </p:spPr>
-        <p:txBody>
-          <a:bodyPr wrap="square" anchor="t" lIns="0" rIns="0" tIns="0" bIns="0">
-            <a:spAutoFit/>
-          </a:bodyPr>
-          <a:lstStyle/>
-          <a:p>
-            <a:pPr algn="l">
-              <a:lnSpc>
-                <a:spcPct val="125000"/>
-              </a:lnSpc>
-            </a:pPr>
-            <a:r>
-              <a:rPr sz="1400" b="1">
-                <a:solidFill>
-                  <a:srgbClr val="38322A"/>
-                </a:solidFill>
-                <a:latin typeface="맑은 고딕"/>
-              </a:rPr>
-              <a:t>금액은 근거가 있을 때만 씁니다</a:t>
-            </a:r>
-          </a:p>
-        </p:txBody>
-      </p:sp>
-      <p:sp>
-        <p:nvSpPr>
-          <p:cNvPr id="12" name="TextBox 11"/>
-          <p:cNvSpPr txBox="1"/>
-          <p:nvPr/>
-        </p:nvSpPr>
-        <p:spPr>
-          <a:xfrm>
-            <a:off x="4480560" y="4453128"/>
-            <a:ext cx="6949440" cy="640080"/>
-          </a:xfrm>
-          <a:prstGeom prst="rect">
-            <a:avLst/>
-          </a:prstGeom>
-          <a:noFill/>
-        </p:spPr>
-        <p:txBody>
-          <a:bodyPr wrap="square" anchor="t" lIns="0" rIns="0" tIns="0" bIns="0">
-            <a:spAutoFit/>
-          </a:bodyPr>
-          <a:lstStyle/>
-          <a:p>
-            <a:pPr algn="l">
-              <a:lnSpc>
-                <a:spcPct val="130000"/>
+                  <a:srgbClr val="544438"/>
+                </a:solidFill>
+                <a:latin typeface="맑은 고딕"/>
+              </a:rPr>
+              <a:t>배포 전에 메모리를 재 보니 611MB였습니다. 안 재고 올렸으면 그 자리에서 죽었습니다. 범인은 뜻밖에도 토크나이저였습니다 — 17MB짜리 tokenizer.json을 올리는 데 280MB를 씁니다.</a:t>
+            </a:r>
+          </a:p>
+          <a:p>
+            <a:pPr algn="l">
+              <a:lnSpc>
+                <a:spcPct val="135000"/>
               </a:lnSpc>
             </a:pPr>
             <a:r>
               <a:rPr sz="1150" b="0">
                 <a:solidFill>
-                  <a:srgbClr val="6B6259"/>
-                </a:solidFill>
-                <a:latin typeface="맑은 고딕"/>
-              </a:rPr>
-              <a:t>본문에서 찾은 가장 큰 금액을 한도로 적어 '총사업비 4,000억원'이 한도로 둔갑했습니다. '한도·최대·이내'가 곁에 있을 때만 읽고, 무엇으로 읽었는지 남깁니다.</a:t>
-            </a:r>
-          </a:p>
-        </p:txBody>
-      </p:sp>
-      <p:sp>
-        <p:nvSpPr>
-          <p:cNvPr id="13" name="TextBox 12"/>
-          <p:cNvSpPr txBox="1"/>
-          <p:nvPr/>
-        </p:nvSpPr>
-        <p:spPr>
-          <a:xfrm>
-            <a:off x="685800" y="5303520"/>
-            <a:ext cx="3657600" cy="320040"/>
-          </a:xfrm>
-          <a:prstGeom prst="rect">
-            <a:avLst/>
-          </a:prstGeom>
-          <a:noFill/>
-        </p:spPr>
-        <p:txBody>
-          <a:bodyPr wrap="square" anchor="t" lIns="0" rIns="0" tIns="0" bIns="0">
-            <a:spAutoFit/>
-          </a:bodyPr>
-          <a:lstStyle/>
-          <a:p>
-            <a:pPr algn="l">
-              <a:lnSpc>
-                <a:spcPct val="125000"/>
-              </a:lnSpc>
-            </a:pPr>
-            <a:r>
-              <a:rPr sz="1400" b="1">
-                <a:solidFill>
-                  <a:srgbClr val="38322A"/>
-                </a:solidFill>
-                <a:latin typeface="맑은 고딕"/>
-              </a:rPr>
-              <a:t>LLM이 사실을 만들 수 없는 구조입니다</a:t>
-            </a:r>
-          </a:p>
-        </p:txBody>
-      </p:sp>
-      <p:sp>
-        <p:nvSpPr>
-          <p:cNvPr id="14" name="TextBox 13"/>
-          <p:cNvSpPr txBox="1"/>
-          <p:nvPr/>
-        </p:nvSpPr>
-        <p:spPr>
-          <a:xfrm>
-            <a:off x="4480560" y="5321808"/>
-            <a:ext cx="6949440" cy="640080"/>
-          </a:xfrm>
-          <a:prstGeom prst="rect">
-            <a:avLst/>
-          </a:prstGeom>
-          <a:noFill/>
-        </p:spPr>
-        <p:txBody>
-          <a:bodyPr wrap="square" anchor="t" lIns="0" rIns="0" tIns="0" bIns="0">
-            <a:spAutoFit/>
-          </a:bodyPr>
-          <a:lstStyle/>
-          <a:p>
-            <a:pPr algn="l">
-              <a:lnSpc>
-                <a:spcPct val="130000"/>
-              </a:lnSpc>
-            </a:pPr>
-            <a:r>
-              <a:rPr sz="1150" b="0">
-                <a:solidFill>
-                  <a:srgbClr val="6B6259"/>
-                </a:solidFill>
-                <a:latin typeface="맑은 고딕"/>
-              </a:rPr>
-              <a:t>LLM은 갈래를 고르고 문장을 엮을 뿐, 공고와 숫자는 색인에서 나옵니다. 그 문장도 가드레일을 반드시 거칩니다.</a:t>
+                  <a:srgbClr val="544438"/>
+                </a:solidFill>
+                <a:latin typeface="맑은 고딕"/>
+              </a:rPr>
+              <a:t>sentencepiece 원본(5MB)으로 바꾸면 70MB입니다. 다만 토큰 번호가 어긋나면 검색이 조용히 망가지므로, 두 방식의 출력을 대조해 **비트 단위로 같음**을 확인하고 바꿨습니다. ONNX 메모리 아레나도 껐습니다(200MB→9MB). 결과 611MB → 354MB.</a:t>
             </a:r>
           </a:p>
         </p:txBody>
@@ -6376,6 +6215,536 @@
 </file>
 
 <file path=ppt/slides/slide14.xml><?xml version="1.0" encoding="utf-8"?>
+<p:sld xmlns:a="http://schemas.openxmlformats.org/drawingml/2006/main" xmlns:p="http://schemas.openxmlformats.org/presentationml/2006/main" xmlns:r="http://schemas.openxmlformats.org/officeDocument/2006/relationships">
+  <p:cSld>
+    <p:spTree>
+      <p:nvGrpSpPr>
+        <p:cNvPr id="1" name=""/>
+        <p:cNvGrpSpPr/>
+        <p:nvPr/>
+      </p:nvGrpSpPr>
+      <p:grpSpPr/>
+      <p:sp>
+        <p:nvSpPr>
+          <p:cNvPr id="2" name="TextBox 1"/>
+          <p:cNvSpPr txBox="1"/>
+          <p:nvPr/>
+        </p:nvSpPr>
+        <p:spPr>
+          <a:xfrm>
+            <a:off x="685800" y="457200"/>
+            <a:ext cx="10058400" cy="274320"/>
+          </a:xfrm>
+          <a:prstGeom prst="rect">
+            <a:avLst/>
+          </a:prstGeom>
+          <a:noFill/>
+        </p:spPr>
+        <p:txBody>
+          <a:bodyPr wrap="square" anchor="t" lIns="0" rIns="0" tIns="0" bIns="0">
+            <a:spAutoFit/>
+          </a:bodyPr>
+          <a:lstStyle/>
+          <a:p>
+            <a:pPr algn="l">
+              <a:lnSpc>
+                <a:spcPct val="125000"/>
+              </a:lnSpc>
+            </a:pPr>
+            <a:r>
+              <a:rPr sz="1200" b="1">
+                <a:solidFill>
+                  <a:srgbClr val="FFBC00"/>
+                </a:solidFill>
+                <a:latin typeface="맑은 고딕"/>
+              </a:rPr>
+              <a:t>WHY US</a:t>
+            </a:r>
+          </a:p>
+        </p:txBody>
+      </p:sp>
+      <p:sp>
+        <p:nvSpPr>
+          <p:cNvPr id="3" name="TextBox 2"/>
+          <p:cNvSpPr txBox="1"/>
+          <p:nvPr/>
+        </p:nvSpPr>
+        <p:spPr>
+          <a:xfrm>
+            <a:off x="685800" y="749808"/>
+            <a:ext cx="10789920" cy="548640"/>
+          </a:xfrm>
+          <a:prstGeom prst="rect">
+            <a:avLst/>
+          </a:prstGeom>
+          <a:noFill/>
+        </p:spPr>
+        <p:txBody>
+          <a:bodyPr wrap="square" anchor="t" lIns="0" rIns="0" tIns="0" bIns="0">
+            <a:spAutoFit/>
+          </a:bodyPr>
+          <a:lstStyle/>
+          <a:p>
+            <a:pPr algn="l">
+              <a:lnSpc>
+                <a:spcPct val="125000"/>
+              </a:lnSpc>
+            </a:pPr>
+            <a:r>
+              <a:rPr sz="2700" b="1">
+                <a:solidFill>
+                  <a:srgbClr val="38322A"/>
+                </a:solidFill>
+                <a:latin typeface="맑은 고딕"/>
+              </a:rPr>
+              <a:t>정직을 설계에 넣었습니다</a:t>
+            </a:r>
+          </a:p>
+        </p:txBody>
+      </p:sp>
+      <p:sp>
+        <p:nvSpPr>
+          <p:cNvPr id="4" name="Rectangle 3"/>
+          <p:cNvSpPr/>
+          <p:nvPr/>
+        </p:nvSpPr>
+        <p:spPr>
+          <a:xfrm>
+            <a:off x="685800" y="1417320"/>
+            <a:ext cx="10789920" cy="19050"/>
+          </a:xfrm>
+          <a:prstGeom prst="rect">
+            <a:avLst/>
+          </a:prstGeom>
+          <a:solidFill>
+            <a:srgbClr val="E4DED4"/>
+          </a:solidFill>
+          <a:ln>
+            <a:noFill/>
+          </a:ln>
+          <a:effectLst/>
+        </p:spPr>
+        <p:style>
+          <a:lnRef idx="1">
+            <a:schemeClr val="accent1"/>
+          </a:lnRef>
+          <a:fillRef idx="3">
+            <a:schemeClr val="accent1"/>
+          </a:fillRef>
+          <a:effectRef idx="2">
+            <a:schemeClr val="accent1"/>
+          </a:effectRef>
+          <a:fontRef idx="minor">
+            <a:schemeClr val="lt1"/>
+          </a:fontRef>
+        </p:style>
+        <p:txBody>
+          <a:bodyPr rtlCol="0" anchor="ctr"/>
+          <a:lstStyle/>
+          <a:p>
+            <a:pPr algn="ctr"/>
+          </a:p>
+        </p:txBody>
+      </p:sp>
+      <p:sp>
+        <p:nvSpPr>
+          <p:cNvPr id="5" name="TextBox 4"/>
+          <p:cNvSpPr txBox="1"/>
+          <p:nvPr/>
+        </p:nvSpPr>
+        <p:spPr>
+          <a:xfrm>
+            <a:off x="685800" y="1828800"/>
+            <a:ext cx="3657600" cy="320040"/>
+          </a:xfrm>
+          <a:prstGeom prst="rect">
+            <a:avLst/>
+          </a:prstGeom>
+          <a:noFill/>
+        </p:spPr>
+        <p:txBody>
+          <a:bodyPr wrap="square" anchor="t" lIns="0" rIns="0" tIns="0" bIns="0">
+            <a:spAutoFit/>
+          </a:bodyPr>
+          <a:lstStyle/>
+          <a:p>
+            <a:pPr algn="l">
+              <a:lnSpc>
+                <a:spcPct val="125000"/>
+              </a:lnSpc>
+            </a:pPr>
+            <a:r>
+              <a:rPr sz="1400" b="1">
+                <a:solidFill>
+                  <a:srgbClr val="38322A"/>
+                </a:solidFill>
+                <a:latin typeface="맑은 고딕"/>
+              </a:rPr>
+              <a:t>모르면 모른다고 합니다</a:t>
+            </a:r>
+          </a:p>
+        </p:txBody>
+      </p:sp>
+      <p:sp>
+        <p:nvSpPr>
+          <p:cNvPr id="6" name="TextBox 5"/>
+          <p:cNvSpPr txBox="1"/>
+          <p:nvPr/>
+        </p:nvSpPr>
+        <p:spPr>
+          <a:xfrm>
+            <a:off x="4480560" y="1847088"/>
+            <a:ext cx="6949440" cy="640080"/>
+          </a:xfrm>
+          <a:prstGeom prst="rect">
+            <a:avLst/>
+          </a:prstGeom>
+          <a:noFill/>
+        </p:spPr>
+        <p:txBody>
+          <a:bodyPr wrap="square" anchor="t" lIns="0" rIns="0" tIns="0" bIns="0">
+            <a:spAutoFit/>
+          </a:bodyPr>
+          <a:lstStyle/>
+          <a:p>
+            <a:pPr algn="l">
+              <a:lnSpc>
+                <a:spcPct val="130000"/>
+              </a:lnSpc>
+            </a:pPr>
+            <a:r>
+              <a:rPr sz="1150" b="0">
+                <a:solidFill>
+                  <a:srgbClr val="6B6259"/>
+                </a:solidFill>
+                <a:latin typeface="맑은 고딕"/>
+              </a:rPr>
+              <a:t>맞는 공고가 없으면 빈손으로 답합니다. 900건 중 무엇이든 상위 다섯 개는 뽑히지만, 관련 없는 목록은 사장님의 시간을 뺏습니다.</a:t>
+            </a:r>
+          </a:p>
+        </p:txBody>
+      </p:sp>
+      <p:sp>
+        <p:nvSpPr>
+          <p:cNvPr id="7" name="TextBox 6"/>
+          <p:cNvSpPr txBox="1"/>
+          <p:nvPr/>
+        </p:nvSpPr>
+        <p:spPr>
+          <a:xfrm>
+            <a:off x="685800" y="2697480"/>
+            <a:ext cx="3657600" cy="320040"/>
+          </a:xfrm>
+          <a:prstGeom prst="rect">
+            <a:avLst/>
+          </a:prstGeom>
+          <a:noFill/>
+        </p:spPr>
+        <p:txBody>
+          <a:bodyPr wrap="square" anchor="t" lIns="0" rIns="0" tIns="0" bIns="0">
+            <a:spAutoFit/>
+          </a:bodyPr>
+          <a:lstStyle/>
+          <a:p>
+            <a:pPr algn="l">
+              <a:lnSpc>
+                <a:spcPct val="125000"/>
+              </a:lnSpc>
+            </a:pPr>
+            <a:r>
+              <a:rPr sz="1400" b="1">
+                <a:solidFill>
+                  <a:srgbClr val="38322A"/>
+                </a:solidFill>
+                <a:latin typeface="맑은 고딕"/>
+              </a:rPr>
+              <a:t>재지 못한 것을 같은 자리에 적습니다</a:t>
+            </a:r>
+          </a:p>
+        </p:txBody>
+      </p:sp>
+      <p:sp>
+        <p:nvSpPr>
+          <p:cNvPr id="8" name="TextBox 7"/>
+          <p:cNvSpPr txBox="1"/>
+          <p:nvPr/>
+        </p:nvSpPr>
+        <p:spPr>
+          <a:xfrm>
+            <a:off x="4480560" y="2715768"/>
+            <a:ext cx="6949440" cy="640080"/>
+          </a:xfrm>
+          <a:prstGeom prst="rect">
+            <a:avLst/>
+          </a:prstGeom>
+          <a:noFill/>
+        </p:spPr>
+        <p:txBody>
+          <a:bodyPr wrap="square" anchor="t" lIns="0" rIns="0" tIns="0" bIns="0">
+            <a:spAutoFit/>
+          </a:bodyPr>
+          <a:lstStyle/>
+          <a:p>
+            <a:pPr algn="l">
+              <a:lnSpc>
+                <a:spcPct val="130000"/>
+              </a:lnSpc>
+            </a:pPr>
+            <a:r>
+              <a:rPr sz="1150" b="0">
+                <a:solidFill>
+                  <a:srgbClr val="6B6259"/>
+                </a:solidFill>
+                <a:latin typeface="맑은 고딕"/>
+              </a:rPr>
+              <a:t>유동인구·매출·폐업률을 점수에 안 넣었다는 사실이 상권 카드 안에 있습니다. 다른 화면에서 찾아봐야 알면 감춘 것입니다.</a:t>
+            </a:r>
+          </a:p>
+        </p:txBody>
+      </p:sp>
+      <p:sp>
+        <p:nvSpPr>
+          <p:cNvPr id="9" name="TextBox 8"/>
+          <p:cNvSpPr txBox="1"/>
+          <p:nvPr/>
+        </p:nvSpPr>
+        <p:spPr>
+          <a:xfrm>
+            <a:off x="685800" y="3566160"/>
+            <a:ext cx="3657600" cy="320040"/>
+          </a:xfrm>
+          <a:prstGeom prst="rect">
+            <a:avLst/>
+          </a:prstGeom>
+          <a:noFill/>
+        </p:spPr>
+        <p:txBody>
+          <a:bodyPr wrap="square" anchor="t" lIns="0" rIns="0" tIns="0" bIns="0">
+            <a:spAutoFit/>
+          </a:bodyPr>
+          <a:lstStyle/>
+          <a:p>
+            <a:pPr algn="l">
+              <a:lnSpc>
+                <a:spcPct val="125000"/>
+              </a:lnSpc>
+            </a:pPr>
+            <a:r>
+              <a:rPr sz="1400" b="1">
+                <a:solidFill>
+                  <a:srgbClr val="38322A"/>
+                </a:solidFill>
+                <a:latin typeface="맑은 고딕"/>
+              </a:rPr>
+              <a:t>숫자마다 원문 링크가 붙습니다</a:t>
+            </a:r>
+          </a:p>
+        </p:txBody>
+      </p:sp>
+      <p:sp>
+        <p:nvSpPr>
+          <p:cNvPr id="10" name="TextBox 9"/>
+          <p:cNvSpPr txBox="1"/>
+          <p:nvPr/>
+        </p:nvSpPr>
+        <p:spPr>
+          <a:xfrm>
+            <a:off x="4480560" y="3584448"/>
+            <a:ext cx="6949440" cy="640080"/>
+          </a:xfrm>
+          <a:prstGeom prst="rect">
+            <a:avLst/>
+          </a:prstGeom>
+          <a:noFill/>
+        </p:spPr>
+        <p:txBody>
+          <a:bodyPr wrap="square" anchor="t" lIns="0" rIns="0" tIns="0" bIns="0">
+            <a:spAutoFit/>
+          </a:bodyPr>
+          <a:lstStyle/>
+          <a:p>
+            <a:pPr algn="l">
+              <a:lnSpc>
+                <a:spcPct val="130000"/>
+              </a:lnSpc>
+            </a:pPr>
+            <a:r>
+              <a:rPr sz="1150" b="0">
+                <a:solidFill>
+                  <a:srgbClr val="6B6259"/>
+                </a:solidFill>
+                <a:latin typeface="맑은 고딕"/>
+              </a:rPr>
+              <a:t>추천한 공고마다 기업마당 원문 주소가 함께 나갑니다. 우리가 요약한 것을 직접 대조하실 수 있어야 합니다.</a:t>
+            </a:r>
+          </a:p>
+        </p:txBody>
+      </p:sp>
+      <p:sp>
+        <p:nvSpPr>
+          <p:cNvPr id="11" name="TextBox 10"/>
+          <p:cNvSpPr txBox="1"/>
+          <p:nvPr/>
+        </p:nvSpPr>
+        <p:spPr>
+          <a:xfrm>
+            <a:off x="685800" y="4434840"/>
+            <a:ext cx="3657600" cy="320040"/>
+          </a:xfrm>
+          <a:prstGeom prst="rect">
+            <a:avLst/>
+          </a:prstGeom>
+          <a:noFill/>
+        </p:spPr>
+        <p:txBody>
+          <a:bodyPr wrap="square" anchor="t" lIns="0" rIns="0" tIns="0" bIns="0">
+            <a:spAutoFit/>
+          </a:bodyPr>
+          <a:lstStyle/>
+          <a:p>
+            <a:pPr algn="l">
+              <a:lnSpc>
+                <a:spcPct val="125000"/>
+              </a:lnSpc>
+            </a:pPr>
+            <a:r>
+              <a:rPr sz="1400" b="1">
+                <a:solidFill>
+                  <a:srgbClr val="38322A"/>
+                </a:solidFill>
+                <a:latin typeface="맑은 고딕"/>
+              </a:rPr>
+              <a:t>금액은 근거가 있을 때만 씁니다</a:t>
+            </a:r>
+          </a:p>
+        </p:txBody>
+      </p:sp>
+      <p:sp>
+        <p:nvSpPr>
+          <p:cNvPr id="12" name="TextBox 11"/>
+          <p:cNvSpPr txBox="1"/>
+          <p:nvPr/>
+        </p:nvSpPr>
+        <p:spPr>
+          <a:xfrm>
+            <a:off x="4480560" y="4453128"/>
+            <a:ext cx="6949440" cy="640080"/>
+          </a:xfrm>
+          <a:prstGeom prst="rect">
+            <a:avLst/>
+          </a:prstGeom>
+          <a:noFill/>
+        </p:spPr>
+        <p:txBody>
+          <a:bodyPr wrap="square" anchor="t" lIns="0" rIns="0" tIns="0" bIns="0">
+            <a:spAutoFit/>
+          </a:bodyPr>
+          <a:lstStyle/>
+          <a:p>
+            <a:pPr algn="l">
+              <a:lnSpc>
+                <a:spcPct val="130000"/>
+              </a:lnSpc>
+            </a:pPr>
+            <a:r>
+              <a:rPr sz="1150" b="0">
+                <a:solidFill>
+                  <a:srgbClr val="6B6259"/>
+                </a:solidFill>
+                <a:latin typeface="맑은 고딕"/>
+              </a:rPr>
+              <a:t>본문에서 찾은 가장 큰 금액을 한도로 적어 '총사업비 4,000억원'이 한도로 둔갑했습니다. '한도·최대·이내'가 곁에 있을 때만 읽고, 무엇으로 읽었는지 남깁니다.</a:t>
+            </a:r>
+          </a:p>
+        </p:txBody>
+      </p:sp>
+      <p:sp>
+        <p:nvSpPr>
+          <p:cNvPr id="13" name="TextBox 12"/>
+          <p:cNvSpPr txBox="1"/>
+          <p:nvPr/>
+        </p:nvSpPr>
+        <p:spPr>
+          <a:xfrm>
+            <a:off x="685800" y="5303520"/>
+            <a:ext cx="3657600" cy="320040"/>
+          </a:xfrm>
+          <a:prstGeom prst="rect">
+            <a:avLst/>
+          </a:prstGeom>
+          <a:noFill/>
+        </p:spPr>
+        <p:txBody>
+          <a:bodyPr wrap="square" anchor="t" lIns="0" rIns="0" tIns="0" bIns="0">
+            <a:spAutoFit/>
+          </a:bodyPr>
+          <a:lstStyle/>
+          <a:p>
+            <a:pPr algn="l">
+              <a:lnSpc>
+                <a:spcPct val="125000"/>
+              </a:lnSpc>
+            </a:pPr>
+            <a:r>
+              <a:rPr sz="1400" b="1">
+                <a:solidFill>
+                  <a:srgbClr val="38322A"/>
+                </a:solidFill>
+                <a:latin typeface="맑은 고딕"/>
+              </a:rPr>
+              <a:t>LLM이 사실을 만들 수 없는 구조입니다</a:t>
+            </a:r>
+          </a:p>
+        </p:txBody>
+      </p:sp>
+      <p:sp>
+        <p:nvSpPr>
+          <p:cNvPr id="14" name="TextBox 13"/>
+          <p:cNvSpPr txBox="1"/>
+          <p:nvPr/>
+        </p:nvSpPr>
+        <p:spPr>
+          <a:xfrm>
+            <a:off x="4480560" y="5321808"/>
+            <a:ext cx="6949440" cy="640080"/>
+          </a:xfrm>
+          <a:prstGeom prst="rect">
+            <a:avLst/>
+          </a:prstGeom>
+          <a:noFill/>
+        </p:spPr>
+        <p:txBody>
+          <a:bodyPr wrap="square" anchor="t" lIns="0" rIns="0" tIns="0" bIns="0">
+            <a:spAutoFit/>
+          </a:bodyPr>
+          <a:lstStyle/>
+          <a:p>
+            <a:pPr algn="l">
+              <a:lnSpc>
+                <a:spcPct val="130000"/>
+              </a:lnSpc>
+            </a:pPr>
+            <a:r>
+              <a:rPr sz="1150" b="0">
+                <a:solidFill>
+                  <a:srgbClr val="6B6259"/>
+                </a:solidFill>
+                <a:latin typeface="맑은 고딕"/>
+              </a:rPr>
+              <a:t>LLM은 갈래를 고르고 문장을 엮을 뿐, 공고와 숫자는 색인에서 나옵니다. 그 문장도 가드레일을 반드시 거칩니다.</a:t>
+            </a:r>
+          </a:p>
+        </p:txBody>
+      </p:sp>
+    </p:spTree>
+  </p:cSld>
+  <p:clrMapOvr>
+    <a:masterClrMapping/>
+  </p:clrMapOvr>
+</p:sld>
+</file>
+
+<file path=ppt/slides/slide15.xml><?xml version="1.0" encoding="utf-8"?>
 <p:sld xmlns:a="http://schemas.openxmlformats.org/drawingml/2006/main" xmlns:p="http://schemas.openxmlformats.org/presentationml/2006/main" xmlns:r="http://schemas.openxmlformats.org/officeDocument/2006/relationships">
   <p:cSld>
     <p:spTree>
@@ -13185,7 +13554,7 @@
                 </a:solidFill>
                 <a:latin typeface="맑은 고딕"/>
               </a:rPr>
-              <a:t>데이터사이언스 · RPA · 생성 · 접근성 — 자유 기능 여섯</a:t>
+              <a:t>데이터사이언스 · RPA · 생성 · 접근성 — 자유 기능 아홉</a:t>
             </a:r>
           </a:p>
         </p:txBody>
@@ -13242,8 +13611,8 @@
         </p:nvSpPr>
         <p:spPr>
           <a:xfrm>
-            <a:off x="685800" y="1828800"/>
-            <a:ext cx="3401568" cy="2212848"/>
+            <a:off x="685800" y="1737360"/>
+            <a:ext cx="3401568" cy="1499616"/>
           </a:xfrm>
           <a:prstGeom prst="roundRect">
             <a:avLst>
@@ -13290,27 +13659,27 @@
         </p:nvSpPr>
         <p:spPr>
           <a:xfrm>
-            <a:off x="914400" y="1993392"/>
-            <a:ext cx="2971800" cy="365760"/>
-          </a:xfrm>
-          <a:prstGeom prst="rect">
-            <a:avLst/>
-          </a:prstGeom>
-          <a:noFill/>
-        </p:spPr>
-        <p:txBody>
-          <a:bodyPr wrap="square" anchor="t" lIns="0" rIns="0" tIns="0" bIns="0">
-            <a:spAutoFit/>
-          </a:bodyPr>
-          <a:lstStyle/>
-          <a:p>
-            <a:pPr algn="l">
-              <a:lnSpc>
-                <a:spcPct val="125000"/>
-              </a:lnSpc>
-            </a:pPr>
-            <a:r>
-              <a:rPr sz="1450" b="1">
+            <a:off x="886968" y="1828800"/>
+            <a:ext cx="3017520" cy="292608"/>
+          </a:xfrm>
+          <a:prstGeom prst="rect">
+            <a:avLst/>
+          </a:prstGeom>
+          <a:noFill/>
+        </p:spPr>
+        <p:txBody>
+          <a:bodyPr wrap="square" anchor="t" lIns="0" rIns="0" tIns="0" bIns="0">
+            <a:spAutoFit/>
+          </a:bodyPr>
+          <a:lstStyle/>
+          <a:p>
+            <a:pPr algn="l">
+              <a:lnSpc>
+                <a:spcPct val="125000"/>
+              </a:lnSpc>
+            </a:pPr>
+            <a:r>
+              <a:rPr sz="1250" b="1">
                 <a:solidFill>
                   <a:srgbClr val="38322A"/>
                 </a:solidFill>
@@ -13329,27 +13698,27 @@
         </p:nvSpPr>
         <p:spPr>
           <a:xfrm>
-            <a:off x="914400" y="2359152"/>
-            <a:ext cx="2971800" cy="320040"/>
-          </a:xfrm>
-          <a:prstGeom prst="rect">
-            <a:avLst/>
-          </a:prstGeom>
-          <a:noFill/>
-        </p:spPr>
-        <p:txBody>
-          <a:bodyPr wrap="square" anchor="t" lIns="0" rIns="0" tIns="0" bIns="0">
-            <a:spAutoFit/>
-          </a:bodyPr>
-          <a:lstStyle/>
-          <a:p>
-            <a:pPr algn="l">
-              <a:lnSpc>
-                <a:spcPct val="125000"/>
-              </a:lnSpc>
-            </a:pPr>
-            <a:r>
-              <a:rPr sz="1050" b="1">
+            <a:off x="886968" y="2121408"/>
+            <a:ext cx="3017520" cy="256032"/>
+          </a:xfrm>
+          <a:prstGeom prst="rect">
+            <a:avLst/>
+          </a:prstGeom>
+          <a:noFill/>
+        </p:spPr>
+        <p:txBody>
+          <a:bodyPr wrap="square" anchor="t" lIns="0" rIns="0" tIns="0" bIns="0">
+            <a:spAutoFit/>
+          </a:bodyPr>
+          <a:lstStyle/>
+          <a:p>
+            <a:pPr algn="l">
+              <a:lnSpc>
+                <a:spcPct val="125000"/>
+              </a:lnSpc>
+            </a:pPr>
+            <a:r>
+              <a:rPr sz="900" b="1">
                 <a:solidFill>
                   <a:srgbClr val="9A6B00"/>
                 </a:solidFill>
@@ -13368,27 +13737,27 @@
         </p:nvSpPr>
         <p:spPr>
           <a:xfrm>
-            <a:off x="914400" y="2697480"/>
-            <a:ext cx="3017520" cy="1280160"/>
-          </a:xfrm>
-          <a:prstGeom prst="rect">
-            <a:avLst/>
-          </a:prstGeom>
-          <a:noFill/>
-        </p:spPr>
-        <p:txBody>
-          <a:bodyPr wrap="square" anchor="t" lIns="0" rIns="0" tIns="0" bIns="0">
-            <a:spAutoFit/>
-          </a:bodyPr>
-          <a:lstStyle/>
-          <a:p>
-            <a:pPr algn="l">
-              <a:lnSpc>
-                <a:spcPct val="132000"/>
-              </a:lnSpc>
-            </a:pPr>
-            <a:r>
-              <a:rPr sz="1000" b="0">
+            <a:off x="886968" y="2395728"/>
+            <a:ext cx="3054096" cy="777240"/>
+          </a:xfrm>
+          <a:prstGeom prst="rect">
+            <a:avLst/>
+          </a:prstGeom>
+          <a:noFill/>
+        </p:spPr>
+        <p:txBody>
+          <a:bodyPr wrap="square" anchor="t" lIns="0" rIns="0" tIns="0" bIns="0">
+            <a:spAutoFit/>
+          </a:bodyPr>
+          <a:lstStyle/>
+          <a:p>
+            <a:pPr algn="l">
+              <a:lnSpc>
+                <a:spcPct val="122000"/>
+              </a:lnSpc>
+            </a:pPr>
+            <a:r>
+              <a:rPr sz="850" b="0">
                 <a:solidFill>
                   <a:srgbClr val="6B6259"/>
                 </a:solidFill>
@@ -13400,33 +13769,17 @@
           <a:p>
             <a:pPr algn="l">
               <a:lnSpc>
-                <a:spcPct val="132000"/>
-              </a:lnSpc>
-            </a:pPr>
-            <a:r>
-              <a:rPr sz="1000" b="0">
+                <a:spcPct val="122000"/>
+              </a:lnSpc>
+            </a:pPr>
+            <a:r>
+              <a:rPr sz="850" b="0">
                 <a:solidFill>
                   <a:srgbClr val="6B6259"/>
                 </a:solidFill>
                 <a:latin typeface="맑은 고딕"/>
               </a:rPr>
-              <a:t>우세 판정 + 요인 6개 승부표 + 생활인구 대조.</a:t>
-            </a:r>
-          </a:p>
-          <a:p>
-            <a:pPr algn="l">
-              <a:lnSpc>
-                <a:spcPct val="132000"/>
-              </a:lnSpc>
-            </a:pPr>
-            <a:r>
-              <a:rPr sz="1000" b="0">
-                <a:solidFill>
-                  <a:srgbClr val="6B6259"/>
-                </a:solidFill>
-                <a:latin typeface="맑은 고딕"/>
-              </a:rPr>
-              <a:t>후보 둘 사이의 고민을 화면 하나로.</a:t>
+              <a:t>우세 판정 + 요인 6개 승부표 + 생활인구.</a:t>
             </a:r>
           </a:p>
         </p:txBody>
@@ -13439,8 +13792,8 @@
         </p:nvSpPr>
         <p:spPr>
           <a:xfrm>
-            <a:off x="4361688" y="1828800"/>
-            <a:ext cx="3401568" cy="2212848"/>
+            <a:off x="4361688" y="1737360"/>
+            <a:ext cx="3401568" cy="1499616"/>
           </a:xfrm>
           <a:prstGeom prst="roundRect">
             <a:avLst>
@@ -13487,27 +13840,27 @@
         </p:nvSpPr>
         <p:spPr>
           <a:xfrm>
-            <a:off x="4590288" y="1993392"/>
-            <a:ext cx="2971800" cy="365760"/>
-          </a:xfrm>
-          <a:prstGeom prst="rect">
-            <a:avLst/>
-          </a:prstGeom>
-          <a:noFill/>
-        </p:spPr>
-        <p:txBody>
-          <a:bodyPr wrap="square" anchor="t" lIns="0" rIns="0" tIns="0" bIns="0">
-            <a:spAutoFit/>
-          </a:bodyPr>
-          <a:lstStyle/>
-          <a:p>
-            <a:pPr algn="l">
-              <a:lnSpc>
-                <a:spcPct val="125000"/>
-              </a:lnSpc>
-            </a:pPr>
-            <a:r>
-              <a:rPr sz="1450" b="1">
+            <a:off x="4562856" y="1828800"/>
+            <a:ext cx="3017520" cy="292608"/>
+          </a:xfrm>
+          <a:prstGeom prst="rect">
+            <a:avLst/>
+          </a:prstGeom>
+          <a:noFill/>
+        </p:spPr>
+        <p:txBody>
+          <a:bodyPr wrap="square" anchor="t" lIns="0" rIns="0" tIns="0" bIns="0">
+            <a:spAutoFit/>
+          </a:bodyPr>
+          <a:lstStyle/>
+          <a:p>
+            <a:pPr algn="l">
+              <a:lnSpc>
+                <a:spcPct val="125000"/>
+              </a:lnSpc>
+            </a:pPr>
+            <a:r>
+              <a:rPr sz="1250" b="1">
                 <a:solidFill>
                   <a:srgbClr val="38322A"/>
                 </a:solidFill>
@@ -13526,27 +13879,27 @@
         </p:nvSpPr>
         <p:spPr>
           <a:xfrm>
-            <a:off x="4590288" y="2359152"/>
-            <a:ext cx="2971800" cy="320040"/>
-          </a:xfrm>
-          <a:prstGeom prst="rect">
-            <a:avLst/>
-          </a:prstGeom>
-          <a:noFill/>
-        </p:spPr>
-        <p:txBody>
-          <a:bodyPr wrap="square" anchor="t" lIns="0" rIns="0" tIns="0" bIns="0">
-            <a:spAutoFit/>
-          </a:bodyPr>
-          <a:lstStyle/>
-          <a:p>
-            <a:pPr algn="l">
-              <a:lnSpc>
-                <a:spcPct val="125000"/>
-              </a:lnSpc>
-            </a:pPr>
-            <a:r>
-              <a:rPr sz="1050" b="1">
+            <a:off x="4562856" y="2121408"/>
+            <a:ext cx="3017520" cy="256032"/>
+          </a:xfrm>
+          <a:prstGeom prst="rect">
+            <a:avLst/>
+          </a:prstGeom>
+          <a:noFill/>
+        </p:spPr>
+        <p:txBody>
+          <a:bodyPr wrap="square" anchor="t" lIns="0" rIns="0" tIns="0" bIns="0">
+            <a:spAutoFit/>
+          </a:bodyPr>
+          <a:lstStyle/>
+          <a:p>
+            <a:pPr algn="l">
+              <a:lnSpc>
+                <a:spcPct val="125000"/>
+              </a:lnSpc>
+            </a:pPr>
+            <a:r>
+              <a:rPr sz="900" b="1">
                 <a:solidFill>
                   <a:srgbClr val="9A6B00"/>
                 </a:solidFill>
@@ -13565,27 +13918,27 @@
         </p:nvSpPr>
         <p:spPr>
           <a:xfrm>
-            <a:off x="4590288" y="2697480"/>
-            <a:ext cx="3017520" cy="1280160"/>
-          </a:xfrm>
-          <a:prstGeom prst="rect">
-            <a:avLst/>
-          </a:prstGeom>
-          <a:noFill/>
-        </p:spPr>
-        <p:txBody>
-          <a:bodyPr wrap="square" anchor="t" lIns="0" rIns="0" tIns="0" bIns="0">
-            <a:spAutoFit/>
-          </a:bodyPr>
-          <a:lstStyle/>
-          <a:p>
-            <a:pPr algn="l">
-              <a:lnSpc>
-                <a:spcPct val="132000"/>
-              </a:lnSpc>
-            </a:pPr>
-            <a:r>
-              <a:rPr sz="1000" b="0">
+            <a:off x="4562856" y="2395728"/>
+            <a:ext cx="3054096" cy="777240"/>
+          </a:xfrm>
+          <a:prstGeom prst="rect">
+            <a:avLst/>
+          </a:prstGeom>
+          <a:noFill/>
+        </p:spPr>
+        <p:txBody>
+          <a:bodyPr wrap="square" anchor="t" lIns="0" rIns="0" tIns="0" bIns="0">
+            <a:spAutoFit/>
+          </a:bodyPr>
+          <a:lstStyle/>
+          <a:p>
+            <a:pPr algn="l">
+              <a:lnSpc>
+                <a:spcPct val="122000"/>
+              </a:lnSpc>
+            </a:pPr>
+            <a:r>
+              <a:rPr sz="850" b="0">
                 <a:solidFill>
                   <a:srgbClr val="6B6259"/>
                 </a:solidFill>
@@ -13597,33 +13950,17 @@
           <a:p>
             <a:pPr algn="l">
               <a:lnSpc>
-                <a:spcPct val="132000"/>
-              </a:lnSpc>
-            </a:pPr>
-            <a:r>
-              <a:rPr sz="1000" b="0">
+                <a:spcPct val="122000"/>
+              </a:lnSpc>
+            </a:pPr>
+            <a:r>
+              <a:rPr sz="850" b="0">
                 <a:solidFill>
                   <a:srgbClr val="6B6259"/>
                 </a:solidFill>
                 <a:latin typeface="맑은 고딕"/>
               </a:rPr>
-              <a:t>마감 연장·조기 마감·서식 교체 감지.</a:t>
-            </a:r>
-          </a:p>
-          <a:p>
-            <a:pPr algn="l">
-              <a:lnSpc>
-                <a:spcPct val="132000"/>
-              </a:lnSpc>
-            </a:pPr>
-            <a:r>
-              <a:rPr sz="1000" b="0">
-                <a:solidFill>
-                  <a:srgbClr val="6B6259"/>
-                </a:solidFill>
-                <a:latin typeface="맑은 고딕"/>
-              </a:rPr>
-              <a:t>신청서식 hwp 즉시 다운로드, 마감은 .ics로.</a:t>
+              <a:t>마감 변동 감지, 서식 hwp, 마감은 .ics로.</a:t>
             </a:r>
           </a:p>
         </p:txBody>
@@ -13636,8 +13973,8 @@
         </p:nvSpPr>
         <p:spPr>
           <a:xfrm>
-            <a:off x="8037575" y="1828800"/>
-            <a:ext cx="3401568" cy="2212848"/>
+            <a:off x="8037575" y="1737360"/>
+            <a:ext cx="3401568" cy="1499616"/>
           </a:xfrm>
           <a:prstGeom prst="roundRect">
             <a:avLst>
@@ -13684,27 +14021,27 @@
         </p:nvSpPr>
         <p:spPr>
           <a:xfrm>
-            <a:off x="8266175" y="1993392"/>
-            <a:ext cx="2971800" cy="365760"/>
-          </a:xfrm>
-          <a:prstGeom prst="rect">
-            <a:avLst/>
-          </a:prstGeom>
-          <a:noFill/>
-        </p:spPr>
-        <p:txBody>
-          <a:bodyPr wrap="square" anchor="t" lIns="0" rIns="0" tIns="0" bIns="0">
-            <a:spAutoFit/>
-          </a:bodyPr>
-          <a:lstStyle/>
-          <a:p>
-            <a:pPr algn="l">
-              <a:lnSpc>
-                <a:spcPct val="125000"/>
-              </a:lnSpc>
-            </a:pPr>
-            <a:r>
-              <a:rPr sz="1450" b="1">
+            <a:off x="8238743" y="1828800"/>
+            <a:ext cx="3017520" cy="292608"/>
+          </a:xfrm>
+          <a:prstGeom prst="rect">
+            <a:avLst/>
+          </a:prstGeom>
+          <a:noFill/>
+        </p:spPr>
+        <p:txBody>
+          <a:bodyPr wrap="square" anchor="t" lIns="0" rIns="0" tIns="0" bIns="0">
+            <a:spAutoFit/>
+          </a:bodyPr>
+          <a:lstStyle/>
+          <a:p>
+            <a:pPr algn="l">
+              <a:lnSpc>
+                <a:spcPct val="125000"/>
+              </a:lnSpc>
+            </a:pPr>
+            <a:r>
+              <a:rPr sz="1250" b="1">
                 <a:solidFill>
                   <a:srgbClr val="38322A"/>
                 </a:solidFill>
@@ -13723,27 +14060,27 @@
         </p:nvSpPr>
         <p:spPr>
           <a:xfrm>
-            <a:off x="8266175" y="2359152"/>
-            <a:ext cx="2971800" cy="320040"/>
-          </a:xfrm>
-          <a:prstGeom prst="rect">
-            <a:avLst/>
-          </a:prstGeom>
-          <a:noFill/>
-        </p:spPr>
-        <p:txBody>
-          <a:bodyPr wrap="square" anchor="t" lIns="0" rIns="0" tIns="0" bIns="0">
-            <a:spAutoFit/>
-          </a:bodyPr>
-          <a:lstStyle/>
-          <a:p>
-            <a:pPr algn="l">
-              <a:lnSpc>
-                <a:spcPct val="125000"/>
-              </a:lnSpc>
-            </a:pPr>
-            <a:r>
-              <a:rPr sz="1050" b="1">
+            <a:off x="8238743" y="2121408"/>
+            <a:ext cx="3017520" cy="256032"/>
+          </a:xfrm>
+          <a:prstGeom prst="rect">
+            <a:avLst/>
+          </a:prstGeom>
+          <a:noFill/>
+        </p:spPr>
+        <p:txBody>
+          <a:bodyPr wrap="square" anchor="t" lIns="0" rIns="0" tIns="0" bIns="0">
+            <a:spAutoFit/>
+          </a:bodyPr>
+          <a:lstStyle/>
+          <a:p>
+            <a:pPr algn="l">
+              <a:lnSpc>
+                <a:spcPct val="125000"/>
+              </a:lnSpc>
+            </a:pPr>
+            <a:r>
+              <a:rPr sz="900" b="1">
                 <a:solidFill>
                   <a:srgbClr val="9A6B00"/>
                 </a:solidFill>
@@ -13762,65 +14099,49 @@
         </p:nvSpPr>
         <p:spPr>
           <a:xfrm>
-            <a:off x="8266175" y="2697480"/>
-            <a:ext cx="3017520" cy="1280160"/>
-          </a:xfrm>
-          <a:prstGeom prst="rect">
-            <a:avLst/>
-          </a:prstGeom>
-          <a:noFill/>
-        </p:spPr>
-        <p:txBody>
-          <a:bodyPr wrap="square" anchor="t" lIns="0" rIns="0" tIns="0" bIns="0">
-            <a:spAutoFit/>
-          </a:bodyPr>
-          <a:lstStyle/>
-          <a:p>
-            <a:pPr algn="l">
-              <a:lnSpc>
-                <a:spcPct val="132000"/>
-              </a:lnSpc>
-            </a:pPr>
-            <a:r>
-              <a:rPr sz="1000" b="0">
+            <a:off x="8238743" y="2395728"/>
+            <a:ext cx="3054096" cy="777240"/>
+          </a:xfrm>
+          <a:prstGeom prst="rect">
+            <a:avLst/>
+          </a:prstGeom>
+          <a:noFill/>
+        </p:spPr>
+        <p:txBody>
+          <a:bodyPr wrap="square" anchor="t" lIns="0" rIns="0" tIns="0" bIns="0">
+            <a:spAutoFit/>
+          </a:bodyPr>
+          <a:lstStyle/>
+          <a:p>
+            <a:pPr algn="l">
+              <a:lnSpc>
+                <a:spcPct val="122000"/>
+              </a:lnSpc>
+            </a:pPr>
+            <a:r>
+              <a:rPr sz="850" b="0">
                 <a:solidFill>
                   <a:srgbClr val="6B6259"/>
                 </a:solidFill>
                 <a:latin typeface="맑은 고딕"/>
               </a:rPr>
-              <a:t>"수수료를 왜 떼요" 한 문장이 제출 가능한</a:t>
-            </a:r>
-          </a:p>
-          <a:p>
-            <a:pPr algn="l">
-              <a:lnSpc>
-                <a:spcPct val="132000"/>
-              </a:lnSpc>
-            </a:pPr>
-            <a:r>
-              <a:rPr sz="1000" b="0">
+              <a:t>한 문장이 제출 가능한 민원서 꼴로. 없는</a:t>
+            </a:r>
+          </a:p>
+          <a:p>
+            <a:pPr algn="l">
+              <a:lnSpc>
+                <a:spcPct val="122000"/>
+              </a:lnSpc>
+            </a:pPr>
+            <a:r>
+              <a:rPr sz="850" b="0">
                 <a:solidFill>
                   <a:srgbClr val="6B6259"/>
                 </a:solidFill>
                 <a:latin typeface="맑은 고딕"/>
               </a:rPr>
-              <a:t>민원서 꼴이 됩니다. 없는 날짜·금액은</a:t>
-            </a:r>
-          </a:p>
-          <a:p>
-            <a:pPr algn="l">
-              <a:lnSpc>
-                <a:spcPct val="132000"/>
-              </a:lnSpc>
-            </a:pPr>
-            <a:r>
-              <a:rPr sz="1000" b="0">
-                <a:solidFill>
-                  <a:srgbClr val="6B6259"/>
-                </a:solidFill>
-                <a:latin typeface="맑은 고딕"/>
-              </a:rPr>
-              <a:t>[빈칸] 강제 — §를 지어낼 수 없는 구조.</a:t>
+              <a:t>날짜·금액은 [빈칸] 강제 — §를 못 지어냄.</a:t>
             </a:r>
           </a:p>
         </p:txBody>
@@ -13833,8 +14154,8 @@
         </p:nvSpPr>
         <p:spPr>
           <a:xfrm>
-            <a:off x="685800" y="4224528"/>
-            <a:ext cx="3401568" cy="2212848"/>
+            <a:off x="685800" y="3364991"/>
+            <a:ext cx="3401568" cy="1499616"/>
           </a:xfrm>
           <a:prstGeom prst="roundRect">
             <a:avLst>
@@ -13881,33 +14202,33 @@
         </p:nvSpPr>
         <p:spPr>
           <a:xfrm>
-            <a:off x="914400" y="4389120"/>
-            <a:ext cx="2971800" cy="365760"/>
-          </a:xfrm>
-          <a:prstGeom prst="rect">
-            <a:avLst/>
-          </a:prstGeom>
-          <a:noFill/>
-        </p:spPr>
-        <p:txBody>
-          <a:bodyPr wrap="square" anchor="t" lIns="0" rIns="0" tIns="0" bIns="0">
-            <a:spAutoFit/>
-          </a:bodyPr>
-          <a:lstStyle/>
-          <a:p>
-            <a:pPr algn="l">
-              <a:lnSpc>
-                <a:spcPct val="125000"/>
-              </a:lnSpc>
-            </a:pPr>
-            <a:r>
-              <a:rPr sz="1450" b="1">
+            <a:off x="886968" y="3456431"/>
+            <a:ext cx="3017520" cy="292608"/>
+          </a:xfrm>
+          <a:prstGeom prst="rect">
+            <a:avLst/>
+          </a:prstGeom>
+          <a:noFill/>
+        </p:spPr>
+        <p:txBody>
+          <a:bodyPr wrap="square" anchor="t" lIns="0" rIns="0" tIns="0" bIns="0">
+            <a:spAutoFit/>
+          </a:bodyPr>
+          <a:lstStyle/>
+          <a:p>
+            <a:pPr algn="l">
+              <a:lnSpc>
+                <a:spcPct val="125000"/>
+              </a:lnSpc>
+            </a:pPr>
+            <a:r>
+              <a:rPr sz="1250" b="1">
                 <a:solidFill>
                   <a:srgbClr val="38322A"/>
                 </a:solidFill>
                 <a:latin typeface="맑은 고딕"/>
               </a:rPr>
-              <a:t>닮은 상권 찾기</a:t>
+              <a:t>계약서 신호등</a:t>
             </a:r>
           </a:p>
         </p:txBody>
@@ -13920,33 +14241,33 @@
         </p:nvSpPr>
         <p:spPr>
           <a:xfrm>
-            <a:off x="914400" y="4754880"/>
-            <a:ext cx="2971800" cy="320040"/>
-          </a:xfrm>
-          <a:prstGeom prst="rect">
-            <a:avLst/>
-          </a:prstGeom>
-          <a:noFill/>
-        </p:spPr>
-        <p:txBody>
-          <a:bodyPr wrap="square" anchor="t" lIns="0" rIns="0" tIns="0" bIns="0">
-            <a:spAutoFit/>
-          </a:bodyPr>
-          <a:lstStyle/>
-          <a:p>
-            <a:pPr algn="l">
-              <a:lnSpc>
-                <a:spcPct val="125000"/>
-              </a:lnSpc>
-            </a:pPr>
-            <a:r>
-              <a:rPr sz="1050" b="1">
+            <a:off x="886968" y="3749039"/>
+            <a:ext cx="3017520" cy="256032"/>
+          </a:xfrm>
+          <a:prstGeom prst="rect">
+            <a:avLst/>
+          </a:prstGeom>
+          <a:noFill/>
+        </p:spPr>
+        <p:txBody>
+          <a:bodyPr wrap="square" anchor="t" lIns="0" rIns="0" tIns="0" bIns="0">
+            <a:spAutoFit/>
+          </a:bodyPr>
+          <a:lstStyle/>
+          <a:p>
+            <a:pPr algn="l">
+              <a:lnSpc>
+                <a:spcPct val="125000"/>
+              </a:lnSpc>
+            </a:pPr>
+            <a:r>
+              <a:rPr sz="900" b="1">
                 <a:solidFill>
                   <a:srgbClr val="9A6B00"/>
                 </a:solidFill>
                 <a:latin typeface="맑은 고딕"/>
               </a:rPr>
-              <a:t>업종 구성 247차원 코사인</a:t>
+              <a:t>지는 계약은 서명 전에 결정된다</a:t>
             </a:r>
           </a:p>
         </p:txBody>
@@ -13959,65 +14280,49 @@
         </p:nvSpPr>
         <p:spPr>
           <a:xfrm>
-            <a:off x="914400" y="5093208"/>
-            <a:ext cx="3017520" cy="1280160"/>
-          </a:xfrm>
-          <a:prstGeom prst="rect">
-            <a:avLst/>
-          </a:prstGeom>
-          <a:noFill/>
-        </p:spPr>
-        <p:txBody>
-          <a:bodyPr wrap="square" anchor="t" lIns="0" rIns="0" tIns="0" bIns="0">
-            <a:spAutoFit/>
-          </a:bodyPr>
-          <a:lstStyle/>
-          <a:p>
-            <a:pPr algn="l">
-              <a:lnSpc>
-                <a:spcPct val="132000"/>
-              </a:lnSpc>
-            </a:pPr>
-            <a:r>
-              <a:rPr sz="1000" b="0">
+            <a:off x="886968" y="4023359"/>
+            <a:ext cx="3054096" cy="777240"/>
+          </a:xfrm>
+          <a:prstGeom prst="rect">
+            <a:avLst/>
+          </a:prstGeom>
+          <a:noFill/>
+        </p:spPr>
+        <p:txBody>
+          <a:bodyPr wrap="square" anchor="t" lIns="0" rIns="0" tIns="0" bIns="0">
+            <a:spAutoFit/>
+          </a:bodyPr>
+          <a:lstStyle/>
+          <a:p>
+            <a:pPr algn="l">
+              <a:lnSpc>
+                <a:spcPct val="122000"/>
+              </a:lnSpc>
+            </a:pPr>
+            <a:r>
+              <a:rPr sz="850" b="0">
                 <a:solidFill>
                   <a:srgbClr val="6B6259"/>
                 </a:solidFill>
                 <a:latin typeface="맑은 고딕"/>
               </a:rPr>
-              <a:t>연남동 ↔ 광안리·서교동·망원동.</a:t>
-            </a:r>
-          </a:p>
-          <a:p>
-            <a:pPr algn="l">
-              <a:lnSpc>
-                <a:spcPct val="132000"/>
-              </a:lnSpc>
-            </a:pPr>
-            <a:r>
-              <a:rPr sz="1000" b="0">
+              <a:t>독소조항 10유형을 빨간 펜으로 짚고</a:t>
+            </a:r>
+          </a:p>
+          <a:p>
+            <a:pPr algn="l">
+              <a:lnSpc>
+                <a:spcPct val="122000"/>
+              </a:lnSpc>
+            </a:pPr>
+            <a:r>
+              <a:rPr sz="850" b="0">
                 <a:solidFill>
                   <a:srgbClr val="6B6259"/>
                 </a:solidFill>
                 <a:latin typeface="맑은 고딕"/>
               </a:rPr>
-              <a:t>붙어 있는 동네가 아니라 '성격이 닮은' 동네 —</a:t>
-            </a:r>
-          </a:p>
-          <a:p>
-            <a:pPr algn="l">
-              <a:lnSpc>
-                <a:spcPct val="132000"/>
-              </a:lnSpc>
-            </a:pPr>
-            <a:r>
-              <a:rPr sz="1000" b="0">
-                <a:solidFill>
-                  <a:srgbClr val="6B6259"/>
-                </a:solidFill>
-                <a:latin typeface="맑은 고딕"/>
-              </a:rPr>
-              <a:t>2호점 후보의 출발점. 질의 0.4ms.</a:t>
+              <a:t>조문+서명 전 팁. 실제 문구에만 반응.</a:t>
             </a:r>
           </a:p>
         </p:txBody>
@@ -14030,8 +14335,8 @@
         </p:nvSpPr>
         <p:spPr>
           <a:xfrm>
-            <a:off x="4361688" y="4224528"/>
-            <a:ext cx="3401568" cy="2212848"/>
+            <a:off x="4361688" y="3364991"/>
+            <a:ext cx="3401568" cy="1499616"/>
           </a:xfrm>
           <a:prstGeom prst="roundRect">
             <a:avLst>
@@ -14078,33 +14383,33 @@
         </p:nvSpPr>
         <p:spPr>
           <a:xfrm>
-            <a:off x="4590288" y="4389120"/>
-            <a:ext cx="2971800" cy="365760"/>
-          </a:xfrm>
-          <a:prstGeom prst="rect">
-            <a:avLst/>
-          </a:prstGeom>
-          <a:noFill/>
-        </p:spPr>
-        <p:txBody>
-          <a:bodyPr wrap="square" anchor="t" lIns="0" rIns="0" tIns="0" bIns="0">
-            <a:spAutoFit/>
-          </a:bodyPr>
-          <a:lstStyle/>
-          <a:p>
-            <a:pPr algn="l">
-              <a:lnSpc>
-                <a:spcPct val="125000"/>
-              </a:lnSpc>
-            </a:pPr>
-            <a:r>
-              <a:rPr sz="1450" b="1">
+            <a:off x="4562856" y="3456431"/>
+            <a:ext cx="3017520" cy="292608"/>
+          </a:xfrm>
+          <a:prstGeom prst="rect">
+            <a:avLst/>
+          </a:prstGeom>
+          <a:noFill/>
+        </p:spPr>
+        <p:txBody>
+          <a:bodyPr wrap="square" anchor="t" lIns="0" rIns="0" tIns="0" bIns="0">
+            <a:spAutoFit/>
+          </a:bodyPr>
+          <a:lstStyle/>
+          <a:p>
+            <a:pPr algn="l">
+              <a:lnSpc>
+                <a:spcPct val="125000"/>
+              </a:lnSpc>
+            </a:pPr>
+            <a:r>
+              <a:rPr sz="1250" b="1">
                 <a:solidFill>
                   <a:srgbClr val="38322A"/>
                 </a:solidFill>
                 <a:latin typeface="맑은 고딕"/>
               </a:rPr>
-              <a:t>음성 대화 + 지도 투어</a:t>
+              <a:t>골든타임 계산기</a:t>
             </a:r>
           </a:p>
         </p:txBody>
@@ -14117,33 +14422,33 @@
         </p:nvSpPr>
         <p:spPr>
           <a:xfrm>
-            <a:off x="4590288" y="4754880"/>
-            <a:ext cx="2971800" cy="320040"/>
-          </a:xfrm>
-          <a:prstGeom prst="rect">
-            <a:avLst/>
-          </a:prstGeom>
-          <a:noFill/>
-        </p:spPr>
-        <p:txBody>
-          <a:bodyPr wrap="square" anchor="t" lIns="0" rIns="0" tIns="0" bIns="0">
-            <a:spAutoFit/>
-          </a:bodyPr>
-          <a:lstStyle/>
-          <a:p>
-            <a:pPr algn="l">
-              <a:lnSpc>
-                <a:spcPct val="125000"/>
-              </a:lnSpc>
-            </a:pPr>
-            <a:r>
-              <a:rPr sz="1050" b="1">
+            <a:off x="4562856" y="3749039"/>
+            <a:ext cx="3017520" cy="256032"/>
+          </a:xfrm>
+          <a:prstGeom prst="rect">
+            <a:avLst/>
+          </a:prstGeom>
+          <a:noFill/>
+        </p:spPr>
+        <p:txBody>
+          <a:bodyPr wrap="square" anchor="t" lIns="0" rIns="0" tIns="0" bIns="0">
+            <a:spAutoFit/>
+          </a:bodyPr>
+          <a:lstStyle/>
+          <a:p>
+            <a:pPr algn="l">
+              <a:lnSpc>
+                <a:spcPct val="125000"/>
+              </a:lnSpc>
+            </a:pPr>
+            <a:r>
+              <a:rPr sz="900" b="1">
                 <a:solidFill>
                   <a:srgbClr val="9A6B00"/>
                 </a:solidFill>
                 <a:latin typeface="맑은 고딕"/>
               </a:rPr>
-              <a:t>브라우저 내장 · 다운로드 0</a:t>
+              <a:t>지는 이유는 내용이 아니라 시기</a:t>
             </a:r>
           </a:p>
         </p:txBody>
@@ -14156,65 +14461,49 @@
         </p:nvSpPr>
         <p:spPr>
           <a:xfrm>
-            <a:off x="4590288" y="5093208"/>
-            <a:ext cx="3017520" cy="1280160"/>
-          </a:xfrm>
-          <a:prstGeom prst="rect">
-            <a:avLst/>
-          </a:prstGeom>
-          <a:noFill/>
-        </p:spPr>
-        <p:txBody>
-          <a:bodyPr wrap="square" anchor="t" lIns="0" rIns="0" tIns="0" bIns="0">
-            <a:spAutoFit/>
-          </a:bodyPr>
-          <a:lstStyle/>
-          <a:p>
-            <a:pPr algn="l">
-              <a:lnSpc>
-                <a:spcPct val="132000"/>
-              </a:lnSpc>
-            </a:pPr>
-            <a:r>
-              <a:rPr sz="1000" b="0">
+            <a:off x="4562856" y="4023359"/>
+            <a:ext cx="3054096" cy="777240"/>
+          </a:xfrm>
+          <a:prstGeom prst="rect">
+            <a:avLst/>
+          </a:prstGeom>
+          <a:noFill/>
+        </p:spPr>
+        <p:txBody>
+          <a:bodyPr wrap="square" anchor="t" lIns="0" rIns="0" tIns="0" bIns="0">
+            <a:spAutoFit/>
+          </a:bodyPr>
+          <a:lstStyle/>
+          <a:p>
+            <a:pPr algn="l">
+              <a:lnSpc>
+                <a:spcPct val="122000"/>
+              </a:lnSpc>
+            </a:pPr>
+            <a:r>
+              <a:rPr sz="850" b="0">
                 <a:solidFill>
                   <a:srgbClr val="6B6259"/>
                 </a:solidFill>
                 <a:latin typeface="맑은 고딕"/>
               </a:rPr>
-              <a:t>말로 묻고 꿀비가 읽어 줍니다. 지도는 전국에서</a:t>
-            </a:r>
-          </a:p>
-          <a:p>
-            <a:pPr algn="l">
-              <a:lnSpc>
-                <a:spcPct val="132000"/>
-              </a:lnSpc>
-            </a:pPr>
-            <a:r>
-              <a:rPr sz="1000" b="0">
+              <a:t>청약철회 14일·해지 1년/5년·갱신요구 마감을</a:t>
+            </a:r>
+          </a:p>
+          <a:p>
+            <a:pPr algn="l">
+              <a:lnSpc>
+                <a:spcPct val="122000"/>
+              </a:lnSpc>
+            </a:pPr>
+            <a:r>
+              <a:rPr sz="850" b="0">
                 <a:solidFill>
                   <a:srgbClr val="6B6259"/>
                 </a:solidFill>
                 <a:latin typeface="맑은 고딕"/>
               </a:rPr>
-              <a:t>그 동네로 날아들어 4막 투어(점포→열지도→비교).</a:t>
-            </a:r>
-          </a:p>
-          <a:p>
-            <a:pPr algn="l">
-              <a:lnSpc>
-                <a:spcPct val="132000"/>
-              </a:lnSpc>
-            </a:pPr>
-            <a:r>
-              <a:rPr sz="1000" b="0">
-                <a:solidFill>
-                  <a:srgbClr val="6B6259"/>
-                </a:solidFill>
-                <a:latin typeface="맑은 고딕"/>
-              </a:rPr>
-              <a:t>금융 접근성 — 이 대회가 상을 준 각도.</a:t>
+              <a:t>D-day로. 폰 캘린더(.ics)에 알림까지.</a:t>
             </a:r>
           </a:p>
         </p:txBody>
@@ -14227,8 +14516,8 @@
         </p:nvSpPr>
         <p:spPr>
           <a:xfrm>
-            <a:off x="8037575" y="4224528"/>
-            <a:ext cx="3401568" cy="2212848"/>
+            <a:off x="8037575" y="3364991"/>
+            <a:ext cx="3401568" cy="1499616"/>
           </a:xfrm>
           <a:prstGeom prst="roundRect">
             <a:avLst>
@@ -14275,32 +14564,575 @@
         </p:nvSpPr>
         <p:spPr>
           <a:xfrm>
-            <a:off x="8266175" y="4389120"/>
-            <a:ext cx="2971800" cy="365760"/>
-          </a:xfrm>
-          <a:prstGeom prst="rect">
-            <a:avLst/>
-          </a:prstGeom>
-          <a:noFill/>
-        </p:spPr>
-        <p:txBody>
-          <a:bodyPr wrap="square" anchor="t" lIns="0" rIns="0" tIns="0" bIns="0">
-            <a:spAutoFit/>
-          </a:bodyPr>
-          <a:lstStyle/>
-          <a:p>
-            <a:pPr algn="l">
-              <a:lnSpc>
-                <a:spcPct val="125000"/>
-              </a:lnSpc>
-            </a:pPr>
-            <a:r>
-              <a:rPr sz="1450" b="1">
+            <a:off x="8238743" y="3456431"/>
+            <a:ext cx="3017520" cy="292608"/>
+          </a:xfrm>
+          <a:prstGeom prst="rect">
+            <a:avLst/>
+          </a:prstGeom>
+          <a:noFill/>
+        </p:spPr>
+        <p:txBody>
+          <a:bodyPr wrap="square" anchor="t" lIns="0" rIns="0" tIns="0" bIns="0">
+            <a:spAutoFit/>
+          </a:bodyPr>
+          <a:lstStyle/>
+          <a:p>
+            <a:pPr algn="l">
+              <a:lnSpc>
+                <a:spcPct val="125000"/>
+              </a:lnSpc>
+            </a:pPr>
+            <a:r>
+              <a:rPr sz="1250" b="1">
                 <a:solidFill>
                   <a:srgbClr val="38322A"/>
                 </a:solidFill>
                 <a:latin typeface="맑은 고딕"/>
               </a:rPr>
+              <a:t>글라스박스 콘솔</a:t>
+            </a:r>
+          </a:p>
+        </p:txBody>
+      </p:sp>
+      <p:sp>
+        <p:nvSpPr>
+          <p:cNvPr id="27" name="TextBox 26"/>
+          <p:cNvSpPr txBox="1"/>
+          <p:nvPr/>
+        </p:nvSpPr>
+        <p:spPr>
+          <a:xfrm>
+            <a:off x="8238743" y="3749039"/>
+            <a:ext cx="3017520" cy="256032"/>
+          </a:xfrm>
+          <a:prstGeom prst="rect">
+            <a:avLst/>
+          </a:prstGeom>
+          <a:noFill/>
+        </p:spPr>
+        <p:txBody>
+          <a:bodyPr wrap="square" anchor="t" lIns="0" rIns="0" tIns="0" bIns="0">
+            <a:spAutoFit/>
+          </a:bodyPr>
+          <a:lstStyle/>
+          <a:p>
+            <a:pPr algn="l">
+              <a:lnSpc>
+                <a:spcPct val="125000"/>
+              </a:lnSpc>
+            </a:pPr>
+            <a:r>
+              <a:rPr sz="900" b="1">
+                <a:solidFill>
+                  <a:srgbClr val="9A6B00"/>
+                </a:solidFill>
+                <a:latin typeface="맑은 고딕"/>
+              </a:rPr>
+              <a:t>AI가 한 일을 실측 로그로 재생</a:t>
+            </a:r>
+          </a:p>
+        </p:txBody>
+      </p:sp>
+      <p:sp>
+        <p:nvSpPr>
+          <p:cNvPr id="28" name="TextBox 27"/>
+          <p:cNvSpPr txBox="1"/>
+          <p:nvPr/>
+        </p:nvSpPr>
+        <p:spPr>
+          <a:xfrm>
+            <a:off x="8238743" y="4023359"/>
+            <a:ext cx="3054096" cy="777240"/>
+          </a:xfrm>
+          <a:prstGeom prst="rect">
+            <a:avLst/>
+          </a:prstGeom>
+          <a:noFill/>
+        </p:spPr>
+        <p:txBody>
+          <a:bodyPr wrap="square" anchor="t" lIns="0" rIns="0" tIns="0" bIns="0">
+            <a:spAutoFit/>
+          </a:bodyPr>
+          <a:lstStyle/>
+          <a:p>
+            <a:pPr algn="l">
+              <a:lnSpc>
+                <a:spcPct val="122000"/>
+              </a:lnSpc>
+            </a:pPr>
+            <a:r>
+              <a:rPr sz="850" b="0">
+                <a:solidFill>
+                  <a:srgbClr val="6B6259"/>
+                </a:solidFill>
+                <a:latin typeface="맑은 고딕"/>
+              </a:rPr>
+              <a:t>라우터 근거 → 대조한 데이터 수 → 가드레일</a:t>
+            </a:r>
+          </a:p>
+          <a:p>
+            <a:pPr algn="l">
+              <a:lnSpc>
+                <a:spcPct val="122000"/>
+              </a:lnSpc>
+            </a:pPr>
+            <a:r>
+              <a:rPr sz="850" b="0">
+                <a:solidFill>
+                  <a:srgbClr val="6B6259"/>
+                </a:solidFill>
+                <a:latin typeface="맑은 고딕"/>
+              </a:rPr>
+              <a:t>검사까지 노드별 실측 ms로 전 과정 공개.</a:t>
+            </a:r>
+          </a:p>
+        </p:txBody>
+      </p:sp>
+      <p:sp>
+        <p:nvSpPr>
+          <p:cNvPr id="29" name="Rounded Rectangle 28"/>
+          <p:cNvSpPr/>
+          <p:nvPr/>
+        </p:nvSpPr>
+        <p:spPr>
+          <a:xfrm>
+            <a:off x="685800" y="4992624"/>
+            <a:ext cx="3401568" cy="1499616"/>
+          </a:xfrm>
+          <a:prstGeom prst="roundRect">
+            <a:avLst>
+              <a:gd name="adj" fmla="val 6000"/>
+            </a:avLst>
+          </a:prstGeom>
+          <a:solidFill>
+            <a:srgbClr val="FAF8F4"/>
+          </a:solidFill>
+          <a:ln w="12700">
+            <a:solidFill>
+              <a:srgbClr val="E4DED4"/>
+            </a:solidFill>
+          </a:ln>
+          <a:effectLst/>
+        </p:spPr>
+        <p:style>
+          <a:lnRef idx="1">
+            <a:schemeClr val="accent1"/>
+          </a:lnRef>
+          <a:fillRef idx="3">
+            <a:schemeClr val="accent1"/>
+          </a:fillRef>
+          <a:effectRef idx="2">
+            <a:schemeClr val="accent1"/>
+          </a:effectRef>
+          <a:fontRef idx="minor">
+            <a:schemeClr val="lt1"/>
+          </a:fontRef>
+        </p:style>
+        <p:txBody>
+          <a:bodyPr rtlCol="0" anchor="ctr"/>
+          <a:lstStyle/>
+          <a:p>
+            <a:pPr algn="ctr"/>
+          </a:p>
+        </p:txBody>
+      </p:sp>
+      <p:sp>
+        <p:nvSpPr>
+          <p:cNvPr id="30" name="TextBox 29"/>
+          <p:cNvSpPr txBox="1"/>
+          <p:nvPr/>
+        </p:nvSpPr>
+        <p:spPr>
+          <a:xfrm>
+            <a:off x="886968" y="5084064"/>
+            <a:ext cx="3017520" cy="292608"/>
+          </a:xfrm>
+          <a:prstGeom prst="rect">
+            <a:avLst/>
+          </a:prstGeom>
+          <a:noFill/>
+        </p:spPr>
+        <p:txBody>
+          <a:bodyPr wrap="square" anchor="t" lIns="0" rIns="0" tIns="0" bIns="0">
+            <a:spAutoFit/>
+          </a:bodyPr>
+          <a:lstStyle/>
+          <a:p>
+            <a:pPr algn="l">
+              <a:lnSpc>
+                <a:spcPct val="125000"/>
+              </a:lnSpc>
+            </a:pPr>
+            <a:r>
+              <a:rPr sz="1250" b="1">
+                <a:solidFill>
+                  <a:srgbClr val="38322A"/>
+                </a:solidFill>
+                <a:latin typeface="맑은 고딕"/>
+              </a:rPr>
+              <a:t>닮은 상권 찾기</a:t>
+            </a:r>
+          </a:p>
+        </p:txBody>
+      </p:sp>
+      <p:sp>
+        <p:nvSpPr>
+          <p:cNvPr id="31" name="TextBox 30"/>
+          <p:cNvSpPr txBox="1"/>
+          <p:nvPr/>
+        </p:nvSpPr>
+        <p:spPr>
+          <a:xfrm>
+            <a:off x="886968" y="5376672"/>
+            <a:ext cx="3017520" cy="256032"/>
+          </a:xfrm>
+          <a:prstGeom prst="rect">
+            <a:avLst/>
+          </a:prstGeom>
+          <a:noFill/>
+        </p:spPr>
+        <p:txBody>
+          <a:bodyPr wrap="square" anchor="t" lIns="0" rIns="0" tIns="0" bIns="0">
+            <a:spAutoFit/>
+          </a:bodyPr>
+          <a:lstStyle/>
+          <a:p>
+            <a:pPr algn="l">
+              <a:lnSpc>
+                <a:spcPct val="125000"/>
+              </a:lnSpc>
+            </a:pPr>
+            <a:r>
+              <a:rPr sz="900" b="1">
+                <a:solidFill>
+                  <a:srgbClr val="9A6B00"/>
+                </a:solidFill>
+                <a:latin typeface="맑은 고딕"/>
+              </a:rPr>
+              <a:t>업종 구성 247차원 코사인</a:t>
+            </a:r>
+          </a:p>
+        </p:txBody>
+      </p:sp>
+      <p:sp>
+        <p:nvSpPr>
+          <p:cNvPr id="32" name="TextBox 31"/>
+          <p:cNvSpPr txBox="1"/>
+          <p:nvPr/>
+        </p:nvSpPr>
+        <p:spPr>
+          <a:xfrm>
+            <a:off x="886968" y="5650992"/>
+            <a:ext cx="3054096" cy="777240"/>
+          </a:xfrm>
+          <a:prstGeom prst="rect">
+            <a:avLst/>
+          </a:prstGeom>
+          <a:noFill/>
+        </p:spPr>
+        <p:txBody>
+          <a:bodyPr wrap="square" anchor="t" lIns="0" rIns="0" tIns="0" bIns="0">
+            <a:spAutoFit/>
+          </a:bodyPr>
+          <a:lstStyle/>
+          <a:p>
+            <a:pPr algn="l">
+              <a:lnSpc>
+                <a:spcPct val="122000"/>
+              </a:lnSpc>
+            </a:pPr>
+            <a:r>
+              <a:rPr sz="850" b="0">
+                <a:solidFill>
+                  <a:srgbClr val="6B6259"/>
+                </a:solidFill>
+                <a:latin typeface="맑은 고딕"/>
+              </a:rPr>
+              <a:t>연남동 ↔ 광안리·서교동·망원동. '성격이</a:t>
+            </a:r>
+          </a:p>
+          <a:p>
+            <a:pPr algn="l">
+              <a:lnSpc>
+                <a:spcPct val="122000"/>
+              </a:lnSpc>
+            </a:pPr>
+            <a:r>
+              <a:rPr sz="850" b="0">
+                <a:solidFill>
+                  <a:srgbClr val="6B6259"/>
+                </a:solidFill>
+                <a:latin typeface="맑은 고딕"/>
+              </a:rPr>
+              <a:t>닮은' 동네 — 2호점 후보의 출발점. 0.4ms.</a:t>
+            </a:r>
+          </a:p>
+        </p:txBody>
+      </p:sp>
+      <p:sp>
+        <p:nvSpPr>
+          <p:cNvPr id="33" name="Rounded Rectangle 32"/>
+          <p:cNvSpPr/>
+          <p:nvPr/>
+        </p:nvSpPr>
+        <p:spPr>
+          <a:xfrm>
+            <a:off x="4361688" y="4992624"/>
+            <a:ext cx="3401568" cy="1499616"/>
+          </a:xfrm>
+          <a:prstGeom prst="roundRect">
+            <a:avLst>
+              <a:gd name="adj" fmla="val 6000"/>
+            </a:avLst>
+          </a:prstGeom>
+          <a:solidFill>
+            <a:srgbClr val="FAF8F4"/>
+          </a:solidFill>
+          <a:ln w="12700">
+            <a:solidFill>
+              <a:srgbClr val="E4DED4"/>
+            </a:solidFill>
+          </a:ln>
+          <a:effectLst/>
+        </p:spPr>
+        <p:style>
+          <a:lnRef idx="1">
+            <a:schemeClr val="accent1"/>
+          </a:lnRef>
+          <a:fillRef idx="3">
+            <a:schemeClr val="accent1"/>
+          </a:fillRef>
+          <a:effectRef idx="2">
+            <a:schemeClr val="accent1"/>
+          </a:effectRef>
+          <a:fontRef idx="minor">
+            <a:schemeClr val="lt1"/>
+          </a:fontRef>
+        </p:style>
+        <p:txBody>
+          <a:bodyPr rtlCol="0" anchor="ctr"/>
+          <a:lstStyle/>
+          <a:p>
+            <a:pPr algn="ctr"/>
+          </a:p>
+        </p:txBody>
+      </p:sp>
+      <p:sp>
+        <p:nvSpPr>
+          <p:cNvPr id="34" name="TextBox 33"/>
+          <p:cNvSpPr txBox="1"/>
+          <p:nvPr/>
+        </p:nvSpPr>
+        <p:spPr>
+          <a:xfrm>
+            <a:off x="4562856" y="5084064"/>
+            <a:ext cx="3017520" cy="292608"/>
+          </a:xfrm>
+          <a:prstGeom prst="rect">
+            <a:avLst/>
+          </a:prstGeom>
+          <a:noFill/>
+        </p:spPr>
+        <p:txBody>
+          <a:bodyPr wrap="square" anchor="t" lIns="0" rIns="0" tIns="0" bIns="0">
+            <a:spAutoFit/>
+          </a:bodyPr>
+          <a:lstStyle/>
+          <a:p>
+            <a:pPr algn="l">
+              <a:lnSpc>
+                <a:spcPct val="125000"/>
+              </a:lnSpc>
+            </a:pPr>
+            <a:r>
+              <a:rPr sz="1250" b="1">
+                <a:solidFill>
+                  <a:srgbClr val="38322A"/>
+                </a:solidFill>
+                <a:latin typeface="맑은 고딕"/>
+              </a:rPr>
+              <a:t>음성 대화 + 지도 투어</a:t>
+            </a:r>
+          </a:p>
+        </p:txBody>
+      </p:sp>
+      <p:sp>
+        <p:nvSpPr>
+          <p:cNvPr id="35" name="TextBox 34"/>
+          <p:cNvSpPr txBox="1"/>
+          <p:nvPr/>
+        </p:nvSpPr>
+        <p:spPr>
+          <a:xfrm>
+            <a:off x="4562856" y="5376672"/>
+            <a:ext cx="3017520" cy="256032"/>
+          </a:xfrm>
+          <a:prstGeom prst="rect">
+            <a:avLst/>
+          </a:prstGeom>
+          <a:noFill/>
+        </p:spPr>
+        <p:txBody>
+          <a:bodyPr wrap="square" anchor="t" lIns="0" rIns="0" tIns="0" bIns="0">
+            <a:spAutoFit/>
+          </a:bodyPr>
+          <a:lstStyle/>
+          <a:p>
+            <a:pPr algn="l">
+              <a:lnSpc>
+                <a:spcPct val="125000"/>
+              </a:lnSpc>
+            </a:pPr>
+            <a:r>
+              <a:rPr sz="900" b="1">
+                <a:solidFill>
+                  <a:srgbClr val="9A6B00"/>
+                </a:solidFill>
+                <a:latin typeface="맑은 고딕"/>
+              </a:rPr>
+              <a:t>브라우저 내장 · 다운로드 0</a:t>
+            </a:r>
+          </a:p>
+        </p:txBody>
+      </p:sp>
+      <p:sp>
+        <p:nvSpPr>
+          <p:cNvPr id="36" name="TextBox 35"/>
+          <p:cNvSpPr txBox="1"/>
+          <p:nvPr/>
+        </p:nvSpPr>
+        <p:spPr>
+          <a:xfrm>
+            <a:off x="4562856" y="5650992"/>
+            <a:ext cx="3054096" cy="777240"/>
+          </a:xfrm>
+          <a:prstGeom prst="rect">
+            <a:avLst/>
+          </a:prstGeom>
+          <a:noFill/>
+        </p:spPr>
+        <p:txBody>
+          <a:bodyPr wrap="square" anchor="t" lIns="0" rIns="0" tIns="0" bIns="0">
+            <a:spAutoFit/>
+          </a:bodyPr>
+          <a:lstStyle/>
+          <a:p>
+            <a:pPr algn="l">
+              <a:lnSpc>
+                <a:spcPct val="122000"/>
+              </a:lnSpc>
+            </a:pPr>
+            <a:r>
+              <a:rPr sz="850" b="0">
+                <a:solidFill>
+                  <a:srgbClr val="6B6259"/>
+                </a:solidFill>
+                <a:latin typeface="맑은 고딕"/>
+              </a:rPr>
+              <a:t>말로 묻고 꿀비가 읽어 줍니다. 전국에서 그</a:t>
+            </a:r>
+          </a:p>
+          <a:p>
+            <a:pPr algn="l">
+              <a:lnSpc>
+                <a:spcPct val="122000"/>
+              </a:lnSpc>
+            </a:pPr>
+            <a:r>
+              <a:rPr sz="850" b="0">
+                <a:solidFill>
+                  <a:srgbClr val="6B6259"/>
+                </a:solidFill>
+                <a:latin typeface="맑은 고딕"/>
+              </a:rPr>
+              <a:t>동네로 날아드는 4막 투어 — 금융 접근성.</a:t>
+            </a:r>
+          </a:p>
+        </p:txBody>
+      </p:sp>
+      <p:sp>
+        <p:nvSpPr>
+          <p:cNvPr id="37" name="Rounded Rectangle 36"/>
+          <p:cNvSpPr/>
+          <p:nvPr/>
+        </p:nvSpPr>
+        <p:spPr>
+          <a:xfrm>
+            <a:off x="8037575" y="4992624"/>
+            <a:ext cx="3401568" cy="1499616"/>
+          </a:xfrm>
+          <a:prstGeom prst="roundRect">
+            <a:avLst>
+              <a:gd name="adj" fmla="val 6000"/>
+            </a:avLst>
+          </a:prstGeom>
+          <a:solidFill>
+            <a:srgbClr val="FAF8F4"/>
+          </a:solidFill>
+          <a:ln w="12700">
+            <a:solidFill>
+              <a:srgbClr val="E4DED4"/>
+            </a:solidFill>
+          </a:ln>
+          <a:effectLst/>
+        </p:spPr>
+        <p:style>
+          <a:lnRef idx="1">
+            <a:schemeClr val="accent1"/>
+          </a:lnRef>
+          <a:fillRef idx="3">
+            <a:schemeClr val="accent1"/>
+          </a:fillRef>
+          <a:effectRef idx="2">
+            <a:schemeClr val="accent1"/>
+          </a:effectRef>
+          <a:fontRef idx="minor">
+            <a:schemeClr val="lt1"/>
+          </a:fontRef>
+        </p:style>
+        <p:txBody>
+          <a:bodyPr rtlCol="0" anchor="ctr"/>
+          <a:lstStyle/>
+          <a:p>
+            <a:pPr algn="ctr"/>
+          </a:p>
+        </p:txBody>
+      </p:sp>
+      <p:sp>
+        <p:nvSpPr>
+          <p:cNvPr id="38" name="TextBox 37"/>
+          <p:cNvSpPr txBox="1"/>
+          <p:nvPr/>
+        </p:nvSpPr>
+        <p:spPr>
+          <a:xfrm>
+            <a:off x="8238743" y="5084064"/>
+            <a:ext cx="3017520" cy="292608"/>
+          </a:xfrm>
+          <a:prstGeom prst="rect">
+            <a:avLst/>
+          </a:prstGeom>
+          <a:noFill/>
+        </p:spPr>
+        <p:txBody>
+          <a:bodyPr wrap="square" anchor="t" lIns="0" rIns="0" tIns="0" bIns="0">
+            <a:spAutoFit/>
+          </a:bodyPr>
+          <a:lstStyle/>
+          <a:p>
+            <a:pPr algn="l">
+              <a:lnSpc>
+                <a:spcPct val="125000"/>
+              </a:lnSpc>
+            </a:pPr>
+            <a:r>
+              <a:rPr sz="1250" b="1">
+                <a:solidFill>
+                  <a:srgbClr val="38322A"/>
+                </a:solidFill>
+                <a:latin typeface="맑은 고딕"/>
+              </a:rPr>
               <a:t>계산기 두 대</a:t>
             </a:r>
           </a:p>
@@ -14308,33 +15140,33 @@
       </p:sp>
       <p:sp>
         <p:nvSpPr>
-          <p:cNvPr id="27" name="TextBox 26"/>
-          <p:cNvSpPr txBox="1"/>
-          <p:nvPr/>
-        </p:nvSpPr>
-        <p:spPr>
-          <a:xfrm>
-            <a:off x="8266175" y="4754880"/>
-            <a:ext cx="2971800" cy="320040"/>
-          </a:xfrm>
-          <a:prstGeom prst="rect">
-            <a:avLst/>
-          </a:prstGeom>
-          <a:noFill/>
-        </p:spPr>
-        <p:txBody>
-          <a:bodyPr wrap="square" anchor="t" lIns="0" rIns="0" tIns="0" bIns="0">
-            <a:spAutoFit/>
-          </a:bodyPr>
-          <a:lstStyle/>
-          <a:p>
-            <a:pPr algn="l">
-              <a:lnSpc>
-                <a:spcPct val="125000"/>
-              </a:lnSpc>
-            </a:pPr>
-            <a:r>
-              <a:rPr sz="1050" b="1">
+          <p:cNvPr id="39" name="TextBox 38"/>
+          <p:cNvSpPr txBox="1"/>
+          <p:nvPr/>
+        </p:nvSpPr>
+        <p:spPr>
+          <a:xfrm>
+            <a:off x="8238743" y="5376672"/>
+            <a:ext cx="3017520" cy="256032"/>
+          </a:xfrm>
+          <a:prstGeom prst="rect">
+            <a:avLst/>
+          </a:prstGeom>
+          <a:noFill/>
+        </p:spPr>
+        <p:txBody>
+          <a:bodyPr wrap="square" anchor="t" lIns="0" rIns="0" tIns="0" bIns="0">
+            <a:spAutoFit/>
+          </a:bodyPr>
+          <a:lstStyle/>
+          <a:p>
+            <a:pPr algn="l">
+              <a:lnSpc>
+                <a:spcPct val="125000"/>
+              </a:lnSpc>
+            </a:pPr>
+            <a:r>
+              <a:rPr sz="900" b="1">
                 <a:solidFill>
                   <a:srgbClr val="9A6B00"/>
                 </a:solidFill>
@@ -14347,71 +15179,55 @@
       </p:sp>
       <p:sp>
         <p:nvSpPr>
-          <p:cNvPr id="28" name="TextBox 27"/>
-          <p:cNvSpPr txBox="1"/>
-          <p:nvPr/>
-        </p:nvSpPr>
-        <p:spPr>
-          <a:xfrm>
-            <a:off x="8266175" y="5093208"/>
-            <a:ext cx="3017520" cy="1280160"/>
-          </a:xfrm>
-          <a:prstGeom prst="rect">
-            <a:avLst/>
-          </a:prstGeom>
-          <a:noFill/>
-        </p:spPr>
-        <p:txBody>
-          <a:bodyPr wrap="square" anchor="t" lIns="0" rIns="0" tIns="0" bIns="0">
-            <a:spAutoFit/>
-          </a:bodyPr>
-          <a:lstStyle/>
-          <a:p>
-            <a:pPr algn="l">
-              <a:lnSpc>
-                <a:spcPct val="132000"/>
-              </a:lnSpc>
-            </a:pPr>
-            <a:r>
-              <a:rPr sz="1000" b="0">
+          <p:cNvPr id="40" name="TextBox 39"/>
+          <p:cNvSpPr txBox="1"/>
+          <p:nvPr/>
+        </p:nvSpPr>
+        <p:spPr>
+          <a:xfrm>
+            <a:off x="8238743" y="5650992"/>
+            <a:ext cx="3054096" cy="777240"/>
+          </a:xfrm>
+          <a:prstGeom prst="rect">
+            <a:avLst/>
+          </a:prstGeom>
+          <a:noFill/>
+        </p:spPr>
+        <p:txBody>
+          <a:bodyPr wrap="square" anchor="t" lIns="0" rIns="0" tIns="0" bIns="0">
+            <a:spAutoFit/>
+          </a:bodyPr>
+          <a:lstStyle/>
+          <a:p>
+            <a:pPr algn="l">
+              <a:lnSpc>
+                <a:spcPct val="122000"/>
+              </a:lnSpc>
+            </a:pPr>
+            <a:r>
+              <a:rPr sz="850" b="0">
                 <a:solidFill>
                   <a:srgbClr val="6B6259"/>
                 </a:solidFill>
                 <a:latin typeface="맑은 고딕"/>
               </a:rPr>
-              <a:t>매칭 공고의 한도·금리가 자동으로 채워지는</a:t>
-            </a:r>
-          </a:p>
-          <a:p>
-            <a:pPr algn="l">
-              <a:lnSpc>
-                <a:spcPct val="132000"/>
-              </a:lnSpc>
-            </a:pPr>
-            <a:r>
-              <a:rPr sz="1000" b="0">
+              <a:t>공고 한도·금리 자동 입력 상환 시뮬레이터</a:t>
+            </a:r>
+          </a:p>
+          <a:p>
+            <a:pPr algn="l">
+              <a:lnSpc>
+                <a:spcPct val="122000"/>
+              </a:lnSpc>
+            </a:pPr>
+            <a:r>
+              <a:rPr sz="850" b="0">
                 <a:solidFill>
                   <a:srgbClr val="6B6259"/>
                 </a:solidFill>
                 <a:latin typeface="맑은 고딕"/>
               </a:rPr>
-              <a:t>상환 시뮬레이터(원리금·원금·만기일시)와</a:t>
-            </a:r>
-          </a:p>
-          <a:p>
-            <a:pPr algn="l">
-              <a:lnSpc>
-                <a:spcPct val="132000"/>
-              </a:lnSpc>
-            </a:pPr>
-            <a:r>
-              <a:rPr sz="1000" b="0">
-                <a:solidFill>
-                  <a:srgbClr val="6B6259"/>
-                </a:solidFill>
-                <a:latin typeface="맑은 고딕"/>
-              </a:rPr>
-              <a:t>손익분기 계산기. 확약 아님을 화면에 명시.</a:t>
+              <a:t>+ 손익분기. 확약 아님을 화면에 명시.</a:t>
             </a:r>
           </a:p>
         </p:txBody>
